--- a/presentation/Sowing-the-Best.pptx
+++ b/presentation/Sowing-the-Best.pptx
@@ -34,10 +34,9 @@
     <p:sldId id="282" r:id="rId28"/>
     <p:sldId id="283" r:id="rId29"/>
     <p:sldId id="284" r:id="rId30"/>
-    <p:sldId id="285" r:id="rId31"/>
   </p:sldIdLst>
   <p:notesMasterIdLst>
-    <p:notesMasterId r:id="rId32"/>
+    <p:notesMasterId r:id="rId31"/>
   </p:notesMasterIdLst>
   <p:sldSz cx="12192000" cy="6858000"/>
   <p:notesSz cx="6858000" cy="12192000"/>
@@ -136,7 +135,7 @@
   <p:extLst>
     <p:ext uri="{521415D9-36F7-43E2-AB2F-B90AF26B5E84}">
       <p14:sectionLst xmlns:p14="http://schemas.microsoft.com/office/powerpoint/2010/main">
-        <p14:section name="Introduction" id="{f9260ad2-c6b3-09d3-0f2a-0529492f97e9}">
+        <p14:section name="Introduction" id="{52b120bb-0d07-13c5-ec91-aace210e6716}">
           <p14:sldIdLst>
             <p14:sldId id="256"/>
             <p14:sldId id="257"/>
@@ -145,7 +144,7 @@
             <p14:sldId id="260"/>
           </p14:sldIdLst>
         </p14:section>
-        <p14:section name="1. Sow Positive Attitudes" id="{7048b6d1-25b3-5bdb-d668-c2631f69d22e}">
+        <p14:section name="1. Sow Positive Attitudes" id="{80613c63-36fc-b62d-45e5-0649713405ee}">
           <p14:sldIdLst>
             <p14:sldId id="261"/>
             <p14:sldId id="262"/>
@@ -153,7 +152,7 @@
             <p14:sldId id="264"/>
           </p14:sldIdLst>
         </p14:section>
-        <p14:section name="2. Sow Integrity" id="{a2ca0310-371e-bf9d-729e-5e2d12a7b3a0}">
+        <p14:section name="2. Sow Integrity" id="{417fbb6c-8ae0-3fdb-ffcc-8fa331a796d9}">
           <p14:sldIdLst>
             <p14:sldId id="265"/>
             <p14:sldId id="266"/>
@@ -161,7 +160,7 @@
             <p14:sldId id="268"/>
           </p14:sldIdLst>
         </p14:section>
-        <p14:section name="3. Sow Spirituality" id="{508948fd-2212-6809-e9db-d436d7d228b9}">
+        <p14:section name="3. Sow Spirituality" id="{a9ac4811-c681-3a11-804e-7df781e9e99a}">
           <p14:sldIdLst>
             <p14:sldId id="269"/>
             <p14:sldId id="270"/>
@@ -169,7 +168,7 @@
             <p14:sldId id="272"/>
           </p14:sldIdLst>
         </p14:section>
-        <p14:section name="4. Sow Discipline" id="{e41c832a-34fe-0a68-e80a-95f018647f8a}">
+        <p14:section name="4. Sow Discipline" id="{4f1ed204-8844-5935-264b-e8ca2a6c6bd7}">
           <p14:sldIdLst>
             <p14:sldId id="273"/>
             <p14:sldId id="274"/>
@@ -178,7 +177,7 @@
             <p14:sldId id="277"/>
           </p14:sldIdLst>
         </p14:section>
-        <p14:section name="5. Sow A Correct Image" id="{c52179ec-04cb-e411-ec82-6e435db0f601}">
+        <p14:section name="5. Sow A Correct Image" id="{901d755b-d7b8-68d8-7842-35ac0522a5a1}">
           <p14:sldIdLst>
             <p14:sldId id="278"/>
             <p14:sldId id="279"/>
@@ -188,10 +187,9 @@
             <p14:sldId id="283"/>
           </p14:sldIdLst>
         </p14:section>
-        <p14:section name="Conclusion" id="{7d547f1c-1e7a-ff80-b9b9-6aa1e069847a}">
+        <p14:section name="Summary" id="{54ff8e5e-4add-4978-22ea-d0425f4481c3}">
           <p14:sldIdLst>
             <p14:sldId id="284"/>
-            <p14:sldId id="285"/>
           </p14:sldIdLst>
         </p14:section>
       </p14:sectionLst>
@@ -598,7 +596,7 @@
           <a:p>
             <a:r>
               <a:rPr lang="en-US" dirty="0"/>
-              <a:t>Lesson 8: Sowing the Best. Welcome everyone. Today we learn how to sow positive seeds into the lives of our family and friends.</a:t>
+              <a:t>Sowing the Best</a:t>
             </a:r>
             <a:endParaRPr lang="en-US" dirty="0"/>
           </a:p>
@@ -686,7 +684,7 @@
           <a:p>
             <a:r>
               <a:rPr lang="en-US" dirty="0"/>
-              <a:t>2. Sow integrity.</a:t>
+              <a:t>2. Sow Integrity</a:t>
             </a:r>
             <a:endParaRPr lang="en-US" dirty="0"/>
           </a:p>
@@ -774,7 +772,7 @@
           <a:p>
             <a:r>
               <a:rPr lang="en-US" dirty="0"/>
-              <a:t>1 Timothy 4:7–8 (NIV): Have nothing to do with godless myths and old wives’ tales; rather, train yourself to be godly. For physical training is of some value, but godliness has value for all things, holding promise for both the present life and the life to come.</a:t>
+              <a:t>1 Timothy 4:7–8 (NIV): Have nothing to do with godless myths and old lives' tales; rather, train yourself to be godly.  For physical training is of some value, but godliness has value for all things, holding promise for both the present life and the life to come.</a:t>
             </a:r>
             <a:endParaRPr lang="en-US" dirty="0"/>
           </a:p>
@@ -862,7 +860,10 @@
           <a:p>
             <a:r>
               <a:rPr lang="en-US" dirty="0"/>
-              <a:t>Walking in integrity and godliness. The Bible says, 'Train yourself to be godly.' To be godly means to live a God-centered life. Integrity is the quality of being upright morally.</a:t>
+              <a:t>Walking in integrity and godliness
+- The Bible says, “Train yourself to be godly.”
+- To be godly means to live a God centered life
+- Integrity is the quality of being upright morally</a:t>
             </a:r>
             <a:endParaRPr lang="en-US" dirty="0"/>
           </a:p>
@@ -950,7 +951,8 @@
           <a:p>
             <a:r>
               <a:rPr lang="en-US" dirty="0"/>
-              <a:t>To live in integrity means to live on what is right all the time. NO COMPROMISE with sin.</a:t>
+              <a:t>Walking in integrity and godliness
+- To live in integrity means to live on what is right all the time. NO COMPROMISE with sin.</a:t>
             </a:r>
             <a:endParaRPr lang="en-US" dirty="0"/>
           </a:p>
@@ -1038,7 +1040,7 @@
           <a:p>
             <a:r>
               <a:rPr lang="en-US" dirty="0"/>
-              <a:t>3. Sow spirituality.</a:t>
+              <a:t>3. Sow Spirituality</a:t>
             </a:r>
             <a:endParaRPr lang="en-US" dirty="0"/>
           </a:p>
@@ -1126,7 +1128,7 @@
           <a:p>
             <a:r>
               <a:rPr lang="en-US" dirty="0"/>
-              <a:t>Matthew 5:14 (NLT): You are the light of the world, like a city on a mountain, glowing in the night for all to see.</a:t>
+              <a:t>Matthew 5:14 (NLT) You are the light of the world—like a city on a mountain, glowing in the night for all to see.</a:t>
             </a:r>
             <a:endParaRPr lang="en-US" dirty="0"/>
           </a:p>
@@ -1214,7 +1216,7 @@
           <a:p>
             <a:r>
               <a:rPr lang="en-US" dirty="0"/>
-              <a:t>Sowing spirituality means you are bringing the presence of God into your home, school and workplace.</a:t>
+              <a:t>Sowing spirituality means you are bringing the presence of God into your home, school and workplace</a:t>
             </a:r>
             <a:endParaRPr lang="en-US" dirty="0"/>
           </a:p>
@@ -1302,7 +1304,11 @@
           <a:p>
             <a:r>
               <a:rPr lang="en-US" dirty="0"/>
-              <a:t>How to sow spirituality? I. Manifest the Christ-like character. II. Bring prayer. III. Bring the Word of God. IV. Bring the cell group into your home, schools, and workplace.</a:t>
+              <a:t>How to sow spirituality?
+I. Manifest the Christ-like character
+II. Bring prayer
+III. Bring the Word of God
+IV. Bring the cell group into your home, schools, and workplace</a:t>
             </a:r>
             <a:endParaRPr lang="en-US" dirty="0"/>
           </a:p>
@@ -1390,7 +1396,7 @@
           <a:p>
             <a:r>
               <a:rPr lang="en-US" dirty="0"/>
-              <a:t>4. Sow discipline.</a:t>
+              <a:t>4. Sow Discipline</a:t>
             </a:r>
             <a:endParaRPr lang="en-US" dirty="0"/>
           </a:p>
@@ -1478,7 +1484,7 @@
           <a:p>
             <a:r>
               <a:rPr lang="en-US" dirty="0"/>
-              <a:t>Discipline is self control.</a:t>
+              <a:t>Discipline is self control</a:t>
             </a:r>
             <a:endParaRPr lang="en-US" dirty="0"/>
           </a:p>
@@ -1566,7 +1572,7 @@
           <a:p>
             <a:r>
               <a:rPr lang="en-US" dirty="0"/>
-              <a:t>Now that we are healed and delivered from our old life, let us sow positive seeds to our family and friends.</a:t>
+              <a:t>Now that we are healed and delivered from our old life let us sow positive seeds to our family and friends</a:t>
             </a:r>
             <a:endParaRPr lang="en-US" dirty="0"/>
           </a:p>
@@ -1654,7 +1660,10 @@
           <a:p>
             <a:r>
               <a:rPr lang="en-US" dirty="0"/>
-              <a:t>Discipline means: Self control; not impulsive and uncontrolled. Order and proper management. Sticking to right priorities and activities.</a:t>
+              <a:t>Discipline means:
+- Self control; not impulsive and uncontrolled
+- Order and proper management
+- Sticking to right priorities and activities</a:t>
             </a:r>
             <a:endParaRPr lang="en-US" dirty="0"/>
           </a:p>
@@ -1918,7 +1927,7 @@
           <a:p>
             <a:r>
               <a:rPr lang="en-US" dirty="0"/>
-              <a:t>5. Sow a correct image.</a:t>
+              <a:t>5. Sow A Correct Image</a:t>
             </a:r>
             <a:endParaRPr lang="en-US" dirty="0"/>
           </a:p>
@@ -2006,7 +2015,7 @@
           <a:p>
             <a:r>
               <a:rPr lang="en-US" dirty="0"/>
-              <a:t>To sow a correct image is to be at peace with yourself.</a:t>
+              <a:t>To sow a correct image is to be at peace with yourself</a:t>
             </a:r>
             <a:endParaRPr lang="en-US" dirty="0"/>
           </a:p>
@@ -2094,7 +2103,10 @@
           <a:p>
             <a:r>
               <a:rPr lang="en-US" dirty="0"/>
-              <a:t>Having a correct image means: You have a positive self esteem. You feel good about yourself. You have a healthy outlook of who you are in Christ.</a:t>
+              <a:t>Having a correct image means:
+- You have a positive self esteem.
+- You feel good about yourself.
+- You have a healthy outlook of who you are in Christ.</a:t>
             </a:r>
             <a:endParaRPr lang="en-US" dirty="0"/>
           </a:p>
@@ -2182,7 +2194,9 @@
           <a:p>
             <a:r>
               <a:rPr lang="en-US" dirty="0"/>
-              <a:t>You see yourself the way God sees you: unique, precious, lovable and important. You see yourself as a winner in Christ and not a failure.</a:t>
+              <a:t>Having a correct image means:
+- You see yourself the way God sees you. Unique, precious, lovable and important.
+- You see yourself as a winner in Christ and not a failure.</a:t>
             </a:r>
             <a:endParaRPr lang="en-US" dirty="0"/>
           </a:p>
@@ -2270,7 +2284,7 @@
           <a:p>
             <a:r>
               <a:rPr lang="en-US" dirty="0"/>
-              <a:t>Psalm 139:13–14 (NIV): For you created my inmost being; you knit me together in my mother’s womb. I praise you because I am fearfully and wonderfully made; your works are wonderful, I know that full well.</a:t>
+              <a:t>Psalms 139:13–14 (NIV): For you created my inmost being; you knit me together in my mother's womb.   I praise you because I am fearfully and wonderfully made; your works are wonderful, I know that full well.</a:t>
             </a:r>
             <a:endParaRPr lang="en-US" dirty="0"/>
           </a:p>
@@ -2446,7 +2460,12 @@
           <a:p>
             <a:r>
               <a:rPr lang="en-US" dirty="0"/>
-              <a:t>Summary - Sowing the Best: 1. Sow positive attitudes. 2. Sow integrity. 3. Sow spirituality. 4. Sow discipline. 5. Sow a correct image.</a:t>
+              <a:t>Sowing the Best:
+1. Sow positive attitudes
+2. Sow integrity
+3. Sow spirituality
+4. Sow discipline
+5. Sow a correct image</a:t>
             </a:r>
             <a:endParaRPr lang="en-US" dirty="0"/>
           </a:p>
@@ -2576,94 +2595,6 @@
 </p:notes>
 </file>
 
-<file path=ppt/notesSlides/notesSlide30.xml><?xml version="1.0" encoding="utf-8"?>
-<p:notes xmlns:a="http://schemas.openxmlformats.org/drawingml/2006/main" xmlns:r="http://schemas.openxmlformats.org/officeDocument/2006/relationships" xmlns:p="http://schemas.openxmlformats.org/presentationml/2006/main">
-  <p:cSld>
-    <p:spTree>
-      <p:nvGrpSpPr>
-        <p:cNvPr id="1" name=""/>
-        <p:cNvGrpSpPr/>
-        <p:nvPr/>
-      </p:nvGrpSpPr>
-      <p:grpSpPr>
-        <a:xfrm>
-          <a:off x="0" y="0"/>
-          <a:ext cx="0" cy="0"/>
-          <a:chOff x="0" y="0"/>
-          <a:chExt cx="0" cy="0"/>
-        </a:xfrm>
-      </p:grpSpPr>
-      <p:sp>
-        <p:nvSpPr>
-          <p:cNvPr id="2" name="Slide Image Placeholder 1"/>
-          <p:cNvSpPr>
-            <a:spLocks noGrp="1" noRot="1" noChangeAspect="1"/>
-          </p:cNvSpPr>
-          <p:nvPr>
-            <p:ph type="sldImg"/>
-          </p:nvPr>
-        </p:nvSpPr>
-        <p:spPr/>
-      </p:sp>
-      <p:sp>
-        <p:nvSpPr>
-          <p:cNvPr id="3" name="Notes Placeholder 2"/>
-          <p:cNvSpPr>
-            <a:spLocks noGrp="1"/>
-          </p:cNvSpPr>
-          <p:nvPr>
-            <p:ph type="body" idx="1"/>
-          </p:nvPr>
-        </p:nvSpPr>
-        <p:spPr/>
-        <p:txBody>
-          <a:bodyPr/>
-          <a:lstStyle/>
-          <a:p>
-            <a:r>
-              <a:rPr lang="en-US" dirty="0"/>
-              <a:t>Closing: A man reaps what he sows. Let us go and sow the best into our family and friends this week.</a:t>
-            </a:r>
-            <a:endParaRPr lang="en-US" dirty="0"/>
-          </a:p>
-        </p:txBody>
-      </p:sp>
-      <p:sp>
-        <p:nvSpPr>
-          <p:cNvPr id="4" name="Slide Number Placeholder 3"/>
-          <p:cNvSpPr>
-            <a:spLocks noGrp="1"/>
-          </p:cNvSpPr>
-          <p:nvPr>
-            <p:ph type="sldNum" sz="quarter" idx="10"/>
-          </p:nvPr>
-        </p:nvSpPr>
-        <p:spPr/>
-        <p:txBody>
-          <a:bodyPr/>
-          <a:lstStyle/>
-          <a:p>
-            <a:fld id="{F7021451-1387-4CA6-816F-3879F97B5CBC}" type="slidenum">
-              <a:rPr lang="en-US"/>
-              <a:t>30</a:t>
-            </a:fld>
-            <a:endParaRPr lang="en-US"/>
-          </a:p>
-        </p:txBody>
-      </p:sp>
-    </p:spTree>
-    <p:extLst>
-      <p:ext uri="{BB962C8B-B14F-4D97-AF65-F5344CB8AC3E}">
-        <p14:creationId xmlns:p14="http://schemas.microsoft.com/office/powerpoint/2010/main" val="1024086991"/>
-      </p:ext>
-    </p:extLst>
-  </p:cSld>
-  <p:clrMapOvr>
-    <a:masterClrMapping/>
-  </p:clrMapOvr>
-</p:notes>
-</file>
-
 <file path=ppt/notesSlides/notesSlide4.xml><?xml version="1.0" encoding="utf-8"?>
 <p:notes xmlns:a="http://schemas.openxmlformats.org/drawingml/2006/main" xmlns:r="http://schemas.openxmlformats.org/officeDocument/2006/relationships" xmlns:p="http://schemas.openxmlformats.org/presentationml/2006/main">
   <p:cSld>
@@ -2710,7 +2641,7 @@
           <a:p>
             <a:r>
               <a:rPr lang="en-US" dirty="0"/>
-              <a:t>If we sow positive things, we will reap a good harvest. What we plant today is what we will harvest tomorrow.</a:t>
+              <a:t>If we sow positive things we will reap a good harvest</a:t>
             </a:r>
             <a:endParaRPr lang="en-US" dirty="0"/>
           </a:p>
@@ -2798,7 +2729,7 @@
           <a:p>
             <a:r>
               <a:rPr lang="en-US" dirty="0"/>
-              <a:t>Here are 5 things we can start to sow: 1. Positive attitudes, 2. Integrity, 3. Spirituality, 4. Discipline, 5. A correct image.</a:t>
+              <a:t>Here are 5 things we can start to sow:</a:t>
             </a:r>
             <a:endParaRPr lang="en-US" dirty="0"/>
           </a:p>
@@ -2886,7 +2817,7 @@
           <a:p>
             <a:r>
               <a:rPr lang="en-US" dirty="0"/>
-              <a:t>1. Sow positive attitudes. There are three ways we can do this.</a:t>
+              <a:t>1. Sow Positive Attitudes</a:t>
             </a:r>
             <a:endParaRPr lang="en-US" dirty="0"/>
           </a:p>
@@ -2974,7 +2905,8 @@
           <a:p>
             <a:r>
               <a:rPr lang="en-US" dirty="0"/>
-              <a:t/>
+              <a:t>I. Be positive in your words
+Ephesians 4:29 (NIV) Do not let any unwholesome talk come out of your mouths, but only what is helpful for building others up according to their needs, that it may benefit those who listen.</a:t>
             </a:r>
             <a:endParaRPr lang="en-US" dirty="0"/>
           </a:p>
@@ -3062,7 +2994,8 @@
           <a:p>
             <a:r>
               <a:rPr lang="en-US" dirty="0"/>
-              <a:t/>
+              <a:t>II. Sow good works
+Matthew 5:16 (NIV) In the same way, let your light shine before men, that they may see your good deeds and praise your Father in heaven.</a:t>
             </a:r>
             <a:endParaRPr lang="en-US" dirty="0"/>
           </a:p>
@@ -3150,7 +3083,8 @@
           <a:p>
             <a:r>
               <a:rPr lang="en-US" dirty="0"/>
-              <a:t>III. Be kind and loving in how you relate to others. Ephesians 4:31-32 (NIV): Get rid of all bitterness, rage and anger, brawling and slander, along with every form of malice. Be kind and compassionate to one another...</a:t>
+              <a:t>III. Be kind and loving in how you relate to others
+Ephesians 4:31–32 (NIV) Get rid of all bitterness, rage and anger, brawling and slander, along with every form of malice.  Be kind and compassionate to one another…</a:t>
             </a:r>
             <a:endParaRPr lang="en-US" dirty="0"/>
           </a:p>
@@ -3840,12 +3774,12 @@
         </p:nvSpPr>
         <p:spPr>
           <a:xfrm>
-            <a:off x="548640" y="1051560"/>
-            <a:ext cx="6126480" cy="4754880"/>
+            <a:off x="548640" y="1463040"/>
+            <a:ext cx="6126480" cy="3291840"/>
           </a:xfrm>
           <a:prstGeom prst="roundRect">
             <a:avLst>
-              <a:gd name="adj" fmla="val 4808"/>
+              <a:gd name="adj" fmla="val 6944"/>
             </a:avLst>
           </a:prstGeom>
           <a:solidFill>
@@ -3864,8 +3798,8 @@
         </p:nvSpPr>
         <p:spPr>
           <a:xfrm>
-            <a:off x="1005840" y="1463040"/>
-            <a:ext cx="5303520" cy="548640"/>
+            <a:off x="1005840" y="1737360"/>
+            <a:ext cx="5394960" cy="2743200"/>
           </a:xfrm>
           <a:prstGeom prst="rect">
             <a:avLst/>
@@ -3881,43 +3815,7 @@
               <a:buNone/>
             </a:pPr>
             <a:r>
-              <a:rPr lang="en-US" sz="2600" b="1" spc="1000" kern="0" dirty="0">
-                <a:solidFill>
-                  <a:schemeClr val="accent1"/>
-                </a:solidFill>
-              </a:rPr>
-              <a:t>LESSON 8</a:t>
-            </a:r>
-            <a:endParaRPr lang="en-US" sz="2600" dirty="0"/>
-          </a:p>
-        </p:txBody>
-      </p:sp>
-      <p:sp>
-        <p:nvSpPr>
-          <p:cNvPr id="5" name="Text 2"/>
-          <p:cNvSpPr txBox="1"/>
-          <p:nvPr/>
-        </p:nvSpPr>
-        <p:spPr>
-          <a:xfrm>
-            <a:off x="1005840" y="2057400"/>
-            <a:ext cx="5394960" cy="2194560"/>
-          </a:xfrm>
-          <a:prstGeom prst="rect">
-            <a:avLst/>
-          </a:prstGeom>
-          <a:noFill/>
-          <a:ln/>
-        </p:spPr>
-        <p:txBody>
-          <a:bodyPr wrap="square" lIns="0" tIns="0" rIns="0" bIns="0" rtlCol="0" anchor="t"/>
-          <a:lstStyle/>
-          <a:p>
-            <a:pPr indent="0" marL="0">
-              <a:buNone/>
-            </a:pPr>
-            <a:r>
-              <a:rPr lang="en-US" sz="7000" b="1" dirty="0">
+              <a:rPr lang="en-US" sz="7600" b="1" dirty="0">
                 <a:solidFill>
                   <a:schemeClr val="bg1"/>
                 </a:solidFill>
@@ -3927,43 +3825,7 @@
               </a:rPr>
               <a:t>Sowing the Best</a:t>
             </a:r>
-            <a:endParaRPr lang="en-US" sz="7000" dirty="0"/>
-          </a:p>
-        </p:txBody>
-      </p:sp>
-      <p:sp>
-        <p:nvSpPr>
-          <p:cNvPr id="6" name="Text 3"/>
-          <p:cNvSpPr txBox="1"/>
-          <p:nvPr/>
-        </p:nvSpPr>
-        <p:spPr>
-          <a:xfrm>
-            <a:off x="1005840" y="4434840"/>
-            <a:ext cx="5303520" cy="914400"/>
-          </a:xfrm>
-          <a:prstGeom prst="rect">
-            <a:avLst/>
-          </a:prstGeom>
-          <a:noFill/>
-          <a:ln/>
-        </p:spPr>
-        <p:txBody>
-          <a:bodyPr wrap="square" lIns="0" tIns="0" rIns="0" bIns="0" rtlCol="0" anchor="ctr"/>
-          <a:lstStyle/>
-          <a:p>
-            <a:pPr indent="0" marL="0">
-              <a:buNone/>
-            </a:pPr>
-            <a:r>
-              <a:rPr lang="en-US" sz="3000" i="1" dirty="0">
-                <a:solidFill>
-                  <a:schemeClr val="bg2"/>
-                </a:solidFill>
-              </a:rPr>
-              <a:t>5 seeds that bring a good harvest</a:t>
-            </a:r>
-            <a:endParaRPr lang="en-US" sz="3000" dirty="0"/>
+            <a:endParaRPr lang="en-US" sz="7600" dirty="0"/>
           </a:p>
         </p:txBody>
       </p:sp>
@@ -4003,8 +3865,8 @@
         </p:nvSpPr>
         <p:spPr>
           <a:xfrm>
-            <a:off x="548640" y="914400"/>
-            <a:ext cx="2743200" cy="4206240"/>
+            <a:off x="365760" y="914400"/>
+            <a:ext cx="3291840" cy="4206240"/>
           </a:xfrm>
           <a:prstGeom prst="rect">
             <a:avLst/>
@@ -4020,7 +3882,7 @@
               <a:buNone/>
             </a:pPr>
             <a:r>
-              <a:rPr lang="en-US" sz="28000" b="1" dirty="0">
+              <a:rPr lang="en-US" sz="25000" b="1" dirty="0">
                 <a:solidFill>
                   <a:schemeClr val="accent2"/>
                 </a:solidFill>
@@ -4028,22 +3890,22 @@
                 <a:ea typeface="Cambria" pitchFamily="34" charset="-122"/>
                 <a:cs typeface="Cambria" pitchFamily="34" charset="-120"/>
               </a:rPr>
-              <a:t>2</a:t>
-            </a:r>
-            <a:endParaRPr lang="en-US" sz="28000" dirty="0"/>
-          </a:p>
-        </p:txBody>
-      </p:sp>
-      <p:sp>
-        <p:nvSpPr>
-          <p:cNvPr id="4" name="Kicker"/>
+              <a:t>2.</a:t>
+            </a:r>
+            <a:endParaRPr lang="en-US" sz="25000" dirty="0"/>
+          </a:p>
+        </p:txBody>
+      </p:sp>
+      <p:sp>
+        <p:nvSpPr>
+          <p:cNvPr id="4" name="Section title"/>
           <p:cNvSpPr txBox="1"/>
           <p:nvPr/>
         </p:nvSpPr>
         <p:spPr>
           <a:xfrm>
-            <a:off x="3474720" y="1965960"/>
-            <a:ext cx="5120640" cy="640080"/>
+            <a:off x="3749040" y="1737360"/>
+            <a:ext cx="5029200" cy="3108960"/>
           </a:xfrm>
           <a:prstGeom prst="rect">
             <a:avLst/>
@@ -4053,42 +3915,6 @@
         </p:spPr>
         <p:txBody>
           <a:bodyPr wrap="square" lIns="0" tIns="0" rIns="0" bIns="0" rtlCol="0" anchor="ctr"/>
-          <a:lstStyle/>
-          <a:p>
-            <a:pPr indent="0" marL="0">
-              <a:buNone/>
-            </a:pPr>
-            <a:r>
-              <a:rPr lang="en-US" sz="3000" b="1" spc="1000" kern="0" dirty="0">
-                <a:solidFill>
-                  <a:schemeClr val="bg2"/>
-                </a:solidFill>
-              </a:rPr>
-              <a:t>SOW</a:t>
-            </a:r>
-            <a:endParaRPr lang="en-US" sz="3000" dirty="0"/>
-          </a:p>
-        </p:txBody>
-      </p:sp>
-      <p:sp>
-        <p:nvSpPr>
-          <p:cNvPr id="5" name="Section title"/>
-          <p:cNvSpPr txBox="1"/>
-          <p:nvPr/>
-        </p:nvSpPr>
-        <p:spPr>
-          <a:xfrm>
-            <a:off x="3474720" y="2606040"/>
-            <a:ext cx="5303520" cy="2011680"/>
-          </a:xfrm>
-          <a:prstGeom prst="rect">
-            <a:avLst/>
-          </a:prstGeom>
-          <a:noFill/>
-          <a:ln/>
-        </p:spPr>
-        <p:txBody>
-          <a:bodyPr wrap="square" lIns="0" tIns="0" rIns="0" bIns="0" rtlCol="0" anchor="t"/>
           <a:lstStyle/>
           <a:p>
             <a:pPr indent="0" marL="0">
@@ -4103,7 +3929,7 @@
                 <a:ea typeface="Cambria" pitchFamily="34" charset="-122"/>
                 <a:cs typeface="Cambria" pitchFamily="34" charset="-120"/>
               </a:rPr>
-              <a:t>Integrity</a:t>
+              <a:t>Sow Integrity</a:t>
             </a:r>
             <a:endParaRPr lang="en-US" sz="6000" dirty="0"/>
           </a:p>
@@ -4111,43 +3937,7 @@
       </p:sp>
       <p:sp>
         <p:nvSpPr>
-          <p:cNvPr id="6" name="Progress"/>
-          <p:cNvSpPr txBox="1"/>
-          <p:nvPr/>
-        </p:nvSpPr>
-        <p:spPr>
-          <a:xfrm>
-            <a:off x="3474720" y="4800600"/>
-            <a:ext cx="5120640" cy="548640"/>
-          </a:xfrm>
-          <a:prstGeom prst="rect">
-            <a:avLst/>
-          </a:prstGeom>
-          <a:noFill/>
-          <a:ln/>
-        </p:spPr>
-        <p:txBody>
-          <a:bodyPr wrap="square" lIns="0" tIns="0" rIns="0" bIns="0" rtlCol="0" anchor="ctr"/>
-          <a:lstStyle/>
-          <a:p>
-            <a:pPr indent="0" marL="0">
-              <a:buNone/>
-            </a:pPr>
-            <a:r>
-              <a:rPr lang="en-US" sz="2400" i="1" dirty="0">
-                <a:solidFill>
-                  <a:schemeClr val="accent1"/>
-                </a:solidFill>
-              </a:rPr>
-              <a:t>Seed 2 of 5</a:t>
-            </a:r>
-            <a:endParaRPr lang="en-US" sz="2400" dirty="0"/>
-          </a:p>
-        </p:txBody>
-      </p:sp>
-      <p:sp>
-        <p:nvSpPr>
-          <p:cNvPr id="7" name="Section icon"/>
+          <p:cNvPr id="5" name="Section icon"/>
           <p:cNvSpPr/>
           <p:nvPr/>
         </p:nvSpPr>
@@ -4167,7 +3957,7 @@
       </p:sp>
       <p:pic>
         <p:nvPicPr>
-          <p:cNvPr id="8" name="Section icon glyph" descr="preencoded.png">    </p:cNvPr>
+          <p:cNvPr id="6" name="Section icon glyph" descr="preencoded.png">    </p:cNvPr>
           <p:cNvPicPr>
             <a:picLocks noChangeAspect="1"/>
           </p:cNvPicPr>
@@ -4295,7 +4085,7 @@
                 <a:ea typeface="Cambria" pitchFamily="34" charset="-122"/>
                 <a:cs typeface="Cambria" pitchFamily="34" charset="-120"/>
               </a:rPr>
-              <a:t>Have nothing to do with godless myths and old wives’ tales; rather, </a:t>
+              <a:t>Have nothing to do with godless myths and old lives' tales; rather, </a:t>
             </a:r>
             <a:pPr indent="0" marL="0">
               <a:lnSpc>
@@ -4335,7 +4125,7 @@
                 <a:ea typeface="Cambria" pitchFamily="34" charset="-122"/>
                 <a:cs typeface="Cambria" pitchFamily="34" charset="-120"/>
               </a:rPr>
-              <a:t>. For physical training is of some value, but </a:t>
+              <a:t>.  For physical training is of some value, but </a:t>
             </a:r>
             <a:pPr indent="0" marL="0">
               <a:lnSpc>
@@ -4411,7 +4201,7 @@
                   <a:schemeClr val="accent1"/>
                 </a:solidFill>
               </a:rPr>
-              <a:t>— 1 Timothy 4:7–8 (NIV)</a:t>
+              <a:t>1 Timothy 4:7–8 (NIV)</a:t>
             </a:r>
             <a:endParaRPr lang="en-US" sz="2800" dirty="0"/>
           </a:p>
@@ -4529,82 +4319,36 @@
       </p:sp>
       <p:sp>
         <p:nvSpPr>
-          <p:cNvPr id="4" name="Text 1"/>
-          <p:cNvSpPr txBox="1"/>
-          <p:nvPr/>
-        </p:nvSpPr>
-        <p:spPr>
-          <a:xfrm>
-            <a:off x="548640" y="1371600"/>
-            <a:ext cx="11064240" cy="685800"/>
-          </a:xfrm>
-          <a:prstGeom prst="rect">
-            <a:avLst/>
-          </a:prstGeom>
-          <a:noFill/>
-          <a:ln/>
-        </p:spPr>
-        <p:txBody>
-          <a:bodyPr wrap="square" lIns="0" tIns="0" rIns="0" bIns="0" rtlCol="0" anchor="ctr"/>
-          <a:lstStyle/>
-          <a:p>
-            <a:pPr indent="0" marL="0">
-              <a:buNone/>
-            </a:pPr>
-            <a:r>
-              <a:rPr lang="en-US" sz="3000" i="1" dirty="0">
-                <a:solidFill>
-                  <a:schemeClr val="accent2"/>
-                </a:solidFill>
-                <a:latin typeface="Cambria" pitchFamily="34" charset="0"/>
-                <a:ea typeface="Cambria" pitchFamily="34" charset="-122"/>
-                <a:cs typeface="Cambria" pitchFamily="34" charset="-120"/>
-              </a:rPr>
-              <a:t>The Bible says, “Train yourself to be godly.”</a:t>
-            </a:r>
-            <a:endParaRPr lang="en-US" sz="3000" dirty="0"/>
-          </a:p>
-        </p:txBody>
-      </p:sp>
-      <p:sp>
-        <p:nvSpPr>
-          <p:cNvPr id="5" name="GODLY card"/>
+          <p:cNvPr id="4" name="Point row"/>
           <p:cNvSpPr/>
           <p:nvPr/>
         </p:nvSpPr>
         <p:spPr>
           <a:xfrm>
-            <a:off x="548640" y="2331720"/>
-            <a:ext cx="5394960" cy="3611880"/>
+            <a:off x="548640" y="1600200"/>
+            <a:ext cx="11064240" cy="1234440"/>
           </a:xfrm>
           <a:prstGeom prst="roundRect">
             <a:avLst>
-              <a:gd name="adj" fmla="val 5063"/>
+              <a:gd name="adj" fmla="val 14815"/>
             </a:avLst>
           </a:prstGeom>
           <a:solidFill>
             <a:schemeClr val="bg2"/>
           </a:solidFill>
           <a:ln/>
-          <a:effectLst>
-            <a:outerShdw sx="100000" sy="100000" kx="0" ky="0" algn="bl" rotWithShape="0" blurRad="127000" dist="38100" dir="5400000">
-              <a:srgbClr val="1E4D2B">
-                <a:alpha val="18000"/>
-              </a:srgbClr>
-            </a:outerShdw>
-          </a:effectLst>
-        </p:spPr>
-      </p:sp>
-      <p:sp>
-        <p:nvSpPr>
-          <p:cNvPr id="6" name="GODLY icon"/>
+        </p:spPr>
+      </p:sp>
+      <p:sp>
+        <p:nvSpPr>
+          <p:cNvPr id="5" name="Point icon"/>
           <p:cNvSpPr/>
           <p:nvPr/>
         </p:nvSpPr>
         <p:spPr>
           <a:xfrm>
-            <a:off x="960120" y="2651760"/>
-            <a:ext cx="1371600" cy="1371600"/>
+            <a:off x="777240" y="1737360"/>
+            <a:ext cx="960120" cy="960120"/>
           </a:xfrm>
           <a:prstGeom prst="ellipse">
             <a:avLst/>
@@ -4617,7 +4361,7 @@
       </p:sp>
       <p:pic>
         <p:nvPicPr>
-          <p:cNvPr id="7" name="GODLY icon glyph" descr="preencoded.png">    </p:cNvPr>
+          <p:cNvPr id="6" name="Point icon glyph" descr="preencoded.png">    </p:cNvPr>
           <p:cNvPicPr>
             <a:picLocks noChangeAspect="1"/>
           </p:cNvPicPr>
@@ -4631,8 +4375,8 @@
         </p:blipFill>
         <p:spPr>
           <a:xfrm>
-            <a:off x="1289304" y="2980944"/>
-            <a:ext cx="713232" cy="713232"/>
+            <a:off x="1007669" y="1967789"/>
+            <a:ext cx="499262" cy="499262"/>
           </a:xfrm>
           <a:prstGeom prst="rect">
             <a:avLst/>
@@ -4641,14 +4385,14 @@
       </p:pic>
       <p:sp>
         <p:nvSpPr>
-          <p:cNvPr id="8" name="Text 4"/>
+          <p:cNvPr id="7" name="Text 3"/>
           <p:cNvSpPr txBox="1"/>
           <p:nvPr/>
         </p:nvSpPr>
         <p:spPr>
           <a:xfrm>
-            <a:off x="2560320" y="2788920"/>
-            <a:ext cx="3108960" cy="457200"/>
+            <a:off x="2011680" y="1600200"/>
+            <a:ext cx="9418320" cy="1234440"/>
           </a:xfrm>
           <a:prstGeom prst="rect">
             <a:avLst/>
@@ -4664,123 +4408,23 @@
               <a:buNone/>
             </a:pPr>
             <a:r>
-              <a:rPr lang="en-US" sz="2400" i="1" dirty="0">
-                <a:solidFill>
-                  <a:schemeClr val="tx1"/>
+              <a:rPr lang="en-US" sz="3200" b="1" dirty="0">
+                <a:solidFill>
+                  <a:schemeClr val="tx2"/>
                 </a:solidFill>
               </a:rPr>
-              <a:t>To be</a:t>
-            </a:r>
-            <a:endParaRPr lang="en-US" sz="2400" dirty="0"/>
-          </a:p>
-        </p:txBody>
-      </p:sp>
-      <p:sp>
-        <p:nvSpPr>
-          <p:cNvPr id="9" name="Text 5"/>
-          <p:cNvSpPr txBox="1"/>
-          <p:nvPr/>
-        </p:nvSpPr>
-        <p:spPr>
-          <a:xfrm>
-            <a:off x="2560320" y="3200400"/>
-            <a:ext cx="3200400" cy="731520"/>
-          </a:xfrm>
-          <a:prstGeom prst="rect">
-            <a:avLst/>
-          </a:prstGeom>
-          <a:noFill/>
-          <a:ln/>
-        </p:spPr>
-        <p:txBody>
-          <a:bodyPr wrap="square" lIns="0" tIns="0" rIns="0" bIns="0" rtlCol="0" anchor="ctr"/>
-          <a:lstStyle/>
-          <a:p>
+              <a:t>The Bible says, </a:t>
+            </a:r>
             <a:pPr indent="0" marL="0">
               <a:buNone/>
             </a:pPr>
             <a:r>
-              <a:rPr lang="en-US" sz="3800" b="1" dirty="0">
-                <a:solidFill>
-                  <a:schemeClr val="accent2"/>
-                </a:solidFill>
-                <a:latin typeface="Cambria" pitchFamily="34" charset="0"/>
-                <a:ea typeface="Cambria" pitchFamily="34" charset="-122"/>
-                <a:cs typeface="Cambria" pitchFamily="34" charset="-120"/>
+              <a:rPr lang="en-US" sz="3200" b="1" i="1" dirty="0">
+                <a:solidFill>
+                  <a:schemeClr val="tx2"/>
+                </a:solidFill>
               </a:rPr>
-              <a:t>GODLY</a:t>
-            </a:r>
-            <a:endParaRPr lang="en-US" sz="3800" dirty="0"/>
-          </a:p>
-        </p:txBody>
-      </p:sp>
-      <p:sp>
-        <p:nvSpPr>
-          <p:cNvPr id="10" name="Text 6"/>
-          <p:cNvSpPr txBox="1"/>
-          <p:nvPr/>
-        </p:nvSpPr>
-        <p:spPr>
-          <a:xfrm>
-            <a:off x="960120" y="4206240"/>
-            <a:ext cx="4572000" cy="457200"/>
-          </a:xfrm>
-          <a:prstGeom prst="rect">
-            <a:avLst/>
-          </a:prstGeom>
-          <a:noFill/>
-          <a:ln/>
-        </p:spPr>
-        <p:txBody>
-          <a:bodyPr wrap="square" lIns="0" tIns="0" rIns="0" bIns="0" rtlCol="0" anchor="ctr"/>
-          <a:lstStyle/>
-          <a:p>
-            <a:pPr indent="0" marL="0">
-              <a:buNone/>
-            </a:pPr>
-            <a:r>
-              <a:rPr lang="en-US" sz="2400" i="1" dirty="0">
-                <a:solidFill>
-                  <a:schemeClr val="tx1"/>
-                </a:solidFill>
-              </a:rPr>
-              <a:t>means</a:t>
-            </a:r>
-            <a:endParaRPr lang="en-US" sz="2400" dirty="0"/>
-          </a:p>
-        </p:txBody>
-      </p:sp>
-      <p:sp>
-        <p:nvSpPr>
-          <p:cNvPr id="11" name="Text 7"/>
-          <p:cNvSpPr txBox="1"/>
-          <p:nvPr/>
-        </p:nvSpPr>
-        <p:spPr>
-          <a:xfrm>
-            <a:off x="960120" y="4617720"/>
-            <a:ext cx="4663440" cy="1097280"/>
-          </a:xfrm>
-          <a:prstGeom prst="rect">
-            <a:avLst/>
-          </a:prstGeom>
-          <a:noFill/>
-          <a:ln/>
-        </p:spPr>
-        <p:txBody>
-          <a:bodyPr wrap="square" lIns="0" tIns="0" rIns="0" bIns="0" rtlCol="0" anchor="t"/>
-          <a:lstStyle/>
-          <a:p>
-            <a:pPr indent="0" marL="0">
-              <a:buNone/>
-            </a:pPr>
-            <a:r>
-              <a:rPr lang="en-US" sz="3200" b="1" dirty="0">
-                <a:solidFill>
-                  <a:schemeClr val="tx2"/>
-                </a:solidFill>
-              </a:rPr>
-              <a:t>Living a God-centered life</a:t>
+              <a:t>“Train yourself to be godly.”</a:t>
             </a:r>
             <a:endParaRPr lang="en-US" sz="3200" dirty="0"/>
           </a:p>
@@ -4788,43 +4432,36 @@
       </p:sp>
       <p:sp>
         <p:nvSpPr>
-          <p:cNvPr id="12" name="INTEGRITY card"/>
+          <p:cNvPr id="8" name="Point row"/>
           <p:cNvSpPr/>
           <p:nvPr/>
         </p:nvSpPr>
         <p:spPr>
           <a:xfrm>
-            <a:off x="6217920" y="2331720"/>
-            <a:ext cx="5394960" cy="3611880"/>
+            <a:off x="548640" y="3063240"/>
+            <a:ext cx="11064240" cy="1234440"/>
           </a:xfrm>
           <a:prstGeom prst="roundRect">
             <a:avLst>
-              <a:gd name="adj" fmla="val 5063"/>
+              <a:gd name="adj" fmla="val 14815"/>
             </a:avLst>
           </a:prstGeom>
           <a:solidFill>
             <a:schemeClr val="bg2"/>
           </a:solidFill>
           <a:ln/>
-          <a:effectLst>
-            <a:outerShdw sx="100000" sy="100000" kx="0" ky="0" algn="bl" rotWithShape="0" blurRad="127000" dist="38100" dir="5400000">
-              <a:srgbClr val="1E4D2B">
-                <a:alpha val="18000"/>
-              </a:srgbClr>
-            </a:outerShdw>
-          </a:effectLst>
-        </p:spPr>
-      </p:sp>
-      <p:sp>
-        <p:nvSpPr>
-          <p:cNvPr id="13" name="INTEGRITY icon"/>
+        </p:spPr>
+      </p:sp>
+      <p:sp>
+        <p:nvSpPr>
+          <p:cNvPr id="9" name="Point icon"/>
           <p:cNvSpPr/>
           <p:nvPr/>
         </p:nvSpPr>
         <p:spPr>
           <a:xfrm>
-            <a:off x="6629400" y="2651760"/>
-            <a:ext cx="1371600" cy="1371600"/>
+            <a:off x="777240" y="3200400"/>
+            <a:ext cx="960120" cy="960120"/>
           </a:xfrm>
           <a:prstGeom prst="ellipse">
             <a:avLst/>
@@ -4837,7 +4474,7 @@
       </p:sp>
       <p:pic>
         <p:nvPicPr>
-          <p:cNvPr id="14" name="INTEGRITY icon glyph" descr="preencoded.png">    </p:cNvPr>
+          <p:cNvPr id="10" name="Point icon glyph" descr="preencoded.png">    </p:cNvPr>
           <p:cNvPicPr>
             <a:picLocks noChangeAspect="1"/>
           </p:cNvPicPr>
@@ -4851,8 +4488,8 @@
         </p:blipFill>
         <p:spPr>
           <a:xfrm>
-            <a:off x="6958584" y="2980944"/>
-            <a:ext cx="713232" cy="713232"/>
+            <a:off x="1007669" y="3430829"/>
+            <a:ext cx="499262" cy="499262"/>
           </a:xfrm>
           <a:prstGeom prst="rect">
             <a:avLst/>
@@ -4861,14 +4498,14 @@
       </p:pic>
       <p:sp>
         <p:nvSpPr>
-          <p:cNvPr id="15" name="Text 10"/>
+          <p:cNvPr id="11" name="Text 6"/>
           <p:cNvSpPr txBox="1"/>
           <p:nvPr/>
         </p:nvSpPr>
         <p:spPr>
           <a:xfrm>
-            <a:off x="8229600" y="2788920"/>
-            <a:ext cx="3108960" cy="457200"/>
+            <a:off x="2011680" y="3063240"/>
+            <a:ext cx="9418320" cy="1234440"/>
           </a:xfrm>
           <a:prstGeom prst="rect">
             <a:avLst/>
@@ -4884,27 +4521,93 @@
               <a:buNone/>
             </a:pPr>
             <a:r>
-              <a:rPr lang="en-US" sz="2400" i="1" dirty="0">
-                <a:solidFill>
-                  <a:schemeClr val="tx1"/>
+              <a:rPr lang="en-US" sz="3200" b="1" dirty="0">
+                <a:solidFill>
+                  <a:schemeClr val="tx2"/>
                 </a:solidFill>
               </a:rPr>
-              <a:t>To be</a:t>
-            </a:r>
-            <a:endParaRPr lang="en-US" sz="2400" dirty="0"/>
-          </a:p>
-        </p:txBody>
-      </p:sp>
-      <p:sp>
-        <p:nvSpPr>
-          <p:cNvPr id="16" name="Text 11"/>
+              <a:t>To be godly means to live a God centered life</a:t>
+            </a:r>
+            <a:endParaRPr lang="en-US" sz="3200" dirty="0"/>
+          </a:p>
+        </p:txBody>
+      </p:sp>
+      <p:sp>
+        <p:nvSpPr>
+          <p:cNvPr id="12" name="Point row"/>
+          <p:cNvSpPr/>
+          <p:nvPr/>
+        </p:nvSpPr>
+        <p:spPr>
+          <a:xfrm>
+            <a:off x="548640" y="4526280"/>
+            <a:ext cx="11064240" cy="1234440"/>
+          </a:xfrm>
+          <a:prstGeom prst="roundRect">
+            <a:avLst>
+              <a:gd name="adj" fmla="val 14815"/>
+            </a:avLst>
+          </a:prstGeom>
+          <a:solidFill>
+            <a:schemeClr val="bg2"/>
+          </a:solidFill>
+          <a:ln/>
+        </p:spPr>
+      </p:sp>
+      <p:sp>
+        <p:nvSpPr>
+          <p:cNvPr id="13" name="Point icon"/>
+          <p:cNvSpPr/>
+          <p:nvPr/>
+        </p:nvSpPr>
+        <p:spPr>
+          <a:xfrm>
+            <a:off x="777240" y="4663440"/>
+            <a:ext cx="960120" cy="960120"/>
+          </a:xfrm>
+          <a:prstGeom prst="ellipse">
+            <a:avLst/>
+          </a:prstGeom>
+          <a:solidFill>
+            <a:schemeClr val="accent2"/>
+          </a:solidFill>
+          <a:ln/>
+        </p:spPr>
+      </p:sp>
+      <p:pic>
+        <p:nvPicPr>
+          <p:cNvPr id="14" name="Point icon glyph" descr="preencoded.png">    </p:cNvPr>
+          <p:cNvPicPr>
+            <a:picLocks noChangeAspect="1"/>
+          </p:cNvPicPr>
+          <p:nvPr/>
+        </p:nvPicPr>
+        <p:blipFill>
+          <a:blip r:embed="rId3"/>
+          <a:stretch>
+            <a:fillRect/>
+          </a:stretch>
+        </p:blipFill>
+        <p:spPr>
+          <a:xfrm>
+            <a:off x="1007669" y="4893869"/>
+            <a:ext cx="499262" cy="499262"/>
+          </a:xfrm>
+          <a:prstGeom prst="rect">
+            <a:avLst/>
+          </a:prstGeom>
+        </p:spPr>
+      </p:pic>
+      <p:sp>
+        <p:nvSpPr>
+          <p:cNvPr id="15" name="Text 9"/>
           <p:cNvSpPr txBox="1"/>
           <p:nvPr/>
         </p:nvSpPr>
         <p:spPr>
           <a:xfrm>
-            <a:off x="8229600" y="3200400"/>
-            <a:ext cx="3200400" cy="731520"/>
+            <a:off x="2011680" y="4526280"/>
+            <a:ext cx="9418320" cy="1234440"/>
           </a:xfrm>
           <a:prstGeom prst="rect">
             <a:avLst/>
@@ -4920,87 +4623,12 @@
               <a:buNone/>
             </a:pPr>
             <a:r>
-              <a:rPr lang="en-US" sz="3800" b="1" dirty="0">
-                <a:solidFill>
-                  <a:schemeClr val="accent2"/>
-                </a:solidFill>
-                <a:latin typeface="Cambria" pitchFamily="34" charset="0"/>
-                <a:ea typeface="Cambria" pitchFamily="34" charset="-122"/>
-                <a:cs typeface="Cambria" pitchFamily="34" charset="-120"/>
+              <a:rPr lang="en-US" sz="3200" b="1" dirty="0">
+                <a:solidFill>
+                  <a:schemeClr val="tx2"/>
+                </a:solidFill>
               </a:rPr>
-              <a:t>INTEGRITY</a:t>
-            </a:r>
-            <a:endParaRPr lang="en-US" sz="3800" dirty="0"/>
-          </a:p>
-        </p:txBody>
-      </p:sp>
-      <p:sp>
-        <p:nvSpPr>
-          <p:cNvPr id="17" name="Text 12"/>
-          <p:cNvSpPr txBox="1"/>
-          <p:nvPr/>
-        </p:nvSpPr>
-        <p:spPr>
-          <a:xfrm>
-            <a:off x="6629400" y="4206240"/>
-            <a:ext cx="4572000" cy="457200"/>
-          </a:xfrm>
-          <a:prstGeom prst="rect">
-            <a:avLst/>
-          </a:prstGeom>
-          <a:noFill/>
-          <a:ln/>
-        </p:spPr>
-        <p:txBody>
-          <a:bodyPr wrap="square" lIns="0" tIns="0" rIns="0" bIns="0" rtlCol="0" anchor="ctr"/>
-          <a:lstStyle/>
-          <a:p>
-            <a:pPr indent="0" marL="0">
-              <a:buNone/>
-            </a:pPr>
-            <a:r>
-              <a:rPr lang="en-US" sz="2400" i="1" dirty="0">
-                <a:solidFill>
-                  <a:schemeClr val="tx1"/>
-                </a:solidFill>
-              </a:rPr>
-              <a:t>means</a:t>
-            </a:r>
-            <a:endParaRPr lang="en-US" sz="2400" dirty="0"/>
-          </a:p>
-        </p:txBody>
-      </p:sp>
-      <p:sp>
-        <p:nvSpPr>
-          <p:cNvPr id="18" name="Text 13"/>
-          <p:cNvSpPr txBox="1"/>
-          <p:nvPr/>
-        </p:nvSpPr>
-        <p:spPr>
-          <a:xfrm>
-            <a:off x="6629400" y="4617720"/>
-            <a:ext cx="4663440" cy="1097280"/>
-          </a:xfrm>
-          <a:prstGeom prst="rect">
-            <a:avLst/>
-          </a:prstGeom>
-          <a:noFill/>
-          <a:ln/>
-        </p:spPr>
-        <p:txBody>
-          <a:bodyPr wrap="square" lIns="0" tIns="0" rIns="0" bIns="0" rtlCol="0" anchor="t"/>
-          <a:lstStyle/>
-          <a:p>
-            <a:pPr indent="0" marL="0">
-              <a:buNone/>
-            </a:pPr>
-            <a:r>
-              <a:rPr lang="en-US" sz="3200" b="1" dirty="0">
-                <a:solidFill>
-                  <a:schemeClr val="tx2"/>
-                </a:solidFill>
-              </a:rPr>
-              <a:t>Being upright morally</a:t>
+              <a:t>Integrity is the quality of being upright morally</a:t>
             </a:r>
             <a:endParaRPr lang="en-US" sz="3200" dirty="0"/>
           </a:p>
@@ -5131,8 +4759,8 @@
         </p:nvSpPr>
         <p:spPr>
           <a:xfrm>
-            <a:off x="4572000" y="1188720"/>
-            <a:ext cx="6949440" cy="1828800"/>
+            <a:off x="4572000" y="1005840"/>
+            <a:ext cx="6949440" cy="2194560"/>
           </a:xfrm>
           <a:prstGeom prst="rect">
             <a:avLst/>
@@ -5156,7 +4784,7 @@
                 <a:ea typeface="Cambria" pitchFamily="34" charset="-122"/>
                 <a:cs typeface="Cambria" pitchFamily="34" charset="-120"/>
               </a:rPr>
-              <a:t>To live in integrity means to live on what is right — all the time.</a:t>
+              <a:t>To live in integrity means to live on what is right all the time.</a:t>
             </a:r>
             <a:endParaRPr lang="en-US" sz="4000" dirty="0"/>
           </a:p>
@@ -5170,8 +4798,8 @@
         </p:nvSpPr>
         <p:spPr>
           <a:xfrm>
-            <a:off x="4572000" y="3200400"/>
-            <a:ext cx="6949440" cy="2377440"/>
+            <a:off x="4572000" y="3383280"/>
+            <a:ext cx="6949440" cy="2194560"/>
           </a:xfrm>
           <a:prstGeom prst="rect">
             <a:avLst/>
@@ -5187,7 +4815,7 @@
               <a:buNone/>
             </a:pPr>
             <a:r>
-              <a:rPr lang="en-US" sz="6000" b="1" dirty="0">
+              <a:rPr lang="en-US" sz="5800" b="1" u="sng" dirty="0">
                 <a:solidFill>
                   <a:schemeClr val="accent4"/>
                 </a:solidFill>
@@ -5195,9 +4823,23 @@
                 <a:ea typeface="Cambria" pitchFamily="34" charset="-122"/>
                 <a:cs typeface="Cambria" pitchFamily="34" charset="-120"/>
               </a:rPr>
-              <a:t>No compromise with sin!</a:t>
-            </a:r>
-            <a:endParaRPr lang="en-US" sz="6000" dirty="0"/>
+              <a:t>No compromise</a:t>
+            </a:r>
+            <a:pPr indent="0" marL="0">
+              <a:buNone/>
+            </a:pPr>
+            <a:r>
+              <a:rPr lang="en-US" sz="5800" b="1" dirty="0">
+                <a:solidFill>
+                  <a:schemeClr val="accent4"/>
+                </a:solidFill>
+                <a:latin typeface="Cambria" pitchFamily="34" charset="0"/>
+                <a:ea typeface="Cambria" pitchFamily="34" charset="-122"/>
+                <a:cs typeface="Cambria" pitchFamily="34" charset="-120"/>
+              </a:rPr>
+              <a:t> with sin.</a:t>
+            </a:r>
+            <a:endParaRPr lang="en-US" sz="5800" dirty="0"/>
           </a:p>
         </p:txBody>
       </p:sp>
@@ -5282,8 +4924,8 @@
         </p:nvSpPr>
         <p:spPr>
           <a:xfrm>
-            <a:off x="548640" y="914400"/>
-            <a:ext cx="2743200" cy="4206240"/>
+            <a:off x="365760" y="914400"/>
+            <a:ext cx="3291840" cy="4206240"/>
           </a:xfrm>
           <a:prstGeom prst="rect">
             <a:avLst/>
@@ -5299,7 +4941,7 @@
               <a:buNone/>
             </a:pPr>
             <a:r>
-              <a:rPr lang="en-US" sz="28000" b="1" dirty="0">
+              <a:rPr lang="en-US" sz="25000" b="1" dirty="0">
                 <a:solidFill>
                   <a:schemeClr val="accent3"/>
                 </a:solidFill>
@@ -5307,22 +4949,22 @@
                 <a:ea typeface="Cambria" pitchFamily="34" charset="-122"/>
                 <a:cs typeface="Cambria" pitchFamily="34" charset="-120"/>
               </a:rPr>
-              <a:t>3</a:t>
-            </a:r>
-            <a:endParaRPr lang="en-US" sz="28000" dirty="0"/>
-          </a:p>
-        </p:txBody>
-      </p:sp>
-      <p:sp>
-        <p:nvSpPr>
-          <p:cNvPr id="4" name="Kicker"/>
+              <a:t>3.</a:t>
+            </a:r>
+            <a:endParaRPr lang="en-US" sz="25000" dirty="0"/>
+          </a:p>
+        </p:txBody>
+      </p:sp>
+      <p:sp>
+        <p:nvSpPr>
+          <p:cNvPr id="4" name="Section title"/>
           <p:cNvSpPr txBox="1"/>
           <p:nvPr/>
         </p:nvSpPr>
         <p:spPr>
           <a:xfrm>
-            <a:off x="3474720" y="1965960"/>
-            <a:ext cx="5120640" cy="640080"/>
+            <a:off x="3749040" y="1737360"/>
+            <a:ext cx="5029200" cy="3108960"/>
           </a:xfrm>
           <a:prstGeom prst="rect">
             <a:avLst/>
@@ -5332,42 +4974,6 @@
         </p:spPr>
         <p:txBody>
           <a:bodyPr wrap="square" lIns="0" tIns="0" rIns="0" bIns="0" rtlCol="0" anchor="ctr"/>
-          <a:lstStyle/>
-          <a:p>
-            <a:pPr indent="0" marL="0">
-              <a:buNone/>
-            </a:pPr>
-            <a:r>
-              <a:rPr lang="en-US" sz="3000" b="1" spc="1000" kern="0" dirty="0">
-                <a:solidFill>
-                  <a:schemeClr val="bg2"/>
-                </a:solidFill>
-              </a:rPr>
-              <a:t>SOW</a:t>
-            </a:r>
-            <a:endParaRPr lang="en-US" sz="3000" dirty="0"/>
-          </a:p>
-        </p:txBody>
-      </p:sp>
-      <p:sp>
-        <p:nvSpPr>
-          <p:cNvPr id="5" name="Section title"/>
-          <p:cNvSpPr txBox="1"/>
-          <p:nvPr/>
-        </p:nvSpPr>
-        <p:spPr>
-          <a:xfrm>
-            <a:off x="3474720" y="2606040"/>
-            <a:ext cx="5303520" cy="2011680"/>
-          </a:xfrm>
-          <a:prstGeom prst="rect">
-            <a:avLst/>
-          </a:prstGeom>
-          <a:noFill/>
-          <a:ln/>
-        </p:spPr>
-        <p:txBody>
-          <a:bodyPr wrap="square" lIns="0" tIns="0" rIns="0" bIns="0" rtlCol="0" anchor="t"/>
           <a:lstStyle/>
           <a:p>
             <a:pPr indent="0" marL="0">
@@ -5382,7 +4988,7 @@
                 <a:ea typeface="Cambria" pitchFamily="34" charset="-122"/>
                 <a:cs typeface="Cambria" pitchFamily="34" charset="-120"/>
               </a:rPr>
-              <a:t>Spirituality</a:t>
+              <a:t>Sow Spirituality</a:t>
             </a:r>
             <a:endParaRPr lang="en-US" sz="6000" dirty="0"/>
           </a:p>
@@ -5390,43 +4996,7 @@
       </p:sp>
       <p:sp>
         <p:nvSpPr>
-          <p:cNvPr id="6" name="Progress"/>
-          <p:cNvSpPr txBox="1"/>
-          <p:nvPr/>
-        </p:nvSpPr>
-        <p:spPr>
-          <a:xfrm>
-            <a:off x="3474720" y="4800600"/>
-            <a:ext cx="5120640" cy="548640"/>
-          </a:xfrm>
-          <a:prstGeom prst="rect">
-            <a:avLst/>
-          </a:prstGeom>
-          <a:noFill/>
-          <a:ln/>
-        </p:spPr>
-        <p:txBody>
-          <a:bodyPr wrap="square" lIns="0" tIns="0" rIns="0" bIns="0" rtlCol="0" anchor="ctr"/>
-          <a:lstStyle/>
-          <a:p>
-            <a:pPr indent="0" marL="0">
-              <a:buNone/>
-            </a:pPr>
-            <a:r>
-              <a:rPr lang="en-US" sz="2400" i="1" dirty="0">
-                <a:solidFill>
-                  <a:schemeClr val="accent1"/>
-                </a:solidFill>
-              </a:rPr>
-              <a:t>Seed 3 of 5</a:t>
-            </a:r>
-            <a:endParaRPr lang="en-US" sz="2400" dirty="0"/>
-          </a:p>
-        </p:txBody>
-      </p:sp>
-      <p:sp>
-        <p:nvSpPr>
-          <p:cNvPr id="7" name="Section icon"/>
+          <p:cNvPr id="5" name="Section icon"/>
           <p:cNvSpPr/>
           <p:nvPr/>
         </p:nvSpPr>
@@ -5446,7 +5016,7 @@
       </p:sp>
       <p:pic>
         <p:nvPicPr>
-          <p:cNvPr id="8" name="Section icon glyph" descr="preencoded.png">    </p:cNvPr>
+          <p:cNvPr id="6" name="Section icon glyph" descr="preencoded.png">    </p:cNvPr>
           <p:cNvPicPr>
             <a:picLocks noChangeAspect="1"/>
           </p:cNvPicPr>
@@ -5577,32 +5147,15 @@
               <a:buNone/>
             </a:pPr>
             <a:r>
-              <a:rPr lang="en-US" sz="3800" b="1" dirty="0">
-                <a:solidFill>
-                  <a:schemeClr val="accent1"/>
+              <a:rPr lang="en-US" sz="3800" dirty="0">
+                <a:solidFill>
+                  <a:schemeClr val="bg1"/>
                 </a:solidFill>
                 <a:latin typeface="Cambria" pitchFamily="34" charset="0"/>
                 <a:ea typeface="Cambria" pitchFamily="34" charset="-122"/>
                 <a:cs typeface="Cambria" pitchFamily="34" charset="-120"/>
               </a:rPr>
-              <a:t>You are the light of the world</a:t>
-            </a:r>
-            <a:pPr indent="0" marL="0">
-              <a:lnSpc>
-                <a:spcPct val="108000"/>
-              </a:lnSpc>
-              <a:buNone/>
-            </a:pPr>
-            <a:r>
-              <a:rPr lang="en-US" sz="3800" dirty="0">
-                <a:solidFill>
-                  <a:schemeClr val="bg1"/>
-                </a:solidFill>
-                <a:latin typeface="Cambria" pitchFamily="34" charset="0"/>
-                <a:ea typeface="Cambria" pitchFamily="34" charset="-122"/>
-                <a:cs typeface="Cambria" pitchFamily="34" charset="-120"/>
-              </a:rPr>
-              <a:t> — like a city on a mountain, glowing in the night for all to see.</a:t>
+              <a:t>You are the light of the world—like a city on a mountain, glowing in the night for all to see.</a:t>
             </a:r>
             <a:endParaRPr lang="en-US" sz="3800" dirty="0"/>
           </a:p>
@@ -5638,7 +5191,7 @@
                   <a:schemeClr val="accent1"/>
                 </a:solidFill>
               </a:rPr>
-              <a:t>— Matthew 5:14 (NLT)</a:t>
+              <a:t>Matthew 5:14 (NLT)</a:t>
             </a:r>
             <a:endParaRPr lang="en-US" sz="2800" dirty="0"/>
           </a:p>
@@ -5674,16 +5227,14 @@
       </p:grpSpPr>
       <p:sp>
         <p:nvSpPr>
-          <p:cNvPr id="3" name="Text 0"/>
-          <p:cNvSpPr/>
-          <p:nvPr>
-            <p:ph idx="100" type="title" hasCustomPrompt="1"/>
-          </p:nvPr>
-        </p:nvSpPr>
-        <p:spPr>
-          <a:xfrm>
-            <a:off x="548640" y="320040"/>
-            <a:ext cx="11064240" cy="1005840"/>
+          <p:cNvPr id="3" name="Statement"/>
+          <p:cNvSpPr txBox="1"/>
+          <p:nvPr/>
+        </p:nvSpPr>
+        <p:spPr>
+          <a:xfrm>
+            <a:off x="548640" y="548640"/>
+            <a:ext cx="11064240" cy="2377440"/>
           </a:xfrm>
           <a:prstGeom prst="rect">
             <a:avLst/>
@@ -5695,104 +5246,34 @@
           <a:bodyPr wrap="square" lIns="0" tIns="0" rIns="0" bIns="0" rtlCol="0" anchor="ctr"/>
           <a:lstStyle/>
           <a:p>
-            <a:pPr indent="0" marL="0">
+            <a:pPr algn="ctr" indent="0" marL="0">
               <a:buNone/>
             </a:pPr>
             <a:r>
-              <a:rPr lang="en-US" sz="4000" b="1" dirty="0">
+              <a:rPr lang="en-US" sz="4400" b="1" dirty="0">
                 <a:solidFill>
                   <a:schemeClr val="tx2"/>
-                </a:solidFill>
-              </a:rPr>
-              <a:t>Sowing spirituality means…</a:t>
-            </a:r>
-            <a:endParaRPr lang="en-US" sz="4000" dirty="0"/>
-          </a:p>
-        </p:txBody>
-      </p:sp>
-      <p:sp>
-        <p:nvSpPr>
-          <p:cNvPr id="4" name="Text 1"/>
-          <p:cNvSpPr txBox="1"/>
-          <p:nvPr/>
-        </p:nvSpPr>
-        <p:spPr>
-          <a:xfrm>
-            <a:off x="548640" y="1371600"/>
-            <a:ext cx="11064240" cy="685800"/>
-          </a:xfrm>
-          <a:prstGeom prst="rect">
-            <a:avLst/>
-          </a:prstGeom>
-          <a:noFill/>
-          <a:ln/>
-        </p:spPr>
-        <p:txBody>
-          <a:bodyPr wrap="square" lIns="0" tIns="0" rIns="0" bIns="0" rtlCol="0" anchor="ctr"/>
-          <a:lstStyle/>
-          <a:p>
-            <a:pPr indent="0" marL="0">
-              <a:buNone/>
-            </a:pPr>
-            <a:r>
-              <a:rPr lang="en-US" sz="3200" i="1" dirty="0">
-                <a:solidFill>
-                  <a:schemeClr val="accent3"/>
                 </a:solidFill>
                 <a:latin typeface="Cambria" pitchFamily="34" charset="0"/>
                 <a:ea typeface="Cambria" pitchFamily="34" charset="-122"/>
                 <a:cs typeface="Cambria" pitchFamily="34" charset="-120"/>
               </a:rPr>
-              <a:t>bringing the presence of God into your</a:t>
-            </a:r>
-            <a:endParaRPr lang="en-US" sz="3200" dirty="0"/>
-          </a:p>
-        </p:txBody>
-      </p:sp>
-      <p:sp>
-        <p:nvSpPr>
-          <p:cNvPr id="5" name="Home card"/>
+              <a:t>Sowing spirituality means you are bringing the presence of God into your home, school and workplace</a:t>
+            </a:r>
+            <a:endParaRPr lang="en-US" sz="4400" dirty="0"/>
+          </a:p>
+        </p:txBody>
+      </p:sp>
+      <p:sp>
+        <p:nvSpPr>
+          <p:cNvPr id="4" name="home icon"/>
           <p:cNvSpPr/>
           <p:nvPr/>
         </p:nvSpPr>
         <p:spPr>
           <a:xfrm>
-            <a:off x="548640" y="2377440"/>
-            <a:ext cx="3474720" cy="3566160"/>
-          </a:xfrm>
-          <a:prstGeom prst="roundRect">
-            <a:avLst>
-              <a:gd name="adj" fmla="val 5263"/>
-            </a:avLst>
-          </a:prstGeom>
-          <a:solidFill>
-            <a:schemeClr val="bg1"/>
-          </a:solidFill>
-          <a:ln w="12700">
-            <a:solidFill>
-              <a:srgbClr val="D6E8EF"/>
-            </a:solidFill>
-            <a:prstDash val="solid"/>
-          </a:ln>
-          <a:effectLst>
-            <a:outerShdw sx="100000" sy="100000" kx="0" ky="0" algn="bl" rotWithShape="0" blurRad="127000" dist="38100" dir="5400000">
-              <a:srgbClr val="1E4D2B">
-                <a:alpha val="18000"/>
-              </a:srgbClr>
-            </a:outerShdw>
-          </a:effectLst>
-        </p:spPr>
-      </p:sp>
-      <p:sp>
-        <p:nvSpPr>
-          <p:cNvPr id="6" name="Home icon"/>
-          <p:cNvSpPr/>
-          <p:nvPr/>
-        </p:nvSpPr>
-        <p:spPr>
-          <a:xfrm>
-            <a:off x="1417320" y="2697480"/>
-            <a:ext cx="1737360" cy="1737360"/>
+            <a:off x="1828800" y="3429000"/>
+            <a:ext cx="2011680" cy="2011680"/>
           </a:xfrm>
           <a:prstGeom prst="ellipse">
             <a:avLst/>
@@ -5805,7 +5286,7 @@
       </p:sp>
       <p:pic>
         <p:nvPicPr>
-          <p:cNvPr id="7" name="Home icon glyph" descr="preencoded.png">    </p:cNvPr>
+          <p:cNvPr id="5" name="home icon glyph" descr="preencoded.png">    </p:cNvPr>
           <p:cNvPicPr>
             <a:picLocks noChangeAspect="1"/>
           </p:cNvPicPr>
@@ -5819,8 +5300,8 @@
         </p:blipFill>
         <p:spPr>
           <a:xfrm>
-            <a:off x="1834286" y="3114446"/>
-            <a:ext cx="903427" cy="903427"/>
+            <a:off x="2311603" y="3911803"/>
+            <a:ext cx="1046074" cy="1046074"/>
           </a:xfrm>
           <a:prstGeom prst="rect">
             <a:avLst/>
@@ -5829,84 +5310,14 @@
       </p:pic>
       <p:sp>
         <p:nvSpPr>
-          <p:cNvPr id="8" name="Text 4"/>
-          <p:cNvSpPr txBox="1"/>
-          <p:nvPr/>
-        </p:nvSpPr>
-        <p:spPr>
-          <a:xfrm>
-            <a:off x="548640" y="4709160"/>
-            <a:ext cx="3474720" cy="822960"/>
-          </a:xfrm>
-          <a:prstGeom prst="rect">
-            <a:avLst/>
-          </a:prstGeom>
-          <a:noFill/>
-          <a:ln/>
-        </p:spPr>
-        <p:txBody>
-          <a:bodyPr wrap="square" lIns="0" tIns="0" rIns="0" bIns="0" rtlCol="0" anchor="ctr"/>
-          <a:lstStyle/>
-          <a:p>
-            <a:pPr algn="ctr" indent="0" marL="0">
-              <a:buNone/>
-            </a:pPr>
-            <a:r>
-              <a:rPr lang="en-US" sz="3600" b="1" dirty="0">
-                <a:solidFill>
-                  <a:schemeClr val="tx2"/>
-                </a:solidFill>
-              </a:rPr>
-              <a:t>Home</a:t>
-            </a:r>
-            <a:endParaRPr lang="en-US" sz="3600" dirty="0"/>
-          </a:p>
-        </p:txBody>
-      </p:sp>
-      <p:sp>
-        <p:nvSpPr>
-          <p:cNvPr id="9" name="School card"/>
+          <p:cNvPr id="6" name="school icon"/>
           <p:cNvSpPr/>
           <p:nvPr/>
         </p:nvSpPr>
         <p:spPr>
           <a:xfrm>
-            <a:off x="4343400" y="2377440"/>
-            <a:ext cx="3474720" cy="3566160"/>
-          </a:xfrm>
-          <a:prstGeom prst="roundRect">
-            <a:avLst>
-              <a:gd name="adj" fmla="val 5263"/>
-            </a:avLst>
-          </a:prstGeom>
-          <a:solidFill>
-            <a:schemeClr val="bg1"/>
-          </a:solidFill>
-          <a:ln w="12700">
-            <a:solidFill>
-              <a:srgbClr val="D6E8EF"/>
-            </a:solidFill>
-            <a:prstDash val="solid"/>
-          </a:ln>
-          <a:effectLst>
-            <a:outerShdw sx="100000" sy="100000" kx="0" ky="0" algn="bl" rotWithShape="0" blurRad="127000" dist="38100" dir="5400000">
-              <a:srgbClr val="1E4D2B">
-                <a:alpha val="18000"/>
-              </a:srgbClr>
-            </a:outerShdw>
-          </a:effectLst>
-        </p:spPr>
-      </p:sp>
-      <p:sp>
-        <p:nvSpPr>
-          <p:cNvPr id="10" name="School icon"/>
-          <p:cNvSpPr/>
-          <p:nvPr/>
-        </p:nvSpPr>
-        <p:spPr>
-          <a:xfrm>
-            <a:off x="5212080" y="2697480"/>
-            <a:ext cx="1737360" cy="1737360"/>
+            <a:off x="5120640" y="3429000"/>
+            <a:ext cx="2011680" cy="2011680"/>
           </a:xfrm>
           <a:prstGeom prst="ellipse">
             <a:avLst/>
@@ -5919,7 +5330,7 @@
       </p:sp>
       <p:pic>
         <p:nvPicPr>
-          <p:cNvPr id="11" name="School icon glyph" descr="preencoded.png">    </p:cNvPr>
+          <p:cNvPr id="7" name="school icon glyph" descr="preencoded.png">    </p:cNvPr>
           <p:cNvPicPr>
             <a:picLocks noChangeAspect="1"/>
           </p:cNvPicPr>
@@ -5933,8 +5344,8 @@
         </p:blipFill>
         <p:spPr>
           <a:xfrm>
-            <a:off x="5629046" y="3114446"/>
-            <a:ext cx="903427" cy="903427"/>
+            <a:off x="5603443" y="3911803"/>
+            <a:ext cx="1046074" cy="1046074"/>
           </a:xfrm>
           <a:prstGeom prst="rect">
             <a:avLst/>
@@ -5943,84 +5354,14 @@
       </p:pic>
       <p:sp>
         <p:nvSpPr>
-          <p:cNvPr id="12" name="Text 7"/>
-          <p:cNvSpPr txBox="1"/>
-          <p:nvPr/>
-        </p:nvSpPr>
-        <p:spPr>
-          <a:xfrm>
-            <a:off x="4343400" y="4709160"/>
-            <a:ext cx="3474720" cy="822960"/>
-          </a:xfrm>
-          <a:prstGeom prst="rect">
-            <a:avLst/>
-          </a:prstGeom>
-          <a:noFill/>
-          <a:ln/>
-        </p:spPr>
-        <p:txBody>
-          <a:bodyPr wrap="square" lIns="0" tIns="0" rIns="0" bIns="0" rtlCol="0" anchor="ctr"/>
-          <a:lstStyle/>
-          <a:p>
-            <a:pPr algn="ctr" indent="0" marL="0">
-              <a:buNone/>
-            </a:pPr>
-            <a:r>
-              <a:rPr lang="en-US" sz="3600" b="1" dirty="0">
-                <a:solidFill>
-                  <a:schemeClr val="tx2"/>
-                </a:solidFill>
-              </a:rPr>
-              <a:t>School</a:t>
-            </a:r>
-            <a:endParaRPr lang="en-US" sz="3600" dirty="0"/>
-          </a:p>
-        </p:txBody>
-      </p:sp>
-      <p:sp>
-        <p:nvSpPr>
-          <p:cNvPr id="13" name="Workplace card"/>
+          <p:cNvPr id="8" name="work icon"/>
           <p:cNvSpPr/>
           <p:nvPr/>
         </p:nvSpPr>
         <p:spPr>
           <a:xfrm>
-            <a:off x="8138160" y="2377440"/>
-            <a:ext cx="3474720" cy="3566160"/>
-          </a:xfrm>
-          <a:prstGeom prst="roundRect">
-            <a:avLst>
-              <a:gd name="adj" fmla="val 5263"/>
-            </a:avLst>
-          </a:prstGeom>
-          <a:solidFill>
-            <a:schemeClr val="bg1"/>
-          </a:solidFill>
-          <a:ln w="12700">
-            <a:solidFill>
-              <a:srgbClr val="D6E8EF"/>
-            </a:solidFill>
-            <a:prstDash val="solid"/>
-          </a:ln>
-          <a:effectLst>
-            <a:outerShdw sx="100000" sy="100000" kx="0" ky="0" algn="bl" rotWithShape="0" blurRad="127000" dist="38100" dir="5400000">
-              <a:srgbClr val="1E4D2B">
-                <a:alpha val="18000"/>
-              </a:srgbClr>
-            </a:outerShdw>
-          </a:effectLst>
-        </p:spPr>
-      </p:sp>
-      <p:sp>
-        <p:nvSpPr>
-          <p:cNvPr id="14" name="Workplace icon"/>
-          <p:cNvSpPr/>
-          <p:nvPr/>
-        </p:nvSpPr>
-        <p:spPr>
-          <a:xfrm>
-            <a:off x="9006840" y="2697480"/>
-            <a:ext cx="1737360" cy="1737360"/>
+            <a:off x="8412480" y="3429000"/>
+            <a:ext cx="2011680" cy="2011680"/>
           </a:xfrm>
           <a:prstGeom prst="ellipse">
             <a:avLst/>
@@ -6033,7 +5374,7 @@
       </p:sp>
       <p:pic>
         <p:nvPicPr>
-          <p:cNvPr id="15" name="Workplace icon glyph" descr="preencoded.png">    </p:cNvPr>
+          <p:cNvPr id="9" name="work icon glyph" descr="preencoded.png">    </p:cNvPr>
           <p:cNvPicPr>
             <a:picLocks noChangeAspect="1"/>
           </p:cNvPicPr>
@@ -6047,50 +5388,14 @@
         </p:blipFill>
         <p:spPr>
           <a:xfrm>
-            <a:off x="9423806" y="3114446"/>
-            <a:ext cx="903427" cy="903427"/>
+            <a:off x="8895283" y="3911803"/>
+            <a:ext cx="1046074" cy="1046074"/>
           </a:xfrm>
           <a:prstGeom prst="rect">
             <a:avLst/>
           </a:prstGeom>
         </p:spPr>
       </p:pic>
-      <p:sp>
-        <p:nvSpPr>
-          <p:cNvPr id="16" name="Text 10"/>
-          <p:cNvSpPr txBox="1"/>
-          <p:nvPr/>
-        </p:nvSpPr>
-        <p:spPr>
-          <a:xfrm>
-            <a:off x="8138160" y="4709160"/>
-            <a:ext cx="3474720" cy="822960"/>
-          </a:xfrm>
-          <a:prstGeom prst="rect">
-            <a:avLst/>
-          </a:prstGeom>
-          <a:noFill/>
-          <a:ln/>
-        </p:spPr>
-        <p:txBody>
-          <a:bodyPr wrap="square" lIns="0" tIns="0" rIns="0" bIns="0" rtlCol="0" anchor="ctr"/>
-          <a:lstStyle/>
-          <a:p>
-            <a:pPr algn="ctr" indent="0" marL="0">
-              <a:buNone/>
-            </a:pPr>
-            <a:r>
-              <a:rPr lang="en-US" sz="3600" b="1" dirty="0">
-                <a:solidFill>
-                  <a:schemeClr val="tx2"/>
-                </a:solidFill>
-              </a:rPr>
-              <a:t>Workplace</a:t>
-            </a:r>
-            <a:endParaRPr lang="en-US" sz="3600" dirty="0"/>
-          </a:p>
-        </p:txBody>
-      </p:sp>
       <p:sp>
         <p:nvSpPr>
           <p:cNvPr id="25" name="Slide Number Placeholder 0"/>
@@ -6283,8 +5588,8 @@
         </p:nvSpPr>
         <p:spPr>
           <a:xfrm>
-            <a:off x="2468880" y="1737360"/>
-            <a:ext cx="3200400" cy="457200"/>
+            <a:off x="2468880" y="1691640"/>
+            <a:ext cx="3291840" cy="1783080"/>
           </a:xfrm>
           <a:prstGeom prst="rect">
             <a:avLst/>
@@ -6300,56 +5605,31 @@
               <a:buNone/>
             </a:pPr>
             <a:r>
-              <a:rPr lang="en-US" sz="2400" b="1" dirty="0">
+              <a:rPr lang="en-US" sz="2800" b="1" dirty="0">
                 <a:solidFill>
                   <a:schemeClr val="accent3"/>
                 </a:solidFill>
               </a:rPr>
-              <a:t>I</a:t>
-            </a:r>
-            <a:endParaRPr lang="en-US" sz="2400" dirty="0"/>
-          </a:p>
-        </p:txBody>
-      </p:sp>
-      <p:sp>
-        <p:nvSpPr>
-          <p:cNvPr id="8" name="Text 4"/>
-          <p:cNvSpPr txBox="1"/>
-          <p:nvPr/>
-        </p:nvSpPr>
-        <p:spPr>
-          <a:xfrm>
-            <a:off x="2468880" y="2148840"/>
-            <a:ext cx="3291840" cy="1325880"/>
-          </a:xfrm>
-          <a:prstGeom prst="rect">
-            <a:avLst/>
-          </a:prstGeom>
-          <a:noFill/>
-          <a:ln/>
-        </p:spPr>
-        <p:txBody>
-          <a:bodyPr wrap="square" lIns="0" tIns="0" rIns="0" bIns="0" rtlCol="0" anchor="t"/>
-          <a:lstStyle/>
-          <a:p>
+              <a:t>I. </a:t>
+            </a:r>
             <a:pPr indent="0" marL="0">
               <a:buNone/>
             </a:pPr>
             <a:r>
-              <a:rPr lang="en-US" sz="2600" b="1" dirty="0">
+              <a:rPr lang="en-US" sz="2800" b="1" dirty="0">
                 <a:solidFill>
                   <a:schemeClr val="tx2"/>
                 </a:solidFill>
               </a:rPr>
               <a:t>Manifest the Christ-like character</a:t>
             </a:r>
-            <a:endParaRPr lang="en-US" sz="2600" dirty="0"/>
-          </a:p>
-        </p:txBody>
-      </p:sp>
-      <p:sp>
-        <p:nvSpPr>
-          <p:cNvPr id="9" name="II card"/>
+            <a:endParaRPr lang="en-US" sz="2800" dirty="0"/>
+          </a:p>
+        </p:txBody>
+      </p:sp>
+      <p:sp>
+        <p:nvSpPr>
+          <p:cNvPr id="8" name="II card"/>
           <p:cNvSpPr/>
           <p:nvPr/>
         </p:nvSpPr>
@@ -6378,7 +5658,7 @@
       </p:sp>
       <p:sp>
         <p:nvSpPr>
-          <p:cNvPr id="10" name="II icon"/>
+          <p:cNvPr id="9" name="II icon"/>
           <p:cNvSpPr/>
           <p:nvPr/>
         </p:nvSpPr>
@@ -6398,7 +5678,7 @@
       </p:sp>
       <p:pic>
         <p:nvPicPr>
-          <p:cNvPr id="11" name="II icon glyph" descr="preencoded.png">    </p:cNvPr>
+          <p:cNvPr id="10" name="II icon glyph" descr="preencoded.png">    </p:cNvPr>
           <p:cNvPicPr>
             <a:picLocks noChangeAspect="1"/>
           </p:cNvPicPr>
@@ -6422,14 +5702,14 @@
       </p:pic>
       <p:sp>
         <p:nvSpPr>
-          <p:cNvPr id="12" name="Text 7"/>
+          <p:cNvPr id="11" name="Text 6"/>
           <p:cNvSpPr txBox="1"/>
           <p:nvPr/>
         </p:nvSpPr>
         <p:spPr>
           <a:xfrm>
-            <a:off x="8138160" y="1737360"/>
-            <a:ext cx="3200400" cy="457200"/>
+            <a:off x="8138160" y="1691640"/>
+            <a:ext cx="3291840" cy="1783080"/>
           </a:xfrm>
           <a:prstGeom prst="rect">
             <a:avLst/>
@@ -6445,56 +5725,31 @@
               <a:buNone/>
             </a:pPr>
             <a:r>
-              <a:rPr lang="en-US" sz="2400" b="1" dirty="0">
+              <a:rPr lang="en-US" sz="2800" b="1" dirty="0">
                 <a:solidFill>
                   <a:schemeClr val="accent3"/>
                 </a:solidFill>
               </a:rPr>
-              <a:t>II</a:t>
-            </a:r>
-            <a:endParaRPr lang="en-US" sz="2400" dirty="0"/>
-          </a:p>
-        </p:txBody>
-      </p:sp>
-      <p:sp>
-        <p:nvSpPr>
-          <p:cNvPr id="13" name="Text 8"/>
-          <p:cNvSpPr txBox="1"/>
-          <p:nvPr/>
-        </p:nvSpPr>
-        <p:spPr>
-          <a:xfrm>
-            <a:off x="8138160" y="2148840"/>
-            <a:ext cx="3291840" cy="1325880"/>
-          </a:xfrm>
-          <a:prstGeom prst="rect">
-            <a:avLst/>
-          </a:prstGeom>
-          <a:noFill/>
-          <a:ln/>
-        </p:spPr>
-        <p:txBody>
-          <a:bodyPr wrap="square" lIns="0" tIns="0" rIns="0" bIns="0" rtlCol="0" anchor="t"/>
-          <a:lstStyle/>
-          <a:p>
+              <a:t>II. </a:t>
+            </a:r>
             <a:pPr indent="0" marL="0">
               <a:buNone/>
             </a:pPr>
             <a:r>
-              <a:rPr lang="en-US" sz="2600" b="1" dirty="0">
+              <a:rPr lang="en-US" sz="2800" b="1" dirty="0">
                 <a:solidFill>
                   <a:schemeClr val="tx2"/>
                 </a:solidFill>
               </a:rPr>
               <a:t>Bring prayer</a:t>
             </a:r>
-            <a:endParaRPr lang="en-US" sz="2600" dirty="0"/>
-          </a:p>
-        </p:txBody>
-      </p:sp>
-      <p:sp>
-        <p:nvSpPr>
-          <p:cNvPr id="14" name="III card"/>
+            <a:endParaRPr lang="en-US" sz="2800" dirty="0"/>
+          </a:p>
+        </p:txBody>
+      </p:sp>
+      <p:sp>
+        <p:nvSpPr>
+          <p:cNvPr id="12" name="III card"/>
           <p:cNvSpPr/>
           <p:nvPr/>
         </p:nvSpPr>
@@ -6523,7 +5778,7 @@
       </p:sp>
       <p:sp>
         <p:nvSpPr>
-          <p:cNvPr id="15" name="III icon"/>
+          <p:cNvPr id="13" name="III icon"/>
           <p:cNvSpPr/>
           <p:nvPr/>
         </p:nvSpPr>
@@ -6543,7 +5798,7 @@
       </p:sp>
       <p:pic>
         <p:nvPicPr>
-          <p:cNvPr id="16" name="III icon glyph" descr="preencoded.png">    </p:cNvPr>
+          <p:cNvPr id="14" name="III icon glyph" descr="preencoded.png">    </p:cNvPr>
           <p:cNvPicPr>
             <a:picLocks noChangeAspect="1"/>
           </p:cNvPicPr>
@@ -6567,14 +5822,14 @@
       </p:pic>
       <p:sp>
         <p:nvSpPr>
-          <p:cNvPr id="17" name="Text 11"/>
+          <p:cNvPr id="15" name="Text 9"/>
           <p:cNvSpPr txBox="1"/>
           <p:nvPr/>
         </p:nvSpPr>
         <p:spPr>
           <a:xfrm>
-            <a:off x="2468880" y="4023360"/>
-            <a:ext cx="3200400" cy="457200"/>
+            <a:off x="2468880" y="3977640"/>
+            <a:ext cx="3291840" cy="1783080"/>
           </a:xfrm>
           <a:prstGeom prst="rect">
             <a:avLst/>
@@ -6590,56 +5845,31 @@
               <a:buNone/>
             </a:pPr>
             <a:r>
-              <a:rPr lang="en-US" sz="2400" b="1" dirty="0">
+              <a:rPr lang="en-US" sz="2800" b="1" dirty="0">
                 <a:solidFill>
                   <a:schemeClr val="accent3"/>
                 </a:solidFill>
               </a:rPr>
-              <a:t>III</a:t>
-            </a:r>
-            <a:endParaRPr lang="en-US" sz="2400" dirty="0"/>
-          </a:p>
-        </p:txBody>
-      </p:sp>
-      <p:sp>
-        <p:nvSpPr>
-          <p:cNvPr id="18" name="Text 12"/>
-          <p:cNvSpPr txBox="1"/>
-          <p:nvPr/>
-        </p:nvSpPr>
-        <p:spPr>
-          <a:xfrm>
-            <a:off x="2468880" y="4434840"/>
-            <a:ext cx="3291840" cy="1325880"/>
-          </a:xfrm>
-          <a:prstGeom prst="rect">
-            <a:avLst/>
-          </a:prstGeom>
-          <a:noFill/>
-          <a:ln/>
-        </p:spPr>
-        <p:txBody>
-          <a:bodyPr wrap="square" lIns="0" tIns="0" rIns="0" bIns="0" rtlCol="0" anchor="t"/>
-          <a:lstStyle/>
-          <a:p>
+              <a:t>III. </a:t>
+            </a:r>
             <a:pPr indent="0" marL="0">
               <a:buNone/>
             </a:pPr>
             <a:r>
-              <a:rPr lang="en-US" sz="2600" b="1" dirty="0">
+              <a:rPr lang="en-US" sz="2800" b="1" dirty="0">
                 <a:solidFill>
                   <a:schemeClr val="tx2"/>
                 </a:solidFill>
               </a:rPr>
               <a:t>Bring the Word of God</a:t>
             </a:r>
-            <a:endParaRPr lang="en-US" sz="2600" dirty="0"/>
-          </a:p>
-        </p:txBody>
-      </p:sp>
-      <p:sp>
-        <p:nvSpPr>
-          <p:cNvPr id="19" name="IV card"/>
+            <a:endParaRPr lang="en-US" sz="2800" dirty="0"/>
+          </a:p>
+        </p:txBody>
+      </p:sp>
+      <p:sp>
+        <p:nvSpPr>
+          <p:cNvPr id="16" name="IV card"/>
           <p:cNvSpPr/>
           <p:nvPr/>
         </p:nvSpPr>
@@ -6668,7 +5898,7 @@
       </p:sp>
       <p:sp>
         <p:nvSpPr>
-          <p:cNvPr id="20" name="IV icon"/>
+          <p:cNvPr id="17" name="IV icon"/>
           <p:cNvSpPr/>
           <p:nvPr/>
         </p:nvSpPr>
@@ -6688,7 +5918,7 @@
       </p:sp>
       <p:pic>
         <p:nvPicPr>
-          <p:cNvPr id="21" name="IV icon glyph" descr="preencoded.png">    </p:cNvPr>
+          <p:cNvPr id="18" name="IV icon glyph" descr="preencoded.png">    </p:cNvPr>
           <p:cNvPicPr>
             <a:picLocks noChangeAspect="1"/>
           </p:cNvPicPr>
@@ -6712,14 +5942,14 @@
       </p:pic>
       <p:sp>
         <p:nvSpPr>
-          <p:cNvPr id="22" name="Text 15"/>
+          <p:cNvPr id="19" name="Text 12"/>
           <p:cNvSpPr txBox="1"/>
           <p:nvPr/>
         </p:nvSpPr>
         <p:spPr>
           <a:xfrm>
-            <a:off x="8138160" y="4023360"/>
-            <a:ext cx="3200400" cy="457200"/>
+            <a:off x="8138160" y="3977640"/>
+            <a:ext cx="3291840" cy="1783080"/>
           </a:xfrm>
           <a:prstGeom prst="rect">
             <a:avLst/>
@@ -6735,50 +5965,25 @@
               <a:buNone/>
             </a:pPr>
             <a:r>
-              <a:rPr lang="en-US" sz="2400" b="1" dirty="0">
+              <a:rPr lang="en-US" sz="2800" b="1" dirty="0">
                 <a:solidFill>
                   <a:schemeClr val="accent3"/>
                 </a:solidFill>
               </a:rPr>
-              <a:t>IV</a:t>
-            </a:r>
-            <a:endParaRPr lang="en-US" sz="2400" dirty="0"/>
-          </a:p>
-        </p:txBody>
-      </p:sp>
-      <p:sp>
-        <p:nvSpPr>
-          <p:cNvPr id="23" name="Text 16"/>
-          <p:cNvSpPr txBox="1"/>
-          <p:nvPr/>
-        </p:nvSpPr>
-        <p:spPr>
-          <a:xfrm>
-            <a:off x="8138160" y="4434840"/>
-            <a:ext cx="3291840" cy="1325880"/>
-          </a:xfrm>
-          <a:prstGeom prst="rect">
-            <a:avLst/>
-          </a:prstGeom>
-          <a:noFill/>
-          <a:ln/>
-        </p:spPr>
-        <p:txBody>
-          <a:bodyPr wrap="square" lIns="0" tIns="0" rIns="0" bIns="0" rtlCol="0" anchor="t"/>
-          <a:lstStyle/>
-          <a:p>
+              <a:t>IV. </a:t>
+            </a:r>
             <a:pPr indent="0" marL="0">
               <a:buNone/>
             </a:pPr>
             <a:r>
-              <a:rPr lang="en-US" sz="2600" b="1" dirty="0">
+              <a:rPr lang="en-US" sz="2800" b="1" dirty="0">
                 <a:solidFill>
                   <a:schemeClr val="tx2"/>
                 </a:solidFill>
               </a:rPr>
-              <a:t>Bring the cell group into your home, school &amp; workplace</a:t>
-            </a:r>
-            <a:endParaRPr lang="en-US" sz="2600" dirty="0"/>
+              <a:t>Bring the cell group into your home, schools, and workplace</a:t>
+            </a:r>
+            <a:endParaRPr lang="en-US" sz="2800" dirty="0"/>
           </a:p>
         </p:txBody>
       </p:sp>
@@ -6863,8 +6068,8 @@
         </p:nvSpPr>
         <p:spPr>
           <a:xfrm>
-            <a:off x="548640" y="914400"/>
-            <a:ext cx="2743200" cy="4206240"/>
+            <a:off x="365760" y="914400"/>
+            <a:ext cx="3291840" cy="4206240"/>
           </a:xfrm>
           <a:prstGeom prst="rect">
             <a:avLst/>
@@ -6880,7 +6085,7 @@
               <a:buNone/>
             </a:pPr>
             <a:r>
-              <a:rPr lang="en-US" sz="28000" b="1" dirty="0">
+              <a:rPr lang="en-US" sz="25000" b="1" dirty="0">
                 <a:solidFill>
                   <a:schemeClr val="accent4"/>
                 </a:solidFill>
@@ -6888,22 +6093,22 @@
                 <a:ea typeface="Cambria" pitchFamily="34" charset="-122"/>
                 <a:cs typeface="Cambria" pitchFamily="34" charset="-120"/>
               </a:rPr>
-              <a:t>4</a:t>
-            </a:r>
-            <a:endParaRPr lang="en-US" sz="28000" dirty="0"/>
-          </a:p>
-        </p:txBody>
-      </p:sp>
-      <p:sp>
-        <p:nvSpPr>
-          <p:cNvPr id="4" name="Kicker"/>
+              <a:t>4.</a:t>
+            </a:r>
+            <a:endParaRPr lang="en-US" sz="25000" dirty="0"/>
+          </a:p>
+        </p:txBody>
+      </p:sp>
+      <p:sp>
+        <p:nvSpPr>
+          <p:cNvPr id="4" name="Section title"/>
           <p:cNvSpPr txBox="1"/>
           <p:nvPr/>
         </p:nvSpPr>
         <p:spPr>
           <a:xfrm>
-            <a:off x="3474720" y="1965960"/>
-            <a:ext cx="5120640" cy="640080"/>
+            <a:off x="3749040" y="1737360"/>
+            <a:ext cx="5029200" cy="3108960"/>
           </a:xfrm>
           <a:prstGeom prst="rect">
             <a:avLst/>
@@ -6913,42 +6118,6 @@
         </p:spPr>
         <p:txBody>
           <a:bodyPr wrap="square" lIns="0" tIns="0" rIns="0" bIns="0" rtlCol="0" anchor="ctr"/>
-          <a:lstStyle/>
-          <a:p>
-            <a:pPr indent="0" marL="0">
-              <a:buNone/>
-            </a:pPr>
-            <a:r>
-              <a:rPr lang="en-US" sz="3000" b="1" spc="1000" kern="0" dirty="0">
-                <a:solidFill>
-                  <a:schemeClr val="bg2"/>
-                </a:solidFill>
-              </a:rPr>
-              <a:t>SOW</a:t>
-            </a:r>
-            <a:endParaRPr lang="en-US" sz="3000" dirty="0"/>
-          </a:p>
-        </p:txBody>
-      </p:sp>
-      <p:sp>
-        <p:nvSpPr>
-          <p:cNvPr id="5" name="Section title"/>
-          <p:cNvSpPr txBox="1"/>
-          <p:nvPr/>
-        </p:nvSpPr>
-        <p:spPr>
-          <a:xfrm>
-            <a:off x="3474720" y="2606040"/>
-            <a:ext cx="5303520" cy="2011680"/>
-          </a:xfrm>
-          <a:prstGeom prst="rect">
-            <a:avLst/>
-          </a:prstGeom>
-          <a:noFill/>
-          <a:ln/>
-        </p:spPr>
-        <p:txBody>
-          <a:bodyPr wrap="square" lIns="0" tIns="0" rIns="0" bIns="0" rtlCol="0" anchor="t"/>
           <a:lstStyle/>
           <a:p>
             <a:pPr indent="0" marL="0">
@@ -6963,7 +6132,7 @@
                 <a:ea typeface="Cambria" pitchFamily="34" charset="-122"/>
                 <a:cs typeface="Cambria" pitchFamily="34" charset="-120"/>
               </a:rPr>
-              <a:t>Discipline</a:t>
+              <a:t>Sow Discipline</a:t>
             </a:r>
             <a:endParaRPr lang="en-US" sz="6000" dirty="0"/>
           </a:p>
@@ -6971,43 +6140,7 @@
       </p:sp>
       <p:sp>
         <p:nvSpPr>
-          <p:cNvPr id="6" name="Progress"/>
-          <p:cNvSpPr txBox="1"/>
-          <p:nvPr/>
-        </p:nvSpPr>
-        <p:spPr>
-          <a:xfrm>
-            <a:off x="3474720" y="4800600"/>
-            <a:ext cx="5120640" cy="548640"/>
-          </a:xfrm>
-          <a:prstGeom prst="rect">
-            <a:avLst/>
-          </a:prstGeom>
-          <a:noFill/>
-          <a:ln/>
-        </p:spPr>
-        <p:txBody>
-          <a:bodyPr wrap="square" lIns="0" tIns="0" rIns="0" bIns="0" rtlCol="0" anchor="ctr"/>
-          <a:lstStyle/>
-          <a:p>
-            <a:pPr indent="0" marL="0">
-              <a:buNone/>
-            </a:pPr>
-            <a:r>
-              <a:rPr lang="en-US" sz="2400" i="1" dirty="0">
-                <a:solidFill>
-                  <a:schemeClr val="accent1"/>
-                </a:solidFill>
-              </a:rPr>
-              <a:t>Seed 4 of 5</a:t>
-            </a:r>
-            <a:endParaRPr lang="en-US" sz="2400" dirty="0"/>
-          </a:p>
-        </p:txBody>
-      </p:sp>
-      <p:sp>
-        <p:nvSpPr>
-          <p:cNvPr id="7" name="Section icon"/>
+          <p:cNvPr id="5" name="Section icon"/>
           <p:cNvSpPr/>
           <p:nvPr/>
         </p:nvSpPr>
@@ -7027,7 +6160,7 @@
       </p:sp>
       <p:pic>
         <p:nvPicPr>
-          <p:cNvPr id="8" name="Section icon glyph" descr="preencoded.png">    </p:cNvPr>
+          <p:cNvPr id="6" name="Section icon glyph" descr="preencoded.png">    </p:cNvPr>
           <p:cNvPicPr>
             <a:picLocks noChangeAspect="1"/>
           </p:cNvPicPr>
@@ -7193,7 +6326,7 @@
                 <a:ea typeface="Cambria" pitchFamily="34" charset="-122"/>
                 <a:cs typeface="Cambria" pitchFamily="34" charset="-120"/>
               </a:rPr>
-              <a:t>SELF-CONTROL</a:t>
+              <a:t>self control</a:t>
             </a:r>
             <a:endParaRPr lang="en-US" sz="6600" dirty="0"/>
           </a:p>
@@ -7300,7 +6433,7 @@
               <a:buNone/>
             </a:pPr>
             <a:r>
-              <a:rPr lang="en-US" sz="4000" dirty="0">
+              <a:rPr lang="en-US" sz="4200" dirty="0">
                 <a:solidFill>
                   <a:schemeClr val="tx2"/>
                 </a:solidFill>
@@ -7308,43 +6441,9 @@
                 <a:ea typeface="Cambria" pitchFamily="34" charset="-122"/>
                 <a:cs typeface="Cambria" pitchFamily="34" charset="-120"/>
               </a:rPr>
-              <a:t>Now that we are healed and delivered from our old life, let us sow </a:t>
-            </a:r>
-            <a:pPr indent="0" marL="0">
-              <a:lnSpc>
-                <a:spcPct val="110000"/>
-              </a:lnSpc>
-              <a:buNone/>
-            </a:pPr>
-            <a:r>
-              <a:rPr lang="en-US" sz="4000" b="1" dirty="0">
-                <a:solidFill>
-                  <a:schemeClr val="accent4"/>
-                </a:solidFill>
-                <a:latin typeface="Cambria" pitchFamily="34" charset="0"/>
-                <a:ea typeface="Cambria" pitchFamily="34" charset="-122"/>
-                <a:cs typeface="Cambria" pitchFamily="34" charset="-120"/>
-              </a:rPr>
-              <a:t>positive seeds</a:t>
-            </a:r>
-            <a:pPr indent="0" marL="0">
-              <a:lnSpc>
-                <a:spcPct val="110000"/>
-              </a:lnSpc>
-              <a:buNone/>
-            </a:pPr>
-            <a:r>
-              <a:rPr lang="en-US" sz="4000" dirty="0">
-                <a:solidFill>
-                  <a:schemeClr val="tx2"/>
-                </a:solidFill>
-                <a:latin typeface="Cambria" pitchFamily="34" charset="0"/>
-                <a:ea typeface="Cambria" pitchFamily="34" charset="-122"/>
-                <a:cs typeface="Cambria" pitchFamily="34" charset="-120"/>
-              </a:rPr>
-              <a:t> to our family and friends.</a:t>
-            </a:r>
-            <a:endParaRPr lang="en-US" sz="4000" dirty="0"/>
+              <a:t>Now that we are healed and delivered from our old life let us sow positive seeds to our family and friends</a:t>
+            </a:r>
+            <a:endParaRPr lang="en-US" sz="4200" dirty="0"/>
           </a:p>
         </p:txBody>
       </p:sp>
@@ -7477,7 +6576,7 @@
                   <a:schemeClr val="tx2"/>
                 </a:solidFill>
               </a:rPr>
-              <a:t>Discipline means</a:t>
+              <a:t>Discipline means:</a:t>
             </a:r>
             <a:endParaRPr lang="en-US" sz="4000" dirty="0"/>
           </a:p>
@@ -7485,13 +6584,13 @@
       </p:sp>
       <p:sp>
         <p:nvSpPr>
-          <p:cNvPr id="4" name="Self-control row"/>
+          <p:cNvPr id="4" name="Point row"/>
           <p:cNvSpPr/>
           <p:nvPr/>
         </p:nvSpPr>
         <p:spPr>
           <a:xfrm>
-            <a:off x="548640" y="1554480"/>
+            <a:off x="548640" y="1600200"/>
             <a:ext cx="11064240" cy="1234440"/>
           </a:xfrm>
           <a:prstGeom prst="roundRect">
@@ -7507,13 +6606,13 @@
       </p:sp>
       <p:sp>
         <p:nvSpPr>
-          <p:cNvPr id="5" name="Self-control icon"/>
+          <p:cNvPr id="5" name="Point icon"/>
           <p:cNvSpPr/>
           <p:nvPr/>
         </p:nvSpPr>
         <p:spPr>
           <a:xfrm>
-            <a:off x="777240" y="1691640"/>
+            <a:off x="777240" y="1737360"/>
             <a:ext cx="960120" cy="960120"/>
           </a:xfrm>
           <a:prstGeom prst="ellipse">
@@ -7527,7 +6626,7 @@
       </p:sp>
       <p:pic>
         <p:nvPicPr>
-          <p:cNvPr id="6" name="Self-control icon glyph" descr="preencoded.png">    </p:cNvPr>
+          <p:cNvPr id="6" name="Point icon glyph" descr="preencoded.png">    </p:cNvPr>
           <p:cNvPicPr>
             <a:picLocks noChangeAspect="1"/>
           </p:cNvPicPr>
@@ -7541,7 +6640,7 @@
         </p:blipFill>
         <p:spPr>
           <a:xfrm>
-            <a:off x="1007669" y="1922069"/>
+            <a:off x="1007669" y="1967789"/>
             <a:ext cx="499262" cy="499262"/>
           </a:xfrm>
           <a:prstGeom prst="rect">
@@ -7557,8 +6656,8 @@
         </p:nvSpPr>
         <p:spPr>
           <a:xfrm>
-            <a:off x="2011680" y="1554480"/>
-            <a:ext cx="3108960" cy="1234440"/>
+            <a:off x="2011680" y="1600200"/>
+            <a:ext cx="9418320" cy="1234440"/>
           </a:xfrm>
           <a:prstGeom prst="rect">
             <a:avLst/>
@@ -7574,62 +6673,26 @@
               <a:buNone/>
             </a:pPr>
             <a:r>
-              <a:rPr lang="en-US" sz="3200" b="1" dirty="0">
-                <a:solidFill>
-                  <a:schemeClr val="accent4"/>
+              <a:rPr lang="en-US" sz="3400" b="1" dirty="0">
+                <a:solidFill>
+                  <a:schemeClr val="tx2"/>
                 </a:solidFill>
               </a:rPr>
-              <a:t>Self-control</a:t>
-            </a:r>
-            <a:endParaRPr lang="en-US" sz="3200" dirty="0"/>
-          </a:p>
-        </p:txBody>
-      </p:sp>
-      <p:sp>
-        <p:nvSpPr>
-          <p:cNvPr id="8" name="Text 4"/>
-          <p:cNvSpPr txBox="1"/>
-          <p:nvPr/>
-        </p:nvSpPr>
-        <p:spPr>
-          <a:xfrm>
-            <a:off x="5212080" y="1554480"/>
-            <a:ext cx="6217920" cy="1234440"/>
-          </a:xfrm>
-          <a:prstGeom prst="rect">
-            <a:avLst/>
-          </a:prstGeom>
-          <a:noFill/>
-          <a:ln/>
-        </p:spPr>
-        <p:txBody>
-          <a:bodyPr wrap="square" lIns="0" tIns="0" rIns="0" bIns="0" rtlCol="0" anchor="ctr"/>
-          <a:lstStyle/>
-          <a:p>
-            <a:pPr indent="0" marL="0">
-              <a:buNone/>
-            </a:pPr>
-            <a:r>
-              <a:rPr lang="en-US" sz="2800" dirty="0">
-                <a:solidFill>
-                  <a:schemeClr val="tx2"/>
-                </a:solidFill>
-              </a:rPr>
-              <a:t>Not impulsive and uncontrolled</a:t>
-            </a:r>
-            <a:endParaRPr lang="en-US" sz="2800" dirty="0"/>
-          </a:p>
-        </p:txBody>
-      </p:sp>
-      <p:sp>
-        <p:nvSpPr>
-          <p:cNvPr id="9" name="Order row"/>
+              <a:t>Self control; not impulsive and uncontrolled</a:t>
+            </a:r>
+            <a:endParaRPr lang="en-US" sz="3400" dirty="0"/>
+          </a:p>
+        </p:txBody>
+      </p:sp>
+      <p:sp>
+        <p:nvSpPr>
+          <p:cNvPr id="8" name="Point row"/>
           <p:cNvSpPr/>
           <p:nvPr/>
         </p:nvSpPr>
         <p:spPr>
           <a:xfrm>
-            <a:off x="548640" y="3017520"/>
+            <a:off x="548640" y="3063240"/>
             <a:ext cx="11064240" cy="1234440"/>
           </a:xfrm>
           <a:prstGeom prst="roundRect">
@@ -7645,13 +6708,13 @@
       </p:sp>
       <p:sp>
         <p:nvSpPr>
-          <p:cNvPr id="10" name="Order icon"/>
+          <p:cNvPr id="9" name="Point icon"/>
           <p:cNvSpPr/>
           <p:nvPr/>
         </p:nvSpPr>
         <p:spPr>
           <a:xfrm>
-            <a:off x="777240" y="3154680"/>
+            <a:off x="777240" y="3200400"/>
             <a:ext cx="960120" cy="960120"/>
           </a:xfrm>
           <a:prstGeom prst="ellipse">
@@ -7665,7 +6728,7 @@
       </p:sp>
       <p:pic>
         <p:nvPicPr>
-          <p:cNvPr id="11" name="Order icon glyph" descr="preencoded.png">    </p:cNvPr>
+          <p:cNvPr id="10" name="Point icon glyph" descr="preencoded.png">    </p:cNvPr>
           <p:cNvPicPr>
             <a:picLocks noChangeAspect="1"/>
           </p:cNvPicPr>
@@ -7679,7 +6742,7 @@
         </p:blipFill>
         <p:spPr>
           <a:xfrm>
-            <a:off x="1007669" y="3385109"/>
+            <a:off x="1007669" y="3430829"/>
             <a:ext cx="499262" cy="499262"/>
           </a:xfrm>
           <a:prstGeom prst="rect">
@@ -7689,14 +6752,14 @@
       </p:pic>
       <p:sp>
         <p:nvSpPr>
-          <p:cNvPr id="12" name="Text 7"/>
+          <p:cNvPr id="11" name="Text 6"/>
           <p:cNvSpPr txBox="1"/>
           <p:nvPr/>
         </p:nvSpPr>
         <p:spPr>
           <a:xfrm>
-            <a:off x="2011680" y="3017520"/>
-            <a:ext cx="3108960" cy="1234440"/>
+            <a:off x="2011680" y="3063240"/>
+            <a:ext cx="9418320" cy="1234440"/>
           </a:xfrm>
           <a:prstGeom prst="rect">
             <a:avLst/>
@@ -7712,62 +6775,26 @@
               <a:buNone/>
             </a:pPr>
             <a:r>
-              <a:rPr lang="en-US" sz="3200" b="1" dirty="0">
-                <a:solidFill>
-                  <a:schemeClr val="accent4"/>
+              <a:rPr lang="en-US" sz="3400" b="1" dirty="0">
+                <a:solidFill>
+                  <a:schemeClr val="tx2"/>
                 </a:solidFill>
               </a:rPr>
-              <a:t>Order</a:t>
-            </a:r>
-            <a:endParaRPr lang="en-US" sz="3200" dirty="0"/>
-          </a:p>
-        </p:txBody>
-      </p:sp>
-      <p:sp>
-        <p:nvSpPr>
-          <p:cNvPr id="13" name="Text 8"/>
-          <p:cNvSpPr txBox="1"/>
-          <p:nvPr/>
-        </p:nvSpPr>
-        <p:spPr>
-          <a:xfrm>
-            <a:off x="5212080" y="3017520"/>
-            <a:ext cx="6217920" cy="1234440"/>
-          </a:xfrm>
-          <a:prstGeom prst="rect">
-            <a:avLst/>
-          </a:prstGeom>
-          <a:noFill/>
-          <a:ln/>
-        </p:spPr>
-        <p:txBody>
-          <a:bodyPr wrap="square" lIns="0" tIns="0" rIns="0" bIns="0" rtlCol="0" anchor="ctr"/>
-          <a:lstStyle/>
-          <a:p>
-            <a:pPr indent="0" marL="0">
-              <a:buNone/>
-            </a:pPr>
-            <a:r>
-              <a:rPr lang="en-US" sz="2800" dirty="0">
-                <a:solidFill>
-                  <a:schemeClr val="tx2"/>
-                </a:solidFill>
-              </a:rPr>
-              <a:t>Proper management</a:t>
-            </a:r>
-            <a:endParaRPr lang="en-US" sz="2800" dirty="0"/>
-          </a:p>
-        </p:txBody>
-      </p:sp>
-      <p:sp>
-        <p:nvSpPr>
-          <p:cNvPr id="14" name="Priorities row"/>
+              <a:t>Order and proper management</a:t>
+            </a:r>
+            <a:endParaRPr lang="en-US" sz="3400" dirty="0"/>
+          </a:p>
+        </p:txBody>
+      </p:sp>
+      <p:sp>
+        <p:nvSpPr>
+          <p:cNvPr id="12" name="Point row"/>
           <p:cNvSpPr/>
           <p:nvPr/>
         </p:nvSpPr>
         <p:spPr>
           <a:xfrm>
-            <a:off x="548640" y="4480560"/>
+            <a:off x="548640" y="4526280"/>
             <a:ext cx="11064240" cy="1234440"/>
           </a:xfrm>
           <a:prstGeom prst="roundRect">
@@ -7783,13 +6810,13 @@
       </p:sp>
       <p:sp>
         <p:nvSpPr>
-          <p:cNvPr id="15" name="Priorities icon"/>
+          <p:cNvPr id="13" name="Point icon"/>
           <p:cNvSpPr/>
           <p:nvPr/>
         </p:nvSpPr>
         <p:spPr>
           <a:xfrm>
-            <a:off x="777240" y="4617720"/>
+            <a:off x="777240" y="4663440"/>
             <a:ext cx="960120" cy="960120"/>
           </a:xfrm>
           <a:prstGeom prst="ellipse">
@@ -7803,7 +6830,7 @@
       </p:sp>
       <p:pic>
         <p:nvPicPr>
-          <p:cNvPr id="16" name="Priorities icon glyph" descr="preencoded.png">    </p:cNvPr>
+          <p:cNvPr id="14" name="Point icon glyph" descr="preencoded.png">    </p:cNvPr>
           <p:cNvPicPr>
             <a:picLocks noChangeAspect="1"/>
           </p:cNvPicPr>
@@ -7817,7 +6844,7 @@
         </p:blipFill>
         <p:spPr>
           <a:xfrm>
-            <a:off x="1007669" y="4848149"/>
+            <a:off x="1007669" y="4893869"/>
             <a:ext cx="499262" cy="499262"/>
           </a:xfrm>
           <a:prstGeom prst="rect">
@@ -7827,14 +6854,14 @@
       </p:pic>
       <p:sp>
         <p:nvSpPr>
-          <p:cNvPr id="17" name="Text 11"/>
+          <p:cNvPr id="15" name="Text 9"/>
           <p:cNvSpPr txBox="1"/>
           <p:nvPr/>
         </p:nvSpPr>
         <p:spPr>
           <a:xfrm>
-            <a:off x="2011680" y="4480560"/>
-            <a:ext cx="3108960" cy="1234440"/>
+            <a:off x="2011680" y="4526280"/>
+            <a:ext cx="9418320" cy="1234440"/>
           </a:xfrm>
           <a:prstGeom prst="rect">
             <a:avLst/>
@@ -7850,50 +6877,14 @@
               <a:buNone/>
             </a:pPr>
             <a:r>
-              <a:rPr lang="en-US" sz="3200" b="1" dirty="0">
-                <a:solidFill>
-                  <a:schemeClr val="accent4"/>
-                </a:solidFill>
-              </a:rPr>
-              <a:t>Priorities</a:t>
-            </a:r>
-            <a:endParaRPr lang="en-US" sz="3200" dirty="0"/>
-          </a:p>
-        </p:txBody>
-      </p:sp>
-      <p:sp>
-        <p:nvSpPr>
-          <p:cNvPr id="18" name="Text 12"/>
-          <p:cNvSpPr txBox="1"/>
-          <p:nvPr/>
-        </p:nvSpPr>
-        <p:spPr>
-          <a:xfrm>
-            <a:off x="5212080" y="4480560"/>
-            <a:ext cx="6217920" cy="1234440"/>
-          </a:xfrm>
-          <a:prstGeom prst="rect">
-            <a:avLst/>
-          </a:prstGeom>
-          <a:noFill/>
-          <a:ln/>
-        </p:spPr>
-        <p:txBody>
-          <a:bodyPr wrap="square" lIns="0" tIns="0" rIns="0" bIns="0" rtlCol="0" anchor="ctr"/>
-          <a:lstStyle/>
-          <a:p>
-            <a:pPr indent="0" marL="0">
-              <a:buNone/>
-            </a:pPr>
-            <a:r>
-              <a:rPr lang="en-US" sz="2800" dirty="0">
+              <a:rPr lang="en-US" sz="3400" b="1" dirty="0">
                 <a:solidFill>
                   <a:schemeClr val="tx2"/>
                 </a:solidFill>
               </a:rPr>
               <a:t>Sticking to right priorities and activities</a:t>
             </a:r>
-            <a:endParaRPr lang="en-US" sz="2800" dirty="0"/>
+            <a:endParaRPr lang="en-US" sz="3400" dirty="0"/>
           </a:p>
         </p:txBody>
       </p:sp>
@@ -8048,7 +7039,7 @@
                 <a:ea typeface="Cambria" pitchFamily="34" charset="-122"/>
                 <a:cs typeface="Cambria" pitchFamily="34" charset="-120"/>
               </a:rPr>
-              <a:t>Be self-controlled and alert.</a:t>
+              <a:t>Be self-controlled</a:t>
             </a:r>
             <a:pPr indent="0" marL="0">
               <a:lnSpc>
@@ -8068,7 +7059,7 @@
                 <a:ea typeface="Cambria" pitchFamily="34" charset="-122"/>
                 <a:cs typeface="Cambria" pitchFamily="34" charset="-120"/>
               </a:rPr>
-              <a:t> Your enemy the devil prowls around like a roaring lion looking for someone to devour.</a:t>
+              <a:t> and alert. Your enemy the devil prowls around like a roaring lion looking for someone to devour.</a:t>
             </a:r>
             <a:endParaRPr lang="en-US" sz="4000" dirty="0"/>
           </a:p>
@@ -8104,7 +7095,7 @@
                   <a:schemeClr val="accent1"/>
                 </a:solidFill>
               </a:rPr>
-              <a:t>— 1 Peter 5:8 (NIV)</a:t>
+              <a:t>1 Peter 5:8 (NIV)</a:t>
             </a:r>
             <a:endParaRPr lang="en-US" sz="2800" dirty="0"/>
           </a:p>
@@ -8252,35 +7243,15 @@
               <a:buNone/>
             </a:pPr>
             <a:r>
-              <a:rPr lang="en-US" sz="3600" b="1" dirty="0">
-                <a:solidFill>
-                  <a:schemeClr val="accent1"/>
+              <a:rPr lang="en-US" sz="3600" dirty="0">
+                <a:solidFill>
+                  <a:schemeClr val="bg1"/>
                 </a:solidFill>
                 <a:latin typeface="Cambria" pitchFamily="34" charset="0"/>
                 <a:ea typeface="Cambria" pitchFamily="34" charset="-122"/>
                 <a:cs typeface="Cambria" pitchFamily="34" charset="-120"/>
               </a:rPr>
-              <a:t>I discipline my body like an athlete</a:t>
-            </a:r>
-            <a:pPr indent="0" marL="0">
-              <a:lnSpc>
-                <a:spcPct val="108000"/>
-              </a:lnSpc>
-              <a:spcAft>
-                <a:spcPts val="600"/>
-              </a:spcAft>
-              <a:buNone/>
-            </a:pPr>
-            <a:r>
-              <a:rPr lang="en-US" sz="3600" dirty="0">
-                <a:solidFill>
-                  <a:schemeClr val="bg1"/>
-                </a:solidFill>
-                <a:latin typeface="Cambria" pitchFamily="34" charset="0"/>
-                <a:ea typeface="Cambria" pitchFamily="34" charset="-122"/>
-                <a:cs typeface="Cambria" pitchFamily="34" charset="-120"/>
-              </a:rPr>
-              <a:t>, training it to do what it should. Otherwise, I fear that after preaching to others I myself might be disqualified.</a:t>
+              <a:t>I discipline my body like an athlete, training it to do what it should. Otherwise, I fear that after preaching to others I myself might be disqualified.</a:t>
             </a:r>
             <a:endParaRPr lang="en-US" sz="3600" dirty="0"/>
           </a:p>
@@ -8316,7 +7287,7 @@
                   <a:schemeClr val="accent1"/>
                 </a:solidFill>
               </a:rPr>
-              <a:t>— 1 Corinthians 9:27 (NLT)</a:t>
+              <a:t>1 Corinthians 9:27 (NLT)</a:t>
             </a:r>
             <a:endParaRPr lang="en-US" sz="2800" dirty="0"/>
           </a:p>
@@ -8402,8 +7373,8 @@
         </p:nvSpPr>
         <p:spPr>
           <a:xfrm>
-            <a:off x="548640" y="914400"/>
-            <a:ext cx="2743200" cy="4206240"/>
+            <a:off x="365760" y="914400"/>
+            <a:ext cx="3291840" cy="4206240"/>
           </a:xfrm>
           <a:prstGeom prst="rect">
             <a:avLst/>
@@ -8419,7 +7390,7 @@
               <a:buNone/>
             </a:pPr>
             <a:r>
-              <a:rPr lang="en-US" sz="28000" b="1" dirty="0">
+              <a:rPr lang="en-US" sz="25000" b="1" dirty="0">
                 <a:solidFill>
                   <a:schemeClr val="accent5"/>
                 </a:solidFill>
@@ -8427,22 +7398,22 @@
                 <a:ea typeface="Cambria" pitchFamily="34" charset="-122"/>
                 <a:cs typeface="Cambria" pitchFamily="34" charset="-120"/>
               </a:rPr>
-              <a:t>5</a:t>
-            </a:r>
-            <a:endParaRPr lang="en-US" sz="28000" dirty="0"/>
-          </a:p>
-        </p:txBody>
-      </p:sp>
-      <p:sp>
-        <p:nvSpPr>
-          <p:cNvPr id="4" name="Kicker"/>
+              <a:t>5.</a:t>
+            </a:r>
+            <a:endParaRPr lang="en-US" sz="25000" dirty="0"/>
+          </a:p>
+        </p:txBody>
+      </p:sp>
+      <p:sp>
+        <p:nvSpPr>
+          <p:cNvPr id="4" name="Section title"/>
           <p:cNvSpPr txBox="1"/>
           <p:nvPr/>
         </p:nvSpPr>
         <p:spPr>
           <a:xfrm>
-            <a:off x="3474720" y="1965960"/>
-            <a:ext cx="5120640" cy="640080"/>
+            <a:off x="3749040" y="1737360"/>
+            <a:ext cx="5029200" cy="3108960"/>
           </a:xfrm>
           <a:prstGeom prst="rect">
             <a:avLst/>
@@ -8452,42 +7423,6 @@
         </p:spPr>
         <p:txBody>
           <a:bodyPr wrap="square" lIns="0" tIns="0" rIns="0" bIns="0" rtlCol="0" anchor="ctr"/>
-          <a:lstStyle/>
-          <a:p>
-            <a:pPr indent="0" marL="0">
-              <a:buNone/>
-            </a:pPr>
-            <a:r>
-              <a:rPr lang="en-US" sz="3000" b="1" spc="1000" kern="0" dirty="0">
-                <a:solidFill>
-                  <a:schemeClr val="bg2"/>
-                </a:solidFill>
-              </a:rPr>
-              <a:t>SOW</a:t>
-            </a:r>
-            <a:endParaRPr lang="en-US" sz="3000" dirty="0"/>
-          </a:p>
-        </p:txBody>
-      </p:sp>
-      <p:sp>
-        <p:nvSpPr>
-          <p:cNvPr id="5" name="Section title"/>
-          <p:cNvSpPr txBox="1"/>
-          <p:nvPr/>
-        </p:nvSpPr>
-        <p:spPr>
-          <a:xfrm>
-            <a:off x="3474720" y="2606040"/>
-            <a:ext cx="5303520" cy="2011680"/>
-          </a:xfrm>
-          <a:prstGeom prst="rect">
-            <a:avLst/>
-          </a:prstGeom>
-          <a:noFill/>
-          <a:ln/>
-        </p:spPr>
-        <p:txBody>
-          <a:bodyPr wrap="square" lIns="0" tIns="0" rIns="0" bIns="0" rtlCol="0" anchor="t"/>
           <a:lstStyle/>
           <a:p>
             <a:pPr indent="0" marL="0">
@@ -8502,7 +7437,7 @@
                 <a:ea typeface="Cambria" pitchFamily="34" charset="-122"/>
                 <a:cs typeface="Cambria" pitchFamily="34" charset="-120"/>
               </a:rPr>
-              <a:t>A Correct Image</a:t>
+              <a:t>Sow A Correct Image</a:t>
             </a:r>
             <a:endParaRPr lang="en-US" sz="6000" dirty="0"/>
           </a:p>
@@ -8510,43 +7445,7 @@
       </p:sp>
       <p:sp>
         <p:nvSpPr>
-          <p:cNvPr id="6" name="Progress"/>
-          <p:cNvSpPr txBox="1"/>
-          <p:nvPr/>
-        </p:nvSpPr>
-        <p:spPr>
-          <a:xfrm>
-            <a:off x="3474720" y="4800600"/>
-            <a:ext cx="5120640" cy="548640"/>
-          </a:xfrm>
-          <a:prstGeom prst="rect">
-            <a:avLst/>
-          </a:prstGeom>
-          <a:noFill/>
-          <a:ln/>
-        </p:spPr>
-        <p:txBody>
-          <a:bodyPr wrap="square" lIns="0" tIns="0" rIns="0" bIns="0" rtlCol="0" anchor="ctr"/>
-          <a:lstStyle/>
-          <a:p>
-            <a:pPr indent="0" marL="0">
-              <a:buNone/>
-            </a:pPr>
-            <a:r>
-              <a:rPr lang="en-US" sz="2400" i="1" dirty="0">
-                <a:solidFill>
-                  <a:schemeClr val="accent1"/>
-                </a:solidFill>
-              </a:rPr>
-              <a:t>Seed 5 of 5</a:t>
-            </a:r>
-            <a:endParaRPr lang="en-US" sz="2400" dirty="0"/>
-          </a:p>
-        </p:txBody>
-      </p:sp>
-      <p:sp>
-        <p:nvSpPr>
-          <p:cNvPr id="7" name="Section icon"/>
+          <p:cNvPr id="5" name="Section icon"/>
           <p:cNvSpPr/>
           <p:nvPr/>
         </p:nvSpPr>
@@ -8566,7 +7465,7 @@
       </p:sp>
       <p:pic>
         <p:nvPicPr>
-          <p:cNvPr id="8" name="Section icon glyph" descr="preencoded.png">    </p:cNvPr>
+          <p:cNvPr id="6" name="Section icon glyph" descr="preencoded.png">    </p:cNvPr>
           <p:cNvPicPr>
             <a:picLocks noChangeAspect="1"/>
           </p:cNvPicPr>
@@ -8843,7 +7742,7 @@
                   <a:schemeClr val="tx2"/>
                 </a:solidFill>
               </a:rPr>
-              <a:t>Having a correct image means</a:t>
+              <a:t>Having a correct image means:</a:t>
             </a:r>
             <a:endParaRPr lang="en-US" sz="4000" dirty="0"/>
           </a:p>
@@ -8923,7 +7822,7 @@
                   <a:schemeClr val="tx2"/>
                 </a:solidFill>
               </a:rPr>
-              <a:t>You have a positive self-esteem</a:t>
+              <a:t>You have a positive self esteem.</a:t>
             </a:r>
             <a:endParaRPr lang="en-US" sz="3600" dirty="0"/>
           </a:p>
@@ -9003,7 +7902,7 @@
                   <a:schemeClr val="tx2"/>
                 </a:solidFill>
               </a:rPr>
-              <a:t>You feel good about yourself</a:t>
+              <a:t>You feel good about yourself.</a:t>
             </a:r>
             <a:endParaRPr lang="en-US" sz="3600" dirty="0"/>
           </a:p>
@@ -9083,7 +7982,7 @@
                   <a:schemeClr val="tx2"/>
                 </a:solidFill>
               </a:rPr>
-              <a:t>You have a healthy outlook of who you are in Christ</a:t>
+              <a:t>You have a healthy outlook of who you are in Christ.</a:t>
             </a:r>
             <a:endParaRPr lang="en-US" sz="3600" dirty="0"/>
           </a:p>
@@ -9194,7 +8093,7 @@
                   <a:schemeClr val="tx2"/>
                 </a:solidFill>
               </a:rPr>
-              <a:t>See yourself the way God sees you</a:t>
+              <a:t>Having a correct image means:</a:t>
             </a:r>
             <a:endParaRPr lang="en-US" sz="4000" dirty="0"/>
           </a:p>
@@ -9202,14 +8101,14 @@
       </p:sp>
       <p:sp>
         <p:nvSpPr>
-          <p:cNvPr id="4" name="Unique card"/>
+          <p:cNvPr id="4" name="God sees you card"/>
           <p:cNvSpPr/>
           <p:nvPr/>
         </p:nvSpPr>
         <p:spPr>
           <a:xfrm>
             <a:off x="548640" y="1508760"/>
-            <a:ext cx="2560320" cy="2514600"/>
+            <a:ext cx="11064240" cy="2514600"/>
           </a:xfrm>
           <a:prstGeom prst="roundRect">
             <a:avLst>
@@ -9236,14 +8135,50 @@
       </p:sp>
       <p:sp>
         <p:nvSpPr>
-          <p:cNvPr id="5" name="Unique icon"/>
+          <p:cNvPr id="5" name="Text 2"/>
+          <p:cNvSpPr txBox="1"/>
+          <p:nvPr/>
+        </p:nvSpPr>
+        <p:spPr>
+          <a:xfrm>
+            <a:off x="914400" y="1645920"/>
+            <a:ext cx="10332720" cy="1188720"/>
+          </a:xfrm>
+          <a:prstGeom prst="rect">
+            <a:avLst/>
+          </a:prstGeom>
+          <a:noFill/>
+          <a:ln/>
+        </p:spPr>
+        <p:txBody>
+          <a:bodyPr wrap="square" lIns="0" tIns="0" rIns="0" bIns="0" rtlCol="0" anchor="ctr"/>
+          <a:lstStyle/>
+          <a:p>
+            <a:pPr indent="0" marL="0">
+              <a:buNone/>
+            </a:pPr>
+            <a:r>
+              <a:rPr lang="en-US" sz="3400" b="1" dirty="0">
+                <a:solidFill>
+                  <a:schemeClr val="tx2"/>
+                </a:solidFill>
+              </a:rPr>
+              <a:t>You see yourself the way God sees you. Unique, precious, lovable and important.</a:t>
+            </a:r>
+            <a:endParaRPr lang="en-US" sz="3400" dirty="0"/>
+          </a:p>
+        </p:txBody>
+      </p:sp>
+      <p:sp>
+        <p:nvSpPr>
+          <p:cNvPr id="6" name="finger icon"/>
           <p:cNvSpPr/>
           <p:nvPr/>
         </p:nvSpPr>
         <p:spPr>
           <a:xfrm>
-            <a:off x="1234440" y="1737360"/>
-            <a:ext cx="1188720" cy="1188720"/>
+            <a:off x="2743200" y="2926080"/>
+            <a:ext cx="914400" cy="914400"/>
           </a:xfrm>
           <a:prstGeom prst="ellipse">
             <a:avLst/>
@@ -9256,7 +8191,7 @@
       </p:sp>
       <p:pic>
         <p:nvPicPr>
-          <p:cNvPr id="6" name="Unique icon glyph" descr="preencoded.png">    </p:cNvPr>
+          <p:cNvPr id="7" name="finger icon glyph" descr="preencoded.png">    </p:cNvPr>
           <p:cNvPicPr>
             <a:picLocks noChangeAspect="1"/>
           </p:cNvPicPr>
@@ -9270,8 +8205,8 @@
         </p:blipFill>
         <p:spPr>
           <a:xfrm>
-            <a:off x="1519733" y="2022653"/>
-            <a:ext cx="618134" cy="618134"/>
+            <a:off x="2962656" y="3145536"/>
+            <a:ext cx="475488" cy="475488"/>
           </a:xfrm>
           <a:prstGeom prst="rect">
             <a:avLst/>
@@ -9280,65 +8215,156 @@
       </p:pic>
       <p:sp>
         <p:nvSpPr>
-          <p:cNvPr id="7" name="Text 3"/>
-          <p:cNvSpPr txBox="1"/>
-          <p:nvPr/>
-        </p:nvSpPr>
-        <p:spPr>
-          <a:xfrm>
-            <a:off x="548640" y="3063240"/>
-            <a:ext cx="2560320" cy="731520"/>
-          </a:xfrm>
-          <a:prstGeom prst="rect">
-            <a:avLst/>
-          </a:prstGeom>
-          <a:noFill/>
-          <a:ln/>
-        </p:spPr>
-        <p:txBody>
-          <a:bodyPr wrap="square" lIns="0" tIns="0" rIns="0" bIns="0" rtlCol="0" anchor="ctr"/>
-          <a:lstStyle/>
-          <a:p>
-            <a:pPr algn="ctr" indent="0" marL="0">
-              <a:buNone/>
-            </a:pPr>
-            <a:r>
-              <a:rPr lang="en-US" sz="3200" b="1" dirty="0">
-                <a:solidFill>
-                  <a:schemeClr val="accent5"/>
-                </a:solidFill>
-              </a:rPr>
-              <a:t>Unique</a:t>
-            </a:r>
-            <a:endParaRPr lang="en-US" sz="3200" dirty="0"/>
-          </a:p>
-        </p:txBody>
-      </p:sp>
-      <p:sp>
-        <p:nvSpPr>
-          <p:cNvPr id="8" name="Precious card"/>
+          <p:cNvPr id="8" name="gem icon"/>
           <p:cNvSpPr/>
           <p:nvPr/>
         </p:nvSpPr>
         <p:spPr>
           <a:xfrm>
-            <a:off x="3383280" y="1508760"/>
-            <a:ext cx="2560320" cy="2514600"/>
+            <a:off x="4663440" y="2926080"/>
+            <a:ext cx="914400" cy="914400"/>
+          </a:xfrm>
+          <a:prstGeom prst="ellipse">
+            <a:avLst/>
+          </a:prstGeom>
+          <a:solidFill>
+            <a:schemeClr val="accent5"/>
+          </a:solidFill>
+          <a:ln/>
+        </p:spPr>
+      </p:sp>
+      <p:pic>
+        <p:nvPicPr>
+          <p:cNvPr id="9" name="gem icon glyph" descr="preencoded.png">    </p:cNvPr>
+          <p:cNvPicPr>
+            <a:picLocks noChangeAspect="1"/>
+          </p:cNvPicPr>
+          <p:nvPr/>
+        </p:nvPicPr>
+        <p:blipFill>
+          <a:blip r:embed="rId2"/>
+          <a:stretch>
+            <a:fillRect/>
+          </a:stretch>
+        </p:blipFill>
+        <p:spPr>
+          <a:xfrm>
+            <a:off x="4882896" y="3145536"/>
+            <a:ext cx="475488" cy="475488"/>
+          </a:xfrm>
+          <a:prstGeom prst="rect">
+            <a:avLst/>
+          </a:prstGeom>
+        </p:spPr>
+      </p:pic>
+      <p:sp>
+        <p:nvSpPr>
+          <p:cNvPr id="10" name="kind icon"/>
+          <p:cNvSpPr/>
+          <p:nvPr/>
+        </p:nvSpPr>
+        <p:spPr>
+          <a:xfrm>
+            <a:off x="6583680" y="2926080"/>
+            <a:ext cx="914400" cy="914400"/>
+          </a:xfrm>
+          <a:prstGeom prst="ellipse">
+            <a:avLst/>
+          </a:prstGeom>
+          <a:solidFill>
+            <a:schemeClr val="accent5"/>
+          </a:solidFill>
+          <a:ln/>
+        </p:spPr>
+      </p:sp>
+      <p:pic>
+        <p:nvPicPr>
+          <p:cNvPr id="11" name="kind icon glyph" descr="preencoded.png">    </p:cNvPr>
+          <p:cNvPicPr>
+            <a:picLocks noChangeAspect="1"/>
+          </p:cNvPicPr>
+          <p:nvPr/>
+        </p:nvPicPr>
+        <p:blipFill>
+          <a:blip r:embed="rId3"/>
+          <a:stretch>
+            <a:fillRect/>
+          </a:stretch>
+        </p:blipFill>
+        <p:spPr>
+          <a:xfrm>
+            <a:off x="6803136" y="3145536"/>
+            <a:ext cx="475488" cy="475488"/>
+          </a:xfrm>
+          <a:prstGeom prst="rect">
+            <a:avLst/>
+          </a:prstGeom>
+        </p:spPr>
+      </p:pic>
+      <p:sp>
+        <p:nvSpPr>
+          <p:cNvPr id="12" name="star icon"/>
+          <p:cNvSpPr/>
+          <p:nvPr/>
+        </p:nvSpPr>
+        <p:spPr>
+          <a:xfrm>
+            <a:off x="8503920" y="2926080"/>
+            <a:ext cx="914400" cy="914400"/>
+          </a:xfrm>
+          <a:prstGeom prst="ellipse">
+            <a:avLst/>
+          </a:prstGeom>
+          <a:solidFill>
+            <a:schemeClr val="accent5"/>
+          </a:solidFill>
+          <a:ln/>
+        </p:spPr>
+      </p:sp>
+      <p:pic>
+        <p:nvPicPr>
+          <p:cNvPr id="13" name="star icon glyph" descr="preencoded.png">    </p:cNvPr>
+          <p:cNvPicPr>
+            <a:picLocks noChangeAspect="1"/>
+          </p:cNvPicPr>
+          <p:nvPr/>
+        </p:nvPicPr>
+        <p:blipFill>
+          <a:blip r:embed="rId4"/>
+          <a:stretch>
+            <a:fillRect/>
+          </a:stretch>
+        </p:blipFill>
+        <p:spPr>
+          <a:xfrm>
+            <a:off x="8723376" y="3145536"/>
+            <a:ext cx="475488" cy="475488"/>
+          </a:xfrm>
+          <a:prstGeom prst="rect">
+            <a:avLst/>
+          </a:prstGeom>
+        </p:spPr>
+      </p:pic>
+      <p:sp>
+        <p:nvSpPr>
+          <p:cNvPr id="14" name="Winner banner"/>
+          <p:cNvSpPr/>
+          <p:nvPr/>
+        </p:nvSpPr>
+        <p:spPr>
+          <a:xfrm>
+            <a:off x="548640" y="4389120"/>
+            <a:ext cx="11064240" cy="1463040"/>
           </a:xfrm>
           <a:prstGeom prst="roundRect">
             <a:avLst>
-              <a:gd name="adj" fmla="val 7273"/>
+              <a:gd name="adj" fmla="val 12500"/>
             </a:avLst>
           </a:prstGeom>
           <a:solidFill>
-            <a:schemeClr val="bg1"/>
+            <a:schemeClr val="accent5"/>
           </a:solidFill>
-          <a:ln w="12700">
-            <a:solidFill>
-              <a:srgbClr val="E2DAF0"/>
-            </a:solidFill>
-            <a:prstDash val="solid"/>
-          </a:ln>
+          <a:ln/>
           <a:effectLst>
             <a:outerShdw sx="100000" sy="100000" kx="0" ky="0" algn="bl" rotWithShape="0" blurRad="127000" dist="38100" dir="5400000">
               <a:srgbClr val="1E4D2B">
@@ -9348,346 +8374,9 @@
           </a:effectLst>
         </p:spPr>
       </p:sp>
-      <p:sp>
-        <p:nvSpPr>
-          <p:cNvPr id="9" name="Precious icon"/>
-          <p:cNvSpPr/>
-          <p:nvPr/>
-        </p:nvSpPr>
-        <p:spPr>
-          <a:xfrm>
-            <a:off x="4069080" y="1737360"/>
-            <a:ext cx="1188720" cy="1188720"/>
-          </a:xfrm>
-          <a:prstGeom prst="ellipse">
-            <a:avLst/>
-          </a:prstGeom>
-          <a:solidFill>
-            <a:schemeClr val="accent5"/>
-          </a:solidFill>
-          <a:ln/>
-        </p:spPr>
-      </p:sp>
       <p:pic>
         <p:nvPicPr>
-          <p:cNvPr id="10" name="Precious icon glyph" descr="preencoded.png">    </p:cNvPr>
-          <p:cNvPicPr>
-            <a:picLocks noChangeAspect="1"/>
-          </p:cNvPicPr>
-          <p:nvPr/>
-        </p:nvPicPr>
-        <p:blipFill>
-          <a:blip r:embed="rId2"/>
-          <a:stretch>
-            <a:fillRect/>
-          </a:stretch>
-        </p:blipFill>
-        <p:spPr>
-          <a:xfrm>
-            <a:off x="4354373" y="2022653"/>
-            <a:ext cx="618134" cy="618134"/>
-          </a:xfrm>
-          <a:prstGeom prst="rect">
-            <a:avLst/>
-          </a:prstGeom>
-        </p:spPr>
-      </p:pic>
-      <p:sp>
-        <p:nvSpPr>
-          <p:cNvPr id="11" name="Text 6"/>
-          <p:cNvSpPr txBox="1"/>
-          <p:nvPr/>
-        </p:nvSpPr>
-        <p:spPr>
-          <a:xfrm>
-            <a:off x="3383280" y="3063240"/>
-            <a:ext cx="2560320" cy="731520"/>
-          </a:xfrm>
-          <a:prstGeom prst="rect">
-            <a:avLst/>
-          </a:prstGeom>
-          <a:noFill/>
-          <a:ln/>
-        </p:spPr>
-        <p:txBody>
-          <a:bodyPr wrap="square" lIns="0" tIns="0" rIns="0" bIns="0" rtlCol="0" anchor="ctr"/>
-          <a:lstStyle/>
-          <a:p>
-            <a:pPr algn="ctr" indent="0" marL="0">
-              <a:buNone/>
-            </a:pPr>
-            <a:r>
-              <a:rPr lang="en-US" sz="3200" b="1" dirty="0">
-                <a:solidFill>
-                  <a:schemeClr val="accent5"/>
-                </a:solidFill>
-              </a:rPr>
-              <a:t>Precious</a:t>
-            </a:r>
-            <a:endParaRPr lang="en-US" sz="3200" dirty="0"/>
-          </a:p>
-        </p:txBody>
-      </p:sp>
-      <p:sp>
-        <p:nvSpPr>
-          <p:cNvPr id="12" name="Lovable card"/>
-          <p:cNvSpPr/>
-          <p:nvPr/>
-        </p:nvSpPr>
-        <p:spPr>
-          <a:xfrm>
-            <a:off x="6217920" y="1508760"/>
-            <a:ext cx="2560320" cy="2514600"/>
-          </a:xfrm>
-          <a:prstGeom prst="roundRect">
-            <a:avLst>
-              <a:gd name="adj" fmla="val 7273"/>
-            </a:avLst>
-          </a:prstGeom>
-          <a:solidFill>
-            <a:schemeClr val="bg1"/>
-          </a:solidFill>
-          <a:ln w="12700">
-            <a:solidFill>
-              <a:srgbClr val="E2DAF0"/>
-            </a:solidFill>
-            <a:prstDash val="solid"/>
-          </a:ln>
-          <a:effectLst>
-            <a:outerShdw sx="100000" sy="100000" kx="0" ky="0" algn="bl" rotWithShape="0" blurRad="127000" dist="38100" dir="5400000">
-              <a:srgbClr val="1E4D2B">
-                <a:alpha val="18000"/>
-              </a:srgbClr>
-            </a:outerShdw>
-          </a:effectLst>
-        </p:spPr>
-      </p:sp>
-      <p:sp>
-        <p:nvSpPr>
-          <p:cNvPr id="13" name="Lovable icon"/>
-          <p:cNvSpPr/>
-          <p:nvPr/>
-        </p:nvSpPr>
-        <p:spPr>
-          <a:xfrm>
-            <a:off x="6903720" y="1737360"/>
-            <a:ext cx="1188720" cy="1188720"/>
-          </a:xfrm>
-          <a:prstGeom prst="ellipse">
-            <a:avLst/>
-          </a:prstGeom>
-          <a:solidFill>
-            <a:schemeClr val="accent5"/>
-          </a:solidFill>
-          <a:ln/>
-        </p:spPr>
-      </p:sp>
-      <p:pic>
-        <p:nvPicPr>
-          <p:cNvPr id="14" name="Lovable icon glyph" descr="preencoded.png">    </p:cNvPr>
-          <p:cNvPicPr>
-            <a:picLocks noChangeAspect="1"/>
-          </p:cNvPicPr>
-          <p:nvPr/>
-        </p:nvPicPr>
-        <p:blipFill>
-          <a:blip r:embed="rId3"/>
-          <a:stretch>
-            <a:fillRect/>
-          </a:stretch>
-        </p:blipFill>
-        <p:spPr>
-          <a:xfrm>
-            <a:off x="7189013" y="2022653"/>
-            <a:ext cx="618134" cy="618134"/>
-          </a:xfrm>
-          <a:prstGeom prst="rect">
-            <a:avLst/>
-          </a:prstGeom>
-        </p:spPr>
-      </p:pic>
-      <p:sp>
-        <p:nvSpPr>
-          <p:cNvPr id="15" name="Text 9"/>
-          <p:cNvSpPr txBox="1"/>
-          <p:nvPr/>
-        </p:nvSpPr>
-        <p:spPr>
-          <a:xfrm>
-            <a:off x="6217920" y="3063240"/>
-            <a:ext cx="2560320" cy="731520"/>
-          </a:xfrm>
-          <a:prstGeom prst="rect">
-            <a:avLst/>
-          </a:prstGeom>
-          <a:noFill/>
-          <a:ln/>
-        </p:spPr>
-        <p:txBody>
-          <a:bodyPr wrap="square" lIns="0" tIns="0" rIns="0" bIns="0" rtlCol="0" anchor="ctr"/>
-          <a:lstStyle/>
-          <a:p>
-            <a:pPr algn="ctr" indent="0" marL="0">
-              <a:buNone/>
-            </a:pPr>
-            <a:r>
-              <a:rPr lang="en-US" sz="3200" b="1" dirty="0">
-                <a:solidFill>
-                  <a:schemeClr val="accent5"/>
-                </a:solidFill>
-              </a:rPr>
-              <a:t>Lovable</a:t>
-            </a:r>
-            <a:endParaRPr lang="en-US" sz="3200" dirty="0"/>
-          </a:p>
-        </p:txBody>
-      </p:sp>
-      <p:sp>
-        <p:nvSpPr>
-          <p:cNvPr id="16" name="Important card"/>
-          <p:cNvSpPr/>
-          <p:nvPr/>
-        </p:nvSpPr>
-        <p:spPr>
-          <a:xfrm>
-            <a:off x="9052560" y="1508760"/>
-            <a:ext cx="2560320" cy="2514600"/>
-          </a:xfrm>
-          <a:prstGeom prst="roundRect">
-            <a:avLst>
-              <a:gd name="adj" fmla="val 7273"/>
-            </a:avLst>
-          </a:prstGeom>
-          <a:solidFill>
-            <a:schemeClr val="bg1"/>
-          </a:solidFill>
-          <a:ln w="12700">
-            <a:solidFill>
-              <a:srgbClr val="E2DAF0"/>
-            </a:solidFill>
-            <a:prstDash val="solid"/>
-          </a:ln>
-          <a:effectLst>
-            <a:outerShdw sx="100000" sy="100000" kx="0" ky="0" algn="bl" rotWithShape="0" blurRad="127000" dist="38100" dir="5400000">
-              <a:srgbClr val="1E4D2B">
-                <a:alpha val="18000"/>
-              </a:srgbClr>
-            </a:outerShdw>
-          </a:effectLst>
-        </p:spPr>
-      </p:sp>
-      <p:sp>
-        <p:nvSpPr>
-          <p:cNvPr id="17" name="Important icon"/>
-          <p:cNvSpPr/>
-          <p:nvPr/>
-        </p:nvSpPr>
-        <p:spPr>
-          <a:xfrm>
-            <a:off x="9738360" y="1737360"/>
-            <a:ext cx="1188720" cy="1188720"/>
-          </a:xfrm>
-          <a:prstGeom prst="ellipse">
-            <a:avLst/>
-          </a:prstGeom>
-          <a:solidFill>
-            <a:schemeClr val="accent5"/>
-          </a:solidFill>
-          <a:ln/>
-        </p:spPr>
-      </p:sp>
-      <p:pic>
-        <p:nvPicPr>
-          <p:cNvPr id="18" name="Important icon glyph" descr="preencoded.png">    </p:cNvPr>
-          <p:cNvPicPr>
-            <a:picLocks noChangeAspect="1"/>
-          </p:cNvPicPr>
-          <p:nvPr/>
-        </p:nvPicPr>
-        <p:blipFill>
-          <a:blip r:embed="rId4"/>
-          <a:stretch>
-            <a:fillRect/>
-          </a:stretch>
-        </p:blipFill>
-        <p:spPr>
-          <a:xfrm>
-            <a:off x="10023653" y="2022653"/>
-            <a:ext cx="618134" cy="618134"/>
-          </a:xfrm>
-          <a:prstGeom prst="rect">
-            <a:avLst/>
-          </a:prstGeom>
-        </p:spPr>
-      </p:pic>
-      <p:sp>
-        <p:nvSpPr>
-          <p:cNvPr id="19" name="Text 12"/>
-          <p:cNvSpPr txBox="1"/>
-          <p:nvPr/>
-        </p:nvSpPr>
-        <p:spPr>
-          <a:xfrm>
-            <a:off x="9052560" y="3063240"/>
-            <a:ext cx="2560320" cy="731520"/>
-          </a:xfrm>
-          <a:prstGeom prst="rect">
-            <a:avLst/>
-          </a:prstGeom>
-          <a:noFill/>
-          <a:ln/>
-        </p:spPr>
-        <p:txBody>
-          <a:bodyPr wrap="square" lIns="0" tIns="0" rIns="0" bIns="0" rtlCol="0" anchor="ctr"/>
-          <a:lstStyle/>
-          <a:p>
-            <a:pPr algn="ctr" indent="0" marL="0">
-              <a:buNone/>
-            </a:pPr>
-            <a:r>
-              <a:rPr lang="en-US" sz="3200" b="1" dirty="0">
-                <a:solidFill>
-                  <a:schemeClr val="accent5"/>
-                </a:solidFill>
-              </a:rPr>
-              <a:t>Important</a:t>
-            </a:r>
-            <a:endParaRPr lang="en-US" sz="3200" dirty="0"/>
-          </a:p>
-        </p:txBody>
-      </p:sp>
-      <p:sp>
-        <p:nvSpPr>
-          <p:cNvPr id="20" name="Winner banner"/>
-          <p:cNvSpPr/>
-          <p:nvPr/>
-        </p:nvSpPr>
-        <p:spPr>
-          <a:xfrm>
-            <a:off x="548640" y="4389120"/>
-            <a:ext cx="11064240" cy="1463040"/>
-          </a:xfrm>
-          <a:prstGeom prst="roundRect">
-            <a:avLst>
-              <a:gd name="adj" fmla="val 12500"/>
-            </a:avLst>
-          </a:prstGeom>
-          <a:solidFill>
-            <a:schemeClr val="accent5"/>
-          </a:solidFill>
-          <a:ln/>
-          <a:effectLst>
-            <a:outerShdw sx="100000" sy="100000" kx="0" ky="0" algn="bl" rotWithShape="0" blurRad="127000" dist="38100" dir="5400000">
-              <a:srgbClr val="1E4D2B">
-                <a:alpha val="18000"/>
-              </a:srgbClr>
-            </a:outerShdw>
-          </a:effectLst>
-        </p:spPr>
-      </p:sp>
-      <p:pic>
-        <p:nvPicPr>
-          <p:cNvPr id="21" name="Trophy" descr="preencoded.png">    </p:cNvPr>
+          <p:cNvPr id="15" name="Trophy" descr="preencoded.png">    </p:cNvPr>
           <p:cNvPicPr>
             <a:picLocks noChangeAspect="1"/>
           </p:cNvPicPr>
@@ -9711,7 +8400,7 @@
       </p:pic>
       <p:sp>
         <p:nvSpPr>
-          <p:cNvPr id="22" name="Text 14"/>
+          <p:cNvPr id="16" name="Text 8"/>
           <p:cNvSpPr txBox="1"/>
           <p:nvPr/>
         </p:nvSpPr>
@@ -9734,36 +8423,14 @@
               <a:buNone/>
             </a:pPr>
             <a:r>
-              <a:rPr lang="en-US" sz="3600" b="1" dirty="0">
+              <a:rPr lang="en-US" sz="3400" b="1" dirty="0">
                 <a:solidFill>
                   <a:schemeClr val="bg1"/>
                 </a:solidFill>
               </a:rPr>
-              <a:t>You are a </a:t>
-            </a:r>
-            <a:pPr indent="0" marL="0">
-              <a:buNone/>
-            </a:pPr>
-            <a:r>
-              <a:rPr lang="en-US" sz="3600" b="1" dirty="0">
-                <a:solidFill>
-                  <a:schemeClr val="accent1"/>
-                </a:solidFill>
-              </a:rPr>
-              <a:t>WINNER</a:t>
-            </a:r>
-            <a:pPr indent="0" marL="0">
-              <a:buNone/>
-            </a:pPr>
-            <a:r>
-              <a:rPr lang="en-US" sz="3600" b="1" dirty="0">
-                <a:solidFill>
-                  <a:schemeClr val="bg1"/>
-                </a:solidFill>
-              </a:rPr>
-              <a:t> in Christ — not a failure!</a:t>
-            </a:r>
-            <a:endParaRPr lang="en-US" sz="3600" dirty="0"/>
+              <a:t>You see yourself as a winner in Christ and not a failure.</a:t>
+            </a:r>
+            <a:endParaRPr lang="en-US" sz="3400" dirty="0"/>
           </a:p>
         </p:txBody>
       </p:sp>
@@ -9918,7 +8585,7 @@
                 <a:ea typeface="Cambria" pitchFamily="34" charset="-122"/>
                 <a:cs typeface="Cambria" pitchFamily="34" charset="-120"/>
               </a:rPr>
-              <a:t>For you created my inmost being; you knit me together in my mother’s womb. I praise you because </a:t>
+              <a:t>For you created my inmost being; you knit me together in my mother's womb.   I praise you because </a:t>
             </a:r>
             <a:pPr indent="0" marL="0">
               <a:lnSpc>
@@ -9994,7 +8661,7 @@
                   <a:schemeClr val="accent1"/>
                 </a:solidFill>
               </a:rPr>
-              <a:t>— Psalm 139:13–14 (NIV)</a:t>
+              <a:t>Psalms 139:13–14 (NIV)</a:t>
             </a:r>
             <a:endParaRPr lang="en-US" sz="2800" dirty="0"/>
           </a:p>
@@ -10142,35 +8809,15 @@
               <a:buNone/>
             </a:pPr>
             <a:r>
-              <a:rPr lang="en-US" sz="5600" b="1" dirty="0">
-                <a:solidFill>
-                  <a:schemeClr val="accent1"/>
+              <a:rPr lang="en-US" sz="5600" dirty="0">
+                <a:solidFill>
+                  <a:schemeClr val="bg1"/>
                 </a:solidFill>
                 <a:latin typeface="Cambria" pitchFamily="34" charset="0"/>
                 <a:ea typeface="Cambria" pitchFamily="34" charset="-122"/>
                 <a:cs typeface="Cambria" pitchFamily="34" charset="-120"/>
               </a:rPr>
-              <a:t>I can do all things</a:t>
-            </a:r>
-            <a:pPr indent="0" marL="0">
-              <a:lnSpc>
-                <a:spcPct val="108000"/>
-              </a:lnSpc>
-              <a:spcAft>
-                <a:spcPts val="600"/>
-              </a:spcAft>
-              <a:buNone/>
-            </a:pPr>
-            <a:r>
-              <a:rPr lang="en-US" sz="5600" dirty="0">
-                <a:solidFill>
-                  <a:schemeClr val="bg1"/>
-                </a:solidFill>
-                <a:latin typeface="Cambria" pitchFamily="34" charset="0"/>
-                <a:ea typeface="Cambria" pitchFamily="34" charset="-122"/>
-                <a:cs typeface="Cambria" pitchFamily="34" charset="-120"/>
-              </a:rPr>
-              <a:t> through Christ who strengthens me.</a:t>
+              <a:t>I can do all things through Christ who strengthens me.</a:t>
             </a:r>
             <a:endParaRPr lang="en-US" sz="5600" dirty="0"/>
           </a:p>
@@ -10206,7 +8853,7 @@
                   <a:schemeClr val="accent1"/>
                 </a:solidFill>
               </a:rPr>
-              <a:t>— Philippians 4:13 (NKJV)</a:t>
+              <a:t>Philippians 4:13 (NKJV)</a:t>
             </a:r>
             <a:endParaRPr lang="en-US" sz="2800" dirty="0"/>
           </a:p>
@@ -10317,7 +8964,7 @@
                 <a:ea typeface="Cambria" pitchFamily="34" charset="-122"/>
                 <a:cs typeface="Cambria" pitchFamily="34" charset="-120"/>
               </a:rPr>
-              <a:t>Sowing the Best</a:t>
+              <a:t>Sowing the Best:</a:t>
             </a:r>
             <a:endParaRPr lang="en-US" sz="5400" dirty="0"/>
           </a:p>
@@ -10404,14 +9051,14 @@
               <a:buNone/>
             </a:pPr>
             <a:r>
-              <a:rPr lang="en-US" sz="3400" dirty="0">
+              <a:rPr lang="en-US" sz="3600" dirty="0">
                 <a:solidFill>
                   <a:schemeClr val="bg1"/>
                 </a:solidFill>
               </a:rPr>
               <a:t>Sow positive attitudes</a:t>
             </a:r>
-            <a:endParaRPr lang="en-US" sz="3400" dirty="0"/>
+            <a:endParaRPr lang="en-US" sz="3600" dirty="0"/>
           </a:p>
         </p:txBody>
       </p:sp>
@@ -10496,14 +9143,14 @@
               <a:buNone/>
             </a:pPr>
             <a:r>
-              <a:rPr lang="en-US" sz="3400" dirty="0">
+              <a:rPr lang="en-US" sz="3600" dirty="0">
                 <a:solidFill>
                   <a:schemeClr val="bg1"/>
                 </a:solidFill>
               </a:rPr>
               <a:t>Sow integrity</a:t>
             </a:r>
-            <a:endParaRPr lang="en-US" sz="3400" dirty="0"/>
+            <a:endParaRPr lang="en-US" sz="3600" dirty="0"/>
           </a:p>
         </p:txBody>
       </p:sp>
@@ -10588,14 +9235,14 @@
               <a:buNone/>
             </a:pPr>
             <a:r>
-              <a:rPr lang="en-US" sz="3400" dirty="0">
+              <a:rPr lang="en-US" sz="3600" dirty="0">
                 <a:solidFill>
                   <a:schemeClr val="bg1"/>
                 </a:solidFill>
               </a:rPr>
               <a:t>Sow spirituality</a:t>
             </a:r>
-            <a:endParaRPr lang="en-US" sz="3400" dirty="0"/>
+            <a:endParaRPr lang="en-US" sz="3600" dirty="0"/>
           </a:p>
         </p:txBody>
       </p:sp>
@@ -10680,14 +9327,14 @@
               <a:buNone/>
             </a:pPr>
             <a:r>
-              <a:rPr lang="en-US" sz="3400" dirty="0">
+              <a:rPr lang="en-US" sz="3600" dirty="0">
                 <a:solidFill>
                   <a:schemeClr val="bg1"/>
                 </a:solidFill>
               </a:rPr>
               <a:t>Sow discipline</a:t>
             </a:r>
-            <a:endParaRPr lang="en-US" sz="3400" dirty="0"/>
+            <a:endParaRPr lang="en-US" sz="3600" dirty="0"/>
           </a:p>
         </p:txBody>
       </p:sp>
@@ -10772,14 +9419,14 @@
               <a:buNone/>
             </a:pPr>
             <a:r>
-              <a:rPr lang="en-US" sz="3400" dirty="0">
+              <a:rPr lang="en-US" sz="3600" dirty="0">
                 <a:solidFill>
                   <a:schemeClr val="bg1"/>
                 </a:solidFill>
               </a:rPr>
               <a:t>Sow a correct image</a:t>
             </a:r>
-            <a:endParaRPr lang="en-US" sz="3400" dirty="0"/>
+            <a:endParaRPr lang="en-US" sz="3600" dirty="0"/>
           </a:p>
         </p:txBody>
       </p:sp>
@@ -10913,27 +9560,7 @@
                 <a:ea typeface="Cambria" pitchFamily="34" charset="-122"/>
                 <a:cs typeface="Cambria" pitchFamily="34" charset="-120"/>
               </a:rPr>
-              <a:t>Do not be deceived: God cannot be mocked. </a:t>
-            </a:r>
-            <a:pPr indent="0" marL="0">
-              <a:lnSpc>
-                <a:spcPct val="108000"/>
-              </a:lnSpc>
-              <a:spcAft>
-                <a:spcPts val="600"/>
-              </a:spcAft>
-              <a:buNone/>
-            </a:pPr>
-            <a:r>
-              <a:rPr lang="en-US" sz="5000" b="1" dirty="0">
-                <a:solidFill>
-                  <a:schemeClr val="accent1"/>
-                </a:solidFill>
-                <a:latin typeface="Cambria" pitchFamily="34" charset="0"/>
-                <a:ea typeface="Cambria" pitchFamily="34" charset="-122"/>
-                <a:cs typeface="Cambria" pitchFamily="34" charset="-120"/>
-              </a:rPr>
-              <a:t>A man reaps what he sows.</a:t>
+              <a:t>Do not be deceived: God cannot be mocked. A man reaps what he sows.</a:t>
             </a:r>
             <a:endParaRPr lang="en-US" sz="5000" dirty="0"/>
           </a:p>
@@ -10969,7 +9596,7 @@
                   <a:schemeClr val="accent1"/>
                 </a:solidFill>
               </a:rPr>
-              <a:t>— Galatians 6:7 (NIV)</a:t>
+              <a:t>Galatians 6:7 (NIV)</a:t>
             </a:r>
             <a:endParaRPr lang="en-US" sz="2800" dirty="0"/>
           </a:p>
@@ -11019,150 +9646,6 @@
           </a:prstGeom>
         </p:spPr>
       </p:pic>
-    </p:spTree>
-  </p:cSld>
-  <p:clrMapOvr>
-    <a:masterClrMapping/>
-  </p:clrMapOvr>
-  <p:transition spd="med">
-    <p:fade/>
-  </p:transition>
-</p:sld>
-</file>
-
-<file path=ppt/slides/slide30.xml><?xml version="1.0" encoding="utf-8"?>
-<p:sld xmlns:a="http://schemas.openxmlformats.org/drawingml/2006/main" xmlns:r="http://schemas.openxmlformats.org/officeDocument/2006/relationships" xmlns:p="http://schemas.openxmlformats.org/presentationml/2006/main">
-  <p:cSld name="Slide 30">
-    <p:bg>
-      <p:bgPr>
-        <a:blipFill dpi="0" rotWithShape="1">
-          <a:blip r:embed="rId1">
-            <a:lum/>
-          </a:blip>
-          <a:srcRect/>
-          <a:stretch>
-            <a:fillRect/>
-          </a:stretch>
-        </a:blipFill>
-        <a:effectLst/>
-      </p:bgPr>
-    </p:bg>
-    <p:spTree>
-      <p:nvGrpSpPr>
-        <p:cNvPr id="1" name=""/>
-        <p:cNvGrpSpPr/>
-        <p:nvPr/>
-      </p:nvGrpSpPr>
-      <p:grpSpPr>
-        <a:xfrm>
-          <a:off x="0" y="0"/>
-          <a:ext cx="0" cy="0"/>
-          <a:chOff x="0" y="0"/>
-          <a:chExt cx="0" cy="0"/>
-        </a:xfrm>
-      </p:grpSpPr>
-      <p:sp>
-        <p:nvSpPr>
-          <p:cNvPr id="3" name="Closing panel"/>
-          <p:cNvSpPr/>
-          <p:nvPr/>
-        </p:nvSpPr>
-        <p:spPr>
-          <a:xfrm>
-            <a:off x="548640" y="1280160"/>
-            <a:ext cx="6126480" cy="4297680"/>
-          </a:xfrm>
-          <a:prstGeom prst="roundRect">
-            <a:avLst>
-              <a:gd name="adj" fmla="val 5319"/>
-            </a:avLst>
-          </a:prstGeom>
-          <a:solidFill>
-            <a:schemeClr val="tx2">
-              <a:alpha val="88000"/>
-            </a:schemeClr>
-          </a:solidFill>
-          <a:ln/>
-        </p:spPr>
-      </p:sp>
-      <p:sp>
-        <p:nvSpPr>
-          <p:cNvPr id="4" name="Text 1"/>
-          <p:cNvSpPr txBox="1"/>
-          <p:nvPr/>
-        </p:nvSpPr>
-        <p:spPr>
-          <a:xfrm>
-            <a:off x="1005840" y="1691640"/>
-            <a:ext cx="5303520" cy="1463040"/>
-          </a:xfrm>
-          <a:prstGeom prst="rect">
-            <a:avLst/>
-          </a:prstGeom>
-          <a:noFill/>
-          <a:ln/>
-        </p:spPr>
-        <p:txBody>
-          <a:bodyPr wrap="square" lIns="0" tIns="0" rIns="0" bIns="0" rtlCol="0" anchor="t"/>
-          <a:lstStyle/>
-          <a:p>
-            <a:pPr indent="0" marL="0">
-              <a:buNone/>
-            </a:pPr>
-            <a:r>
-              <a:rPr lang="en-US" sz="3600" i="1" dirty="0">
-                <a:solidFill>
-                  <a:schemeClr val="bg2"/>
-                </a:solidFill>
-                <a:latin typeface="Cambria" pitchFamily="34" charset="0"/>
-                <a:ea typeface="Cambria" pitchFamily="34" charset="-122"/>
-                <a:cs typeface="Cambria" pitchFamily="34" charset="-120"/>
-              </a:rPr>
-              <a:t>A man reaps what he sows.</a:t>
-            </a:r>
-            <a:endParaRPr lang="en-US" sz="3600" dirty="0"/>
-          </a:p>
-        </p:txBody>
-      </p:sp>
-      <p:sp>
-        <p:nvSpPr>
-          <p:cNvPr id="5" name="Text 2"/>
-          <p:cNvSpPr txBox="1"/>
-          <p:nvPr/>
-        </p:nvSpPr>
-        <p:spPr>
-          <a:xfrm>
-            <a:off x="1005840" y="3108960"/>
-            <a:ext cx="5394960" cy="1828800"/>
-          </a:xfrm>
-          <a:prstGeom prst="rect">
-            <a:avLst/>
-          </a:prstGeom>
-          <a:noFill/>
-          <a:ln/>
-        </p:spPr>
-        <p:txBody>
-          <a:bodyPr wrap="square" lIns="0" tIns="0" rIns="0" bIns="0" rtlCol="0" anchor="t"/>
-          <a:lstStyle/>
-          <a:p>
-            <a:pPr indent="0" marL="0">
-              <a:buNone/>
-            </a:pPr>
-            <a:r>
-              <a:rPr lang="en-US" sz="6000" b="1" dirty="0">
-                <a:solidFill>
-                  <a:schemeClr val="accent1"/>
-                </a:solidFill>
-                <a:latin typeface="Cambria" pitchFamily="34" charset="0"/>
-                <a:ea typeface="Cambria" pitchFamily="34" charset="-122"/>
-                <a:cs typeface="Cambria" pitchFamily="34" charset="-120"/>
-              </a:rPr>
-              <a:t>Let’s sow the best!</a:t>
-            </a:r>
-            <a:endParaRPr lang="en-US" sz="6000" dirty="0"/>
-          </a:p>
-        </p:txBody>
-      </p:sp>
     </p:spTree>
   </p:cSld>
   <p:clrMapOvr>
@@ -11193,16 +9676,14 @@
       </p:grpSpPr>
       <p:sp>
         <p:nvSpPr>
-          <p:cNvPr id="3" name="Text 0"/>
-          <p:cNvSpPr/>
-          <p:nvPr>
-            <p:ph idx="100" type="title" hasCustomPrompt="1"/>
-          </p:nvPr>
-        </p:nvSpPr>
-        <p:spPr>
-          <a:xfrm>
-            <a:off x="548640" y="320040"/>
-            <a:ext cx="11064240" cy="1005840"/>
+          <p:cNvPr id="3" name="Statement"/>
+          <p:cNvSpPr txBox="1"/>
+          <p:nvPr/>
+        </p:nvSpPr>
+        <p:spPr>
+          <a:xfrm>
+            <a:off x="548640" y="457200"/>
+            <a:ext cx="11064240" cy="1737360"/>
           </a:xfrm>
           <a:prstGeom prst="rect">
             <a:avLst/>
@@ -11214,24 +9695,27 @@
           <a:bodyPr wrap="square" lIns="0" tIns="0" rIns="0" bIns="0" rtlCol="0" anchor="ctr"/>
           <a:lstStyle/>
           <a:p>
-            <a:pPr indent="0" marL="0">
+            <a:pPr algn="ctr" indent="0" marL="0">
               <a:buNone/>
             </a:pPr>
             <a:r>
-              <a:rPr lang="en-US" sz="4000" b="1" dirty="0">
+              <a:rPr lang="en-US" sz="4800" b="1" dirty="0">
                 <a:solidFill>
                   <a:schemeClr val="tx2"/>
                 </a:solidFill>
+                <a:latin typeface="Cambria" pitchFamily="34" charset="0"/>
+                <a:ea typeface="Cambria" pitchFamily="34" charset="-122"/>
+                <a:cs typeface="Cambria" pitchFamily="34" charset="-120"/>
               </a:rPr>
-              <a:t>Sow positive things, reap a good harvest</a:t>
-            </a:r>
-            <a:endParaRPr lang="en-US" sz="4000" dirty="0"/>
+              <a:t>If we sow positive things we will reap a good harvest</a:t>
+            </a:r>
+            <a:endParaRPr lang="en-US" sz="4800" dirty="0"/>
           </a:p>
         </p:txBody>
       </p:sp>
       <p:pic>
         <p:nvPicPr>
-          <p:cNvPr id="4" name="SOW illustration" descr="/tmp/claude-0/-home-user-demohub/4e189e5a-9413-5c63-8621-9705e4931a88/scratchpad/deck/img/seed.png">    </p:cNvPr>
+          <p:cNvPr id="4" name="seed illustration" descr="/tmp/claude-0/-home-user-demohub/4e189e5a-9413-5c63-8621-9705e4931a88/scratchpad/deck/img/seed.png">    </p:cNvPr>
           <p:cNvPicPr>
             <a:picLocks noChangeAspect="1"/>
           </p:cNvPicPr>
@@ -11245,89 +9729,17 @@
         </p:blipFill>
         <p:spPr>
           <a:xfrm>
-            <a:off x="731520" y="1600200"/>
-            <a:ext cx="2651760" cy="2651760"/>
+            <a:off x="594360" y="2606040"/>
+            <a:ext cx="2926080" cy="2926080"/>
           </a:xfrm>
           <a:prstGeom prst="rect">
             <a:avLst/>
           </a:prstGeom>
         </p:spPr>
       </p:pic>
-      <p:sp>
-        <p:nvSpPr>
-          <p:cNvPr id="5" name="Text 1"/>
-          <p:cNvSpPr txBox="1"/>
-          <p:nvPr/>
-        </p:nvSpPr>
-        <p:spPr>
-          <a:xfrm>
-            <a:off x="320040" y="4434840"/>
-            <a:ext cx="3474720" cy="594360"/>
-          </a:xfrm>
-          <a:prstGeom prst="rect">
-            <a:avLst/>
-          </a:prstGeom>
-          <a:noFill/>
-          <a:ln/>
-        </p:spPr>
-        <p:txBody>
-          <a:bodyPr wrap="square" lIns="0" tIns="0" rIns="0" bIns="0" rtlCol="0" anchor="ctr"/>
-          <a:lstStyle/>
-          <a:p>
-            <a:pPr algn="ctr" indent="0" marL="0">
-              <a:buNone/>
-            </a:pPr>
-            <a:r>
-              <a:rPr lang="en-US" sz="3400" b="1" spc="400" kern="0" dirty="0">
-                <a:solidFill>
-                  <a:schemeClr val="tx2"/>
-                </a:solidFill>
-              </a:rPr>
-              <a:t>SOW</a:t>
-            </a:r>
-            <a:endParaRPr lang="en-US" sz="3400" dirty="0"/>
-          </a:p>
-        </p:txBody>
-      </p:sp>
-      <p:sp>
-        <p:nvSpPr>
-          <p:cNvPr id="6" name="Text 2"/>
-          <p:cNvSpPr txBox="1"/>
-          <p:nvPr/>
-        </p:nvSpPr>
-        <p:spPr>
-          <a:xfrm>
-            <a:off x="320040" y="5029200"/>
-            <a:ext cx="3474720" cy="548640"/>
-          </a:xfrm>
-          <a:prstGeom prst="rect">
-            <a:avLst/>
-          </a:prstGeom>
-          <a:noFill/>
-          <a:ln/>
-        </p:spPr>
-        <p:txBody>
-          <a:bodyPr wrap="square" lIns="0" tIns="0" rIns="0" bIns="0" rtlCol="0" anchor="ctr"/>
-          <a:lstStyle/>
-          <a:p>
-            <a:pPr algn="ctr" indent="0" marL="0">
-              <a:buNone/>
-            </a:pPr>
-            <a:r>
-              <a:rPr lang="en-US" sz="2400" dirty="0">
-                <a:solidFill>
-                  <a:schemeClr val="tx1"/>
-                </a:solidFill>
-              </a:rPr>
-              <a:t>Plant positive seeds</a:t>
-            </a:r>
-            <a:endParaRPr lang="en-US" sz="2400" dirty="0"/>
-          </a:p>
-        </p:txBody>
-      </p:sp>
       <p:pic>
         <p:nvPicPr>
-          <p:cNvPr id="7" name="Arrow" descr="preencoded.png">    </p:cNvPr>
+          <p:cNvPr id="5" name="Arrow" descr="preencoded.png">    </p:cNvPr>
           <p:cNvPicPr>
             <a:picLocks noChangeAspect="1"/>
           </p:cNvPicPr>
@@ -11341,7 +9753,7 @@
         </p:blipFill>
         <p:spPr>
           <a:xfrm>
-            <a:off x="3749040" y="2606040"/>
+            <a:off x="3749040" y="3749040"/>
             <a:ext cx="640080" cy="640080"/>
           </a:xfrm>
           <a:prstGeom prst="rect">
@@ -11351,7 +9763,7 @@
       </p:pic>
       <p:pic>
         <p:nvPicPr>
-          <p:cNvPr id="8" name="GROW illustration" descr="/tmp/claude-0/-home-user-demohub/4e189e5a-9413-5c63-8621-9705e4931a88/scratchpad/deck/img/sprout.png">    </p:cNvPr>
+          <p:cNvPr id="6" name="sprout illustration" descr="/tmp/claude-0/-home-user-demohub/4e189e5a-9413-5c63-8621-9705e4931a88/scratchpad/deck/img/sprout.png">    </p:cNvPr>
           <p:cNvPicPr>
             <a:picLocks noChangeAspect="1"/>
           </p:cNvPicPr>
@@ -11365,89 +9777,17 @@
         </p:blipFill>
         <p:spPr>
           <a:xfrm>
-            <a:off x="4773168" y="1600200"/>
-            <a:ext cx="2651760" cy="2651760"/>
+            <a:off x="4636008" y="2606040"/>
+            <a:ext cx="2926080" cy="2926080"/>
           </a:xfrm>
           <a:prstGeom prst="rect">
             <a:avLst/>
           </a:prstGeom>
         </p:spPr>
       </p:pic>
-      <p:sp>
-        <p:nvSpPr>
-          <p:cNvPr id="9" name="Text 3"/>
-          <p:cNvSpPr txBox="1"/>
-          <p:nvPr/>
-        </p:nvSpPr>
-        <p:spPr>
-          <a:xfrm>
-            <a:off x="4361688" y="4434840"/>
-            <a:ext cx="3474720" cy="594360"/>
-          </a:xfrm>
-          <a:prstGeom prst="rect">
-            <a:avLst/>
-          </a:prstGeom>
-          <a:noFill/>
-          <a:ln/>
-        </p:spPr>
-        <p:txBody>
-          <a:bodyPr wrap="square" lIns="0" tIns="0" rIns="0" bIns="0" rtlCol="0" anchor="ctr"/>
-          <a:lstStyle/>
-          <a:p>
-            <a:pPr algn="ctr" indent="0" marL="0">
-              <a:buNone/>
-            </a:pPr>
-            <a:r>
-              <a:rPr lang="en-US" sz="3400" b="1" spc="400" kern="0" dirty="0">
-                <a:solidFill>
-                  <a:schemeClr val="tx2"/>
-                </a:solidFill>
-              </a:rPr>
-              <a:t>GROW</a:t>
-            </a:r>
-            <a:endParaRPr lang="en-US" sz="3400" dirty="0"/>
-          </a:p>
-        </p:txBody>
-      </p:sp>
-      <p:sp>
-        <p:nvSpPr>
-          <p:cNvPr id="10" name="Text 4"/>
-          <p:cNvSpPr txBox="1"/>
-          <p:nvPr/>
-        </p:nvSpPr>
-        <p:spPr>
-          <a:xfrm>
-            <a:off x="4361688" y="5029200"/>
-            <a:ext cx="3474720" cy="548640"/>
-          </a:xfrm>
-          <a:prstGeom prst="rect">
-            <a:avLst/>
-          </a:prstGeom>
-          <a:noFill/>
-          <a:ln/>
-        </p:spPr>
-        <p:txBody>
-          <a:bodyPr wrap="square" lIns="0" tIns="0" rIns="0" bIns="0" rtlCol="0" anchor="ctr"/>
-          <a:lstStyle/>
-          <a:p>
-            <a:pPr algn="ctr" indent="0" marL="0">
-              <a:buNone/>
-            </a:pPr>
-            <a:r>
-              <a:rPr lang="en-US" sz="2400" dirty="0">
-                <a:solidFill>
-                  <a:schemeClr val="tx1"/>
-                </a:solidFill>
-              </a:rPr>
-              <a:t>Live it every day</a:t>
-            </a:r>
-            <a:endParaRPr lang="en-US" sz="2400" dirty="0"/>
-          </a:p>
-        </p:txBody>
-      </p:sp>
       <p:pic>
         <p:nvPicPr>
-          <p:cNvPr id="11" name="Arrow" descr="preencoded.png">    </p:cNvPr>
+          <p:cNvPr id="7" name="Arrow" descr="preencoded.png">    </p:cNvPr>
           <p:cNvPicPr>
             <a:picLocks noChangeAspect="1"/>
           </p:cNvPicPr>
@@ -11461,7 +9801,7 @@
         </p:blipFill>
         <p:spPr>
           <a:xfrm>
-            <a:off x="7790688" y="2606040"/>
+            <a:off x="7790688" y="3749040"/>
             <a:ext cx="640080" cy="640080"/>
           </a:xfrm>
           <a:prstGeom prst="rect">
@@ -11471,7 +9811,7 @@
       </p:pic>
       <p:pic>
         <p:nvPicPr>
-          <p:cNvPr id="12" name="REAP illustration" descr="/tmp/claude-0/-home-user-demohub/4e189e5a-9413-5c63-8621-9705e4931a88/scratchpad/deck/img/wheat.png">    </p:cNvPr>
+          <p:cNvPr id="8" name="wheat illustration" descr="/tmp/claude-0/-home-user-demohub/4e189e5a-9413-5c63-8621-9705e4931a88/scratchpad/deck/img/wheat.png">    </p:cNvPr>
           <p:cNvPicPr>
             <a:picLocks noChangeAspect="1"/>
           </p:cNvPicPr>
@@ -11485,86 +9825,14 @@
         </p:blipFill>
         <p:spPr>
           <a:xfrm>
-            <a:off x="8814816" y="1600200"/>
-            <a:ext cx="2651760" cy="2651760"/>
+            <a:off x="8677656" y="2606040"/>
+            <a:ext cx="2926080" cy="2926080"/>
           </a:xfrm>
           <a:prstGeom prst="rect">
             <a:avLst/>
           </a:prstGeom>
         </p:spPr>
       </p:pic>
-      <p:sp>
-        <p:nvSpPr>
-          <p:cNvPr id="13" name="Text 5"/>
-          <p:cNvSpPr txBox="1"/>
-          <p:nvPr/>
-        </p:nvSpPr>
-        <p:spPr>
-          <a:xfrm>
-            <a:off x="8403336" y="4434840"/>
-            <a:ext cx="3474720" cy="594360"/>
-          </a:xfrm>
-          <a:prstGeom prst="rect">
-            <a:avLst/>
-          </a:prstGeom>
-          <a:noFill/>
-          <a:ln/>
-        </p:spPr>
-        <p:txBody>
-          <a:bodyPr wrap="square" lIns="0" tIns="0" rIns="0" bIns="0" rtlCol="0" anchor="ctr"/>
-          <a:lstStyle/>
-          <a:p>
-            <a:pPr algn="ctr" indent="0" marL="0">
-              <a:buNone/>
-            </a:pPr>
-            <a:r>
-              <a:rPr lang="en-US" sz="3400" b="1" spc="400" kern="0" dirty="0">
-                <a:solidFill>
-                  <a:schemeClr val="tx2"/>
-                </a:solidFill>
-              </a:rPr>
-              <a:t>REAP</a:t>
-            </a:r>
-            <a:endParaRPr lang="en-US" sz="3400" dirty="0"/>
-          </a:p>
-        </p:txBody>
-      </p:sp>
-      <p:sp>
-        <p:nvSpPr>
-          <p:cNvPr id="14" name="Text 6"/>
-          <p:cNvSpPr txBox="1"/>
-          <p:nvPr/>
-        </p:nvSpPr>
-        <p:spPr>
-          <a:xfrm>
-            <a:off x="8403336" y="5029200"/>
-            <a:ext cx="3474720" cy="548640"/>
-          </a:xfrm>
-          <a:prstGeom prst="rect">
-            <a:avLst/>
-          </a:prstGeom>
-          <a:noFill/>
-          <a:ln/>
-        </p:spPr>
-        <p:txBody>
-          <a:bodyPr wrap="square" lIns="0" tIns="0" rIns="0" bIns="0" rtlCol="0" anchor="ctr"/>
-          <a:lstStyle/>
-          <a:p>
-            <a:pPr algn="ctr" indent="0" marL="0">
-              <a:buNone/>
-            </a:pPr>
-            <a:r>
-              <a:rPr lang="en-US" sz="2400" dirty="0">
-                <a:solidFill>
-                  <a:schemeClr val="tx1"/>
-                </a:solidFill>
-              </a:rPr>
-              <a:t>Enjoy a good harvest</a:t>
-            </a:r>
-            <a:endParaRPr lang="en-US" sz="2400" dirty="0"/>
-          </a:p>
-        </p:txBody>
-      </p:sp>
       <p:sp>
         <p:nvSpPr>
           <p:cNvPr id="25" name="Slide Number Placeholder 0"/>
@@ -11640,16 +9908,14 @@
       </p:grpSpPr>
       <p:sp>
         <p:nvSpPr>
-          <p:cNvPr id="3" name="Text 0"/>
-          <p:cNvSpPr/>
-          <p:nvPr>
-            <p:ph idx="100" type="title" hasCustomPrompt="1"/>
-          </p:nvPr>
-        </p:nvSpPr>
-        <p:spPr>
-          <a:xfrm>
-            <a:off x="548640" y="320040"/>
-            <a:ext cx="11064240" cy="1005840"/>
+          <p:cNvPr id="3" name="Statement"/>
+          <p:cNvSpPr txBox="1"/>
+          <p:nvPr/>
+        </p:nvSpPr>
+        <p:spPr>
+          <a:xfrm>
+            <a:off x="548640" y="640080"/>
+            <a:ext cx="11064240" cy="1463040"/>
           </a:xfrm>
           <a:prstGeom prst="rect">
             <a:avLst/>
@@ -11661,65 +9927,34 @@
           <a:bodyPr wrap="square" lIns="0" tIns="0" rIns="0" bIns="0" rtlCol="0" anchor="ctr"/>
           <a:lstStyle/>
           <a:p>
-            <a:pPr indent="0" marL="0">
+            <a:pPr algn="ctr" indent="0" marL="0">
               <a:buNone/>
             </a:pPr>
             <a:r>
-              <a:rPr lang="en-US" sz="4000" b="1" dirty="0">
+              <a:rPr lang="en-US" sz="5400" b="1" dirty="0">
                 <a:solidFill>
                   <a:schemeClr val="tx2"/>
                 </a:solidFill>
+                <a:latin typeface="Cambria" pitchFamily="34" charset="0"/>
+                <a:ea typeface="Cambria" pitchFamily="34" charset="-122"/>
+                <a:cs typeface="Cambria" pitchFamily="34" charset="-120"/>
               </a:rPr>
-              <a:t>Here are 5 things we can start to sow</a:t>
-            </a:r>
-            <a:endParaRPr lang="en-US" sz="4000" dirty="0"/>
-          </a:p>
-        </p:txBody>
-      </p:sp>
-      <p:sp>
-        <p:nvSpPr>
-          <p:cNvPr id="4" name="Positive Attitudes card"/>
+              <a:t>Here are 5 things we can start to sow:</a:t>
+            </a:r>
+            <a:endParaRPr lang="en-US" sz="5400" dirty="0"/>
+          </a:p>
+        </p:txBody>
+      </p:sp>
+      <p:sp>
+        <p:nvSpPr>
+          <p:cNvPr id="4" name="Seed icon 1"/>
           <p:cNvSpPr/>
           <p:nvPr/>
         </p:nvSpPr>
         <p:spPr>
           <a:xfrm>
-            <a:off x="548640" y="1600200"/>
-            <a:ext cx="2048256" cy="4343400"/>
-          </a:xfrm>
-          <a:prstGeom prst="roundRect">
-            <a:avLst>
-              <a:gd name="adj" fmla="val 8929"/>
-            </a:avLst>
-          </a:prstGeom>
-          <a:solidFill>
-            <a:schemeClr val="bg1"/>
-          </a:solidFill>
-          <a:ln w="12700">
-            <a:solidFill>
-              <a:srgbClr val="DCEBD5"/>
-            </a:solidFill>
-            <a:prstDash val="solid"/>
-          </a:ln>
-          <a:effectLst>
-            <a:outerShdw sx="100000" sy="100000" kx="0" ky="0" algn="bl" rotWithShape="0" blurRad="127000" dist="38100" dir="5400000">
-              <a:srgbClr val="1E4D2B">
-                <a:alpha val="18000"/>
-              </a:srgbClr>
-            </a:outerShdw>
-          </a:effectLst>
-        </p:spPr>
-      </p:sp>
-      <p:sp>
-        <p:nvSpPr>
-          <p:cNvPr id="5" name="Positive Attitudes icon"/>
-          <p:cNvSpPr/>
-          <p:nvPr/>
-        </p:nvSpPr>
-        <p:spPr>
-          <a:xfrm>
-            <a:off x="886968" y="1920240"/>
-            <a:ext cx="1371600" cy="1371600"/>
+            <a:off x="868680" y="2834640"/>
+            <a:ext cx="1737360" cy="1737360"/>
           </a:xfrm>
           <a:prstGeom prst="ellipse">
             <a:avLst/>
@@ -11732,7 +9967,7 @@
       </p:sp>
       <p:pic>
         <p:nvPicPr>
-          <p:cNvPr id="6" name="Positive Attitudes icon glyph" descr="preencoded.png">    </p:cNvPr>
+          <p:cNvPr id="5" name="Seed icon 1 glyph" descr="preencoded.png">    </p:cNvPr>
           <p:cNvPicPr>
             <a:picLocks noChangeAspect="1"/>
           </p:cNvPicPr>
@@ -11746,8 +9981,8 @@
         </p:blipFill>
         <p:spPr>
           <a:xfrm>
-            <a:off x="1216152" y="2249424"/>
-            <a:ext cx="713232" cy="713232"/>
+            <a:off x="1285646" y="3251606"/>
+            <a:ext cx="903427" cy="903427"/>
           </a:xfrm>
           <a:prstGeom prst="rect">
             <a:avLst/>
@@ -11756,14 +9991,14 @@
       </p:pic>
       <p:sp>
         <p:nvSpPr>
-          <p:cNvPr id="7" name="Text 3"/>
+          <p:cNvPr id="6" name="Text 2"/>
           <p:cNvSpPr txBox="1"/>
           <p:nvPr/>
         </p:nvSpPr>
         <p:spPr>
           <a:xfrm>
-            <a:off x="548640" y="3429000"/>
-            <a:ext cx="2048256" cy="822960"/>
+            <a:off x="868680" y="4709160"/>
+            <a:ext cx="1737360" cy="822960"/>
           </a:xfrm>
           <a:prstGeom prst="rect">
             <a:avLst/>
@@ -11779,7 +10014,7 @@
               <a:buNone/>
             </a:pPr>
             <a:r>
-              <a:rPr lang="en-US" sz="4800" b="1" dirty="0">
+              <a:rPr lang="en-US" sz="4400" b="1" dirty="0">
                 <a:solidFill>
                   <a:schemeClr val="accent1"/>
                 </a:solidFill>
@@ -11789,90 +10024,20 @@
               </a:rPr>
               <a:t>1</a:t>
             </a:r>
-            <a:endParaRPr lang="en-US" sz="4800" dirty="0"/>
-          </a:p>
-        </p:txBody>
-      </p:sp>
-      <p:sp>
-        <p:nvSpPr>
-          <p:cNvPr id="8" name="Text 4"/>
-          <p:cNvSpPr txBox="1"/>
-          <p:nvPr/>
-        </p:nvSpPr>
-        <p:spPr>
-          <a:xfrm>
-            <a:off x="621792" y="4297680"/>
-            <a:ext cx="1901952" cy="1280160"/>
-          </a:xfrm>
-          <a:prstGeom prst="rect">
-            <a:avLst/>
-          </a:prstGeom>
-          <a:noFill/>
-          <a:ln/>
-        </p:spPr>
-        <p:txBody>
-          <a:bodyPr wrap="square" lIns="0" tIns="0" rIns="0" bIns="0" rtlCol="0" anchor="t"/>
-          <a:lstStyle/>
-          <a:p>
-            <a:pPr algn="ctr" indent="0" marL="0">
-              <a:buNone/>
-            </a:pPr>
-            <a:r>
-              <a:rPr lang="en-US" sz="2400" b="1" dirty="0">
-                <a:solidFill>
-                  <a:schemeClr val="tx2"/>
-                </a:solidFill>
-              </a:rPr>
-              <a:t>Positive Attitudes</a:t>
-            </a:r>
-            <a:endParaRPr lang="en-US" sz="2400" dirty="0"/>
-          </a:p>
-        </p:txBody>
-      </p:sp>
-      <p:sp>
-        <p:nvSpPr>
-          <p:cNvPr id="9" name="Integrity card"/>
+            <a:endParaRPr lang="en-US" sz="4400" dirty="0"/>
+          </a:p>
+        </p:txBody>
+      </p:sp>
+      <p:sp>
+        <p:nvSpPr>
+          <p:cNvPr id="7" name="Seed icon 2"/>
           <p:cNvSpPr/>
           <p:nvPr/>
         </p:nvSpPr>
         <p:spPr>
           <a:xfrm>
-            <a:off x="2816352" y="1600200"/>
-            <a:ext cx="2048256" cy="4343400"/>
-          </a:xfrm>
-          <a:prstGeom prst="roundRect">
-            <a:avLst>
-              <a:gd name="adj" fmla="val 8929"/>
-            </a:avLst>
-          </a:prstGeom>
-          <a:solidFill>
-            <a:schemeClr val="bg1"/>
-          </a:solidFill>
-          <a:ln w="12700">
-            <a:solidFill>
-              <a:srgbClr val="DCEBD5"/>
-            </a:solidFill>
-            <a:prstDash val="solid"/>
-          </a:ln>
-          <a:effectLst>
-            <a:outerShdw sx="100000" sy="100000" kx="0" ky="0" algn="bl" rotWithShape="0" blurRad="127000" dist="38100" dir="5400000">
-              <a:srgbClr val="1E4D2B">
-                <a:alpha val="18000"/>
-              </a:srgbClr>
-            </a:outerShdw>
-          </a:effectLst>
-        </p:spPr>
-      </p:sp>
-      <p:sp>
-        <p:nvSpPr>
-          <p:cNvPr id="10" name="Integrity icon"/>
-          <p:cNvSpPr/>
-          <p:nvPr/>
-        </p:nvSpPr>
-        <p:spPr>
-          <a:xfrm>
-            <a:off x="3154680" y="1920240"/>
-            <a:ext cx="1371600" cy="1371600"/>
+            <a:off x="3063240" y="2834640"/>
+            <a:ext cx="1737360" cy="1737360"/>
           </a:xfrm>
           <a:prstGeom prst="ellipse">
             <a:avLst/>
@@ -11885,7 +10050,7 @@
       </p:sp>
       <p:pic>
         <p:nvPicPr>
-          <p:cNvPr id="11" name="Integrity icon glyph" descr="preencoded.png">    </p:cNvPr>
+          <p:cNvPr id="8" name="Seed icon 2 glyph" descr="preencoded.png">    </p:cNvPr>
           <p:cNvPicPr>
             <a:picLocks noChangeAspect="1"/>
           </p:cNvPicPr>
@@ -11899,8 +10064,8 @@
         </p:blipFill>
         <p:spPr>
           <a:xfrm>
-            <a:off x="3483864" y="2249424"/>
-            <a:ext cx="713232" cy="713232"/>
+            <a:off x="3480206" y="3251606"/>
+            <a:ext cx="903427" cy="903427"/>
           </a:xfrm>
           <a:prstGeom prst="rect">
             <a:avLst/>
@@ -11909,14 +10074,14 @@
       </p:pic>
       <p:sp>
         <p:nvSpPr>
-          <p:cNvPr id="12" name="Text 7"/>
+          <p:cNvPr id="9" name="Text 4"/>
           <p:cNvSpPr txBox="1"/>
           <p:nvPr/>
         </p:nvSpPr>
         <p:spPr>
           <a:xfrm>
-            <a:off x="2816352" y="3429000"/>
-            <a:ext cx="2048256" cy="822960"/>
+            <a:off x="3063240" y="4709160"/>
+            <a:ext cx="1737360" cy="822960"/>
           </a:xfrm>
           <a:prstGeom prst="rect">
             <a:avLst/>
@@ -11932,7 +10097,7 @@
               <a:buNone/>
             </a:pPr>
             <a:r>
-              <a:rPr lang="en-US" sz="4800" b="1" dirty="0">
+              <a:rPr lang="en-US" sz="4400" b="1" dirty="0">
                 <a:solidFill>
                   <a:schemeClr val="accent2"/>
                 </a:solidFill>
@@ -11942,90 +10107,20 @@
               </a:rPr>
               <a:t>2</a:t>
             </a:r>
-            <a:endParaRPr lang="en-US" sz="4800" dirty="0"/>
-          </a:p>
-        </p:txBody>
-      </p:sp>
-      <p:sp>
-        <p:nvSpPr>
-          <p:cNvPr id="13" name="Text 8"/>
-          <p:cNvSpPr txBox="1"/>
-          <p:nvPr/>
-        </p:nvSpPr>
-        <p:spPr>
-          <a:xfrm>
-            <a:off x="2889504" y="4297680"/>
-            <a:ext cx="1901952" cy="1280160"/>
-          </a:xfrm>
-          <a:prstGeom prst="rect">
-            <a:avLst/>
-          </a:prstGeom>
-          <a:noFill/>
-          <a:ln/>
-        </p:spPr>
-        <p:txBody>
-          <a:bodyPr wrap="square" lIns="0" tIns="0" rIns="0" bIns="0" rtlCol="0" anchor="t"/>
-          <a:lstStyle/>
-          <a:p>
-            <a:pPr algn="ctr" indent="0" marL="0">
-              <a:buNone/>
-            </a:pPr>
-            <a:r>
-              <a:rPr lang="en-US" sz="2400" b="1" dirty="0">
-                <a:solidFill>
-                  <a:schemeClr val="tx2"/>
-                </a:solidFill>
-              </a:rPr>
-              <a:t>Integrity</a:t>
-            </a:r>
-            <a:endParaRPr lang="en-US" sz="2400" dirty="0"/>
-          </a:p>
-        </p:txBody>
-      </p:sp>
-      <p:sp>
-        <p:nvSpPr>
-          <p:cNvPr id="14" name="Spirituality card"/>
+            <a:endParaRPr lang="en-US" sz="4400" dirty="0"/>
+          </a:p>
+        </p:txBody>
+      </p:sp>
+      <p:sp>
+        <p:nvSpPr>
+          <p:cNvPr id="10" name="Seed icon 3"/>
           <p:cNvSpPr/>
           <p:nvPr/>
         </p:nvSpPr>
         <p:spPr>
           <a:xfrm>
-            <a:off x="5084064" y="1600200"/>
-            <a:ext cx="2048256" cy="4343400"/>
-          </a:xfrm>
-          <a:prstGeom prst="roundRect">
-            <a:avLst>
-              <a:gd name="adj" fmla="val 8929"/>
-            </a:avLst>
-          </a:prstGeom>
-          <a:solidFill>
-            <a:schemeClr val="bg1"/>
-          </a:solidFill>
-          <a:ln w="12700">
-            <a:solidFill>
-              <a:srgbClr val="DCEBD5"/>
-            </a:solidFill>
-            <a:prstDash val="solid"/>
-          </a:ln>
-          <a:effectLst>
-            <a:outerShdw sx="100000" sy="100000" kx="0" ky="0" algn="bl" rotWithShape="0" blurRad="127000" dist="38100" dir="5400000">
-              <a:srgbClr val="1E4D2B">
-                <a:alpha val="18000"/>
-              </a:srgbClr>
-            </a:outerShdw>
-          </a:effectLst>
-        </p:spPr>
-      </p:sp>
-      <p:sp>
-        <p:nvSpPr>
-          <p:cNvPr id="15" name="Spirituality icon"/>
-          <p:cNvSpPr/>
-          <p:nvPr/>
-        </p:nvSpPr>
-        <p:spPr>
-          <a:xfrm>
-            <a:off x="5422392" y="1920240"/>
-            <a:ext cx="1371600" cy="1371600"/>
+            <a:off x="5257800" y="2834640"/>
+            <a:ext cx="1737360" cy="1737360"/>
           </a:xfrm>
           <a:prstGeom prst="ellipse">
             <a:avLst/>
@@ -12038,7 +10133,7 @@
       </p:sp>
       <p:pic>
         <p:nvPicPr>
-          <p:cNvPr id="16" name="Spirituality icon glyph" descr="preencoded.png">    </p:cNvPr>
+          <p:cNvPr id="11" name="Seed icon 3 glyph" descr="preencoded.png">    </p:cNvPr>
           <p:cNvPicPr>
             <a:picLocks noChangeAspect="1"/>
           </p:cNvPicPr>
@@ -12052,8 +10147,8 @@
         </p:blipFill>
         <p:spPr>
           <a:xfrm>
-            <a:off x="5751576" y="2249424"/>
-            <a:ext cx="713232" cy="713232"/>
+            <a:off x="5674766" y="3251606"/>
+            <a:ext cx="903427" cy="903427"/>
           </a:xfrm>
           <a:prstGeom prst="rect">
             <a:avLst/>
@@ -12062,14 +10157,14 @@
       </p:pic>
       <p:sp>
         <p:nvSpPr>
-          <p:cNvPr id="17" name="Text 11"/>
+          <p:cNvPr id="12" name="Text 6"/>
           <p:cNvSpPr txBox="1"/>
           <p:nvPr/>
         </p:nvSpPr>
         <p:spPr>
           <a:xfrm>
-            <a:off x="5084064" y="3429000"/>
-            <a:ext cx="2048256" cy="822960"/>
+            <a:off x="5257800" y="4709160"/>
+            <a:ext cx="1737360" cy="822960"/>
           </a:xfrm>
           <a:prstGeom prst="rect">
             <a:avLst/>
@@ -12085,7 +10180,7 @@
               <a:buNone/>
             </a:pPr>
             <a:r>
-              <a:rPr lang="en-US" sz="4800" b="1" dirty="0">
+              <a:rPr lang="en-US" sz="4400" b="1" dirty="0">
                 <a:solidFill>
                   <a:schemeClr val="accent3"/>
                 </a:solidFill>
@@ -12095,90 +10190,20 @@
               </a:rPr>
               <a:t>3</a:t>
             </a:r>
-            <a:endParaRPr lang="en-US" sz="4800" dirty="0"/>
-          </a:p>
-        </p:txBody>
-      </p:sp>
-      <p:sp>
-        <p:nvSpPr>
-          <p:cNvPr id="18" name="Text 12"/>
-          <p:cNvSpPr txBox="1"/>
-          <p:nvPr/>
-        </p:nvSpPr>
-        <p:spPr>
-          <a:xfrm>
-            <a:off x="5157216" y="4297680"/>
-            <a:ext cx="1901952" cy="1280160"/>
-          </a:xfrm>
-          <a:prstGeom prst="rect">
-            <a:avLst/>
-          </a:prstGeom>
-          <a:noFill/>
-          <a:ln/>
-        </p:spPr>
-        <p:txBody>
-          <a:bodyPr wrap="square" lIns="0" tIns="0" rIns="0" bIns="0" rtlCol="0" anchor="t"/>
-          <a:lstStyle/>
-          <a:p>
-            <a:pPr algn="ctr" indent="0" marL="0">
-              <a:buNone/>
-            </a:pPr>
-            <a:r>
-              <a:rPr lang="en-US" sz="2400" b="1" dirty="0">
-                <a:solidFill>
-                  <a:schemeClr val="tx2"/>
-                </a:solidFill>
-              </a:rPr>
-              <a:t>Spirituality</a:t>
-            </a:r>
-            <a:endParaRPr lang="en-US" sz="2400" dirty="0"/>
-          </a:p>
-        </p:txBody>
-      </p:sp>
-      <p:sp>
-        <p:nvSpPr>
-          <p:cNvPr id="19" name="Discipline card"/>
+            <a:endParaRPr lang="en-US" sz="4400" dirty="0"/>
+          </a:p>
+        </p:txBody>
+      </p:sp>
+      <p:sp>
+        <p:nvSpPr>
+          <p:cNvPr id="13" name="Seed icon 4"/>
           <p:cNvSpPr/>
           <p:nvPr/>
         </p:nvSpPr>
         <p:spPr>
           <a:xfrm>
-            <a:off x="7351776" y="1600200"/>
-            <a:ext cx="2048256" cy="4343400"/>
-          </a:xfrm>
-          <a:prstGeom prst="roundRect">
-            <a:avLst>
-              <a:gd name="adj" fmla="val 8929"/>
-            </a:avLst>
-          </a:prstGeom>
-          <a:solidFill>
-            <a:schemeClr val="bg1"/>
-          </a:solidFill>
-          <a:ln w="12700">
-            <a:solidFill>
-              <a:srgbClr val="DCEBD5"/>
-            </a:solidFill>
-            <a:prstDash val="solid"/>
-          </a:ln>
-          <a:effectLst>
-            <a:outerShdw sx="100000" sy="100000" kx="0" ky="0" algn="bl" rotWithShape="0" blurRad="127000" dist="38100" dir="5400000">
-              <a:srgbClr val="1E4D2B">
-                <a:alpha val="18000"/>
-              </a:srgbClr>
-            </a:outerShdw>
-          </a:effectLst>
-        </p:spPr>
-      </p:sp>
-      <p:sp>
-        <p:nvSpPr>
-          <p:cNvPr id="20" name="Discipline icon"/>
-          <p:cNvSpPr/>
-          <p:nvPr/>
-        </p:nvSpPr>
-        <p:spPr>
-          <a:xfrm>
-            <a:off x="7690104" y="1920240"/>
-            <a:ext cx="1371600" cy="1371600"/>
+            <a:off x="7452360" y="2834640"/>
+            <a:ext cx="1737360" cy="1737360"/>
           </a:xfrm>
           <a:prstGeom prst="ellipse">
             <a:avLst/>
@@ -12191,7 +10216,7 @@
       </p:sp>
       <p:pic>
         <p:nvPicPr>
-          <p:cNvPr id="21" name="Discipline icon glyph" descr="preencoded.png">    </p:cNvPr>
+          <p:cNvPr id="14" name="Seed icon 4 glyph" descr="preencoded.png">    </p:cNvPr>
           <p:cNvPicPr>
             <a:picLocks noChangeAspect="1"/>
           </p:cNvPicPr>
@@ -12205,8 +10230,8 @@
         </p:blipFill>
         <p:spPr>
           <a:xfrm>
-            <a:off x="8019288" y="2249424"/>
-            <a:ext cx="713232" cy="713232"/>
+            <a:off x="7869326" y="3251606"/>
+            <a:ext cx="903427" cy="903427"/>
           </a:xfrm>
           <a:prstGeom prst="rect">
             <a:avLst/>
@@ -12215,14 +10240,14 @@
       </p:pic>
       <p:sp>
         <p:nvSpPr>
-          <p:cNvPr id="22" name="Text 15"/>
+          <p:cNvPr id="15" name="Text 8"/>
           <p:cNvSpPr txBox="1"/>
           <p:nvPr/>
         </p:nvSpPr>
         <p:spPr>
           <a:xfrm>
-            <a:off x="7351776" y="3429000"/>
-            <a:ext cx="2048256" cy="822960"/>
+            <a:off x="7452360" y="4709160"/>
+            <a:ext cx="1737360" cy="822960"/>
           </a:xfrm>
           <a:prstGeom prst="rect">
             <a:avLst/>
@@ -12238,7 +10263,7 @@
               <a:buNone/>
             </a:pPr>
             <a:r>
-              <a:rPr lang="en-US" sz="4800" b="1" dirty="0">
+              <a:rPr lang="en-US" sz="4400" b="1" dirty="0">
                 <a:solidFill>
                   <a:schemeClr val="accent4"/>
                 </a:solidFill>
@@ -12248,90 +10273,20 @@
               </a:rPr>
               <a:t>4</a:t>
             </a:r>
-            <a:endParaRPr lang="en-US" sz="4800" dirty="0"/>
-          </a:p>
-        </p:txBody>
-      </p:sp>
-      <p:sp>
-        <p:nvSpPr>
-          <p:cNvPr id="23" name="Text 16"/>
-          <p:cNvSpPr txBox="1"/>
-          <p:nvPr/>
-        </p:nvSpPr>
-        <p:spPr>
-          <a:xfrm>
-            <a:off x="7424928" y="4297680"/>
-            <a:ext cx="1901952" cy="1280160"/>
-          </a:xfrm>
-          <a:prstGeom prst="rect">
-            <a:avLst/>
-          </a:prstGeom>
-          <a:noFill/>
-          <a:ln/>
-        </p:spPr>
-        <p:txBody>
-          <a:bodyPr wrap="square" lIns="0" tIns="0" rIns="0" bIns="0" rtlCol="0" anchor="t"/>
-          <a:lstStyle/>
-          <a:p>
-            <a:pPr algn="ctr" indent="0" marL="0">
-              <a:buNone/>
-            </a:pPr>
-            <a:r>
-              <a:rPr lang="en-US" sz="2400" b="1" dirty="0">
-                <a:solidFill>
-                  <a:schemeClr val="tx2"/>
-                </a:solidFill>
-              </a:rPr>
-              <a:t>Discipline</a:t>
-            </a:r>
-            <a:endParaRPr lang="en-US" sz="2400" dirty="0"/>
-          </a:p>
-        </p:txBody>
-      </p:sp>
-      <p:sp>
-        <p:nvSpPr>
-          <p:cNvPr id="24" name="A Correct Image card"/>
+            <a:endParaRPr lang="en-US" sz="4400" dirty="0"/>
+          </a:p>
+        </p:txBody>
+      </p:sp>
+      <p:sp>
+        <p:nvSpPr>
+          <p:cNvPr id="16" name="Seed icon 5"/>
           <p:cNvSpPr/>
           <p:nvPr/>
         </p:nvSpPr>
         <p:spPr>
           <a:xfrm>
-            <a:off x="9619488" y="1600200"/>
-            <a:ext cx="2048256" cy="4343400"/>
-          </a:xfrm>
-          <a:prstGeom prst="roundRect">
-            <a:avLst>
-              <a:gd name="adj" fmla="val 8929"/>
-            </a:avLst>
-          </a:prstGeom>
-          <a:solidFill>
-            <a:schemeClr val="bg1"/>
-          </a:solidFill>
-          <a:ln w="12700">
-            <a:solidFill>
-              <a:srgbClr val="DCEBD5"/>
-            </a:solidFill>
-            <a:prstDash val="solid"/>
-          </a:ln>
-          <a:effectLst>
-            <a:outerShdw sx="100000" sy="100000" kx="0" ky="0" algn="bl" rotWithShape="0" blurRad="127000" dist="38100" dir="5400000">
-              <a:srgbClr val="1E4D2B">
-                <a:alpha val="18000"/>
-              </a:srgbClr>
-            </a:outerShdw>
-          </a:effectLst>
-        </p:spPr>
-      </p:sp>
-      <p:sp>
-        <p:nvSpPr>
-          <p:cNvPr id="25" name="A Correct Image icon"/>
-          <p:cNvSpPr/>
-          <p:nvPr/>
-        </p:nvSpPr>
-        <p:spPr>
-          <a:xfrm>
-            <a:off x="9957816" y="1920240"/>
-            <a:ext cx="1371600" cy="1371600"/>
+            <a:off x="9646920" y="2834640"/>
+            <a:ext cx="1737360" cy="1737360"/>
           </a:xfrm>
           <a:prstGeom prst="ellipse">
             <a:avLst/>
@@ -12344,7 +10299,7 @@
       </p:sp>
       <p:pic>
         <p:nvPicPr>
-          <p:cNvPr id="26" name="A Correct Image icon glyph" descr="preencoded.png">    </p:cNvPr>
+          <p:cNvPr id="17" name="Seed icon 5 glyph" descr="preencoded.png">    </p:cNvPr>
           <p:cNvPicPr>
             <a:picLocks noChangeAspect="1"/>
           </p:cNvPicPr>
@@ -12358,8 +10313,8 @@
         </p:blipFill>
         <p:spPr>
           <a:xfrm>
-            <a:off x="10287000" y="2249424"/>
-            <a:ext cx="713232" cy="713232"/>
+            <a:off x="10063886" y="3251606"/>
+            <a:ext cx="903427" cy="903427"/>
           </a:xfrm>
           <a:prstGeom prst="rect">
             <a:avLst/>
@@ -12368,14 +10323,14 @@
       </p:pic>
       <p:sp>
         <p:nvSpPr>
-          <p:cNvPr id="27" name="Text 19"/>
+          <p:cNvPr id="18" name="Text 10"/>
           <p:cNvSpPr txBox="1"/>
           <p:nvPr/>
         </p:nvSpPr>
         <p:spPr>
           <a:xfrm>
-            <a:off x="9619488" y="3429000"/>
-            <a:ext cx="2048256" cy="822960"/>
+            <a:off x="9646920" y="4709160"/>
+            <a:ext cx="1737360" cy="822960"/>
           </a:xfrm>
           <a:prstGeom prst="rect">
             <a:avLst/>
@@ -12391,7 +10346,7 @@
               <a:buNone/>
             </a:pPr>
             <a:r>
-              <a:rPr lang="en-US" sz="4800" b="1" dirty="0">
+              <a:rPr lang="en-US" sz="4400" b="1" dirty="0">
                 <a:solidFill>
                   <a:schemeClr val="accent5"/>
                 </a:solidFill>
@@ -12401,43 +10356,7 @@
               </a:rPr>
               <a:t>5</a:t>
             </a:r>
-            <a:endParaRPr lang="en-US" sz="4800" dirty="0"/>
-          </a:p>
-        </p:txBody>
-      </p:sp>
-      <p:sp>
-        <p:nvSpPr>
-          <p:cNvPr id="28" name="Text 20"/>
-          <p:cNvSpPr txBox="1"/>
-          <p:nvPr/>
-        </p:nvSpPr>
-        <p:spPr>
-          <a:xfrm>
-            <a:off x="9692640" y="4297680"/>
-            <a:ext cx="1901952" cy="1280160"/>
-          </a:xfrm>
-          <a:prstGeom prst="rect">
-            <a:avLst/>
-          </a:prstGeom>
-          <a:noFill/>
-          <a:ln/>
-        </p:spPr>
-        <p:txBody>
-          <a:bodyPr wrap="square" lIns="0" tIns="0" rIns="0" bIns="0" rtlCol="0" anchor="t"/>
-          <a:lstStyle/>
-          <a:p>
-            <a:pPr algn="ctr" indent="0" marL="0">
-              <a:buNone/>
-            </a:pPr>
-            <a:r>
-              <a:rPr lang="en-US" sz="2400" b="1" dirty="0">
-                <a:solidFill>
-                  <a:schemeClr val="tx2"/>
-                </a:solidFill>
-              </a:rPr>
-              <a:t>A Correct Image</a:t>
-            </a:r>
-            <a:endParaRPr lang="en-US" sz="2400" dirty="0"/>
+            <a:endParaRPr lang="en-US" sz="4400" dirty="0"/>
           </a:p>
         </p:txBody>
       </p:sp>
@@ -12522,8 +10441,8 @@
         </p:nvSpPr>
         <p:spPr>
           <a:xfrm>
-            <a:off x="548640" y="914400"/>
-            <a:ext cx="2743200" cy="4206240"/>
+            <a:off x="365760" y="914400"/>
+            <a:ext cx="3291840" cy="4206240"/>
           </a:xfrm>
           <a:prstGeom prst="rect">
             <a:avLst/>
@@ -12539,7 +10458,7 @@
               <a:buNone/>
             </a:pPr>
             <a:r>
-              <a:rPr lang="en-US" sz="28000" b="1" dirty="0">
+              <a:rPr lang="en-US" sz="25000" b="1" dirty="0">
                 <a:solidFill>
                   <a:schemeClr val="accent1"/>
                 </a:solidFill>
@@ -12547,22 +10466,22 @@
                 <a:ea typeface="Cambria" pitchFamily="34" charset="-122"/>
                 <a:cs typeface="Cambria" pitchFamily="34" charset="-120"/>
               </a:rPr>
-              <a:t>1</a:t>
-            </a:r>
-            <a:endParaRPr lang="en-US" sz="28000" dirty="0"/>
-          </a:p>
-        </p:txBody>
-      </p:sp>
-      <p:sp>
-        <p:nvSpPr>
-          <p:cNvPr id="4" name="Kicker"/>
+              <a:t>1.</a:t>
+            </a:r>
+            <a:endParaRPr lang="en-US" sz="25000" dirty="0"/>
+          </a:p>
+        </p:txBody>
+      </p:sp>
+      <p:sp>
+        <p:nvSpPr>
+          <p:cNvPr id="4" name="Section title"/>
           <p:cNvSpPr txBox="1"/>
           <p:nvPr/>
         </p:nvSpPr>
         <p:spPr>
           <a:xfrm>
-            <a:off x="3474720" y="1965960"/>
-            <a:ext cx="5120640" cy="640080"/>
+            <a:off x="3749040" y="1737360"/>
+            <a:ext cx="5029200" cy="3108960"/>
           </a:xfrm>
           <a:prstGeom prst="rect">
             <a:avLst/>
@@ -12572,42 +10491,6 @@
         </p:spPr>
         <p:txBody>
           <a:bodyPr wrap="square" lIns="0" tIns="0" rIns="0" bIns="0" rtlCol="0" anchor="ctr"/>
-          <a:lstStyle/>
-          <a:p>
-            <a:pPr indent="0" marL="0">
-              <a:buNone/>
-            </a:pPr>
-            <a:r>
-              <a:rPr lang="en-US" sz="3000" b="1" spc="1000" kern="0" dirty="0">
-                <a:solidFill>
-                  <a:schemeClr val="bg2"/>
-                </a:solidFill>
-              </a:rPr>
-              <a:t>SOW</a:t>
-            </a:r>
-            <a:endParaRPr lang="en-US" sz="3000" dirty="0"/>
-          </a:p>
-        </p:txBody>
-      </p:sp>
-      <p:sp>
-        <p:nvSpPr>
-          <p:cNvPr id="5" name="Section title"/>
-          <p:cNvSpPr txBox="1"/>
-          <p:nvPr/>
-        </p:nvSpPr>
-        <p:spPr>
-          <a:xfrm>
-            <a:off x="3474720" y="2606040"/>
-            <a:ext cx="5303520" cy="2011680"/>
-          </a:xfrm>
-          <a:prstGeom prst="rect">
-            <a:avLst/>
-          </a:prstGeom>
-          <a:noFill/>
-          <a:ln/>
-        </p:spPr>
-        <p:txBody>
-          <a:bodyPr wrap="square" lIns="0" tIns="0" rIns="0" bIns="0" rtlCol="0" anchor="t"/>
           <a:lstStyle/>
           <a:p>
             <a:pPr indent="0" marL="0">
@@ -12622,7 +10505,7 @@
                 <a:ea typeface="Cambria" pitchFamily="34" charset="-122"/>
                 <a:cs typeface="Cambria" pitchFamily="34" charset="-120"/>
               </a:rPr>
-              <a:t>Positive Attitudes</a:t>
+              <a:t>Sow Positive Attitudes</a:t>
             </a:r>
             <a:endParaRPr lang="en-US" sz="6000" dirty="0"/>
           </a:p>
@@ -12630,43 +10513,7 @@
       </p:sp>
       <p:sp>
         <p:nvSpPr>
-          <p:cNvPr id="6" name="Progress"/>
-          <p:cNvSpPr txBox="1"/>
-          <p:nvPr/>
-        </p:nvSpPr>
-        <p:spPr>
-          <a:xfrm>
-            <a:off x="3474720" y="4800600"/>
-            <a:ext cx="5120640" cy="548640"/>
-          </a:xfrm>
-          <a:prstGeom prst="rect">
-            <a:avLst/>
-          </a:prstGeom>
-          <a:noFill/>
-          <a:ln/>
-        </p:spPr>
-        <p:txBody>
-          <a:bodyPr wrap="square" lIns="0" tIns="0" rIns="0" bIns="0" rtlCol="0" anchor="ctr"/>
-          <a:lstStyle/>
-          <a:p>
-            <a:pPr indent="0" marL="0">
-              <a:buNone/>
-            </a:pPr>
-            <a:r>
-              <a:rPr lang="en-US" sz="2400" i="1" dirty="0">
-                <a:solidFill>
-                  <a:schemeClr val="accent1"/>
-                </a:solidFill>
-              </a:rPr>
-              <a:t>Seed 1 of 5</a:t>
-            </a:r>
-            <a:endParaRPr lang="en-US" sz="2400" dirty="0"/>
-          </a:p>
-        </p:txBody>
-      </p:sp>
-      <p:sp>
-        <p:nvSpPr>
-          <p:cNvPr id="7" name="Section icon"/>
+          <p:cNvPr id="5" name="Section icon"/>
           <p:cNvSpPr/>
           <p:nvPr/>
         </p:nvSpPr>
@@ -12686,7 +10533,7 @@
       </p:sp>
       <p:pic>
         <p:nvPicPr>
-          <p:cNvPr id="8" name="Section icon glyph" descr="preencoded.png">    </p:cNvPr>
+          <p:cNvPr id="6" name="Section icon glyph" descr="preencoded.png">    </p:cNvPr>
           <p:cNvPicPr>
             <a:picLocks noChangeAspect="1"/>
           </p:cNvPicPr>
@@ -12738,7 +10585,7 @@
       </p:grpSpPr>
       <p:sp>
         <p:nvSpPr>
-          <p:cNvPr id="2" name="Text 0"/>
+          <p:cNvPr id="3" name="Text 0"/>
           <p:cNvSpPr/>
           <p:nvPr>
             <p:ph idx="100" type="title" hasCustomPrompt="1"/>
@@ -12776,7 +10623,7 @@
       </p:sp>
       <p:sp>
         <p:nvSpPr>
-          <p:cNvPr id="3" name="Point icon"/>
+          <p:cNvPr id="4" name="Point icon"/>
           <p:cNvSpPr/>
           <p:nvPr/>
         </p:nvSpPr>
@@ -12796,7 +10643,7 @@
       </p:sp>
       <p:pic>
         <p:nvPicPr>
-          <p:cNvPr id="4" name="Point icon glyph" descr="preencoded.png">    </p:cNvPr>
+          <p:cNvPr id="5" name="Point icon glyph" descr="preencoded.png">    </p:cNvPr>
           <p:cNvPicPr>
             <a:picLocks noChangeAspect="1"/>
           </p:cNvPicPr>
@@ -12820,7 +10667,7 @@
       </p:pic>
       <p:sp>
         <p:nvSpPr>
-          <p:cNvPr id="5" name="Verse card"/>
+          <p:cNvPr id="6" name="Verse card"/>
           <p:cNvSpPr/>
           <p:nvPr/>
         </p:nvSpPr>
@@ -12849,7 +10696,7 @@
       </p:sp>
       <p:sp>
         <p:nvSpPr>
-          <p:cNvPr id="6" name="Verse"/>
+          <p:cNvPr id="7" name="Verse"/>
           <p:cNvSpPr txBox="1"/>
           <p:nvPr/>
         </p:nvSpPr>
@@ -12880,35 +10727,7 @@
                   <a:schemeClr val="tx1"/>
                 </a:solidFill>
               </a:rPr>
-              <a:t>Do not let any unwholesome talk come out of your mouths, but only what is </a:t>
-            </a:r>
-            <a:pPr indent="0" marL="0">
-              <a:lnSpc>
-                <a:spcPct val="105000"/>
-              </a:lnSpc>
-              <a:buNone/>
-            </a:pPr>
-            <a:r>
-              <a:rPr lang="en-US" sz="3200" b="1" dirty="0">
-                <a:solidFill>
-                  <a:schemeClr val="tx2"/>
-                </a:solidFill>
-              </a:rPr>
-              <a:t>helpful for building others up</a:t>
-            </a:r>
-            <a:pPr indent="0" marL="0">
-              <a:lnSpc>
-                <a:spcPct val="105000"/>
-              </a:lnSpc>
-              <a:buNone/>
-            </a:pPr>
-            <a:r>
-              <a:rPr lang="en-US" sz="3200" dirty="0">
-                <a:solidFill>
-                  <a:schemeClr val="tx1"/>
-                </a:solidFill>
-              </a:rPr>
-              <a:t> according to their needs, that it may benefit those who listen.</a:t>
+              <a:t>Do not let any unwholesome talk come out of your mouths, but only what is helpful for building others up according to their needs, that it may benefit those who listen.</a:t>
             </a:r>
             <a:endParaRPr lang="en-US" sz="3200" dirty="0"/>
           </a:p>
@@ -12916,7 +10735,7 @@
       </p:sp>
       <p:sp>
         <p:nvSpPr>
-          <p:cNvPr id="7" name="Reference"/>
+          <p:cNvPr id="8" name="Reference"/>
           <p:cNvSpPr txBox="1"/>
           <p:nvPr/>
         </p:nvSpPr>
@@ -13025,7 +10844,7 @@
       </p:grpSpPr>
       <p:sp>
         <p:nvSpPr>
-          <p:cNvPr id="2" name="Text 0"/>
+          <p:cNvPr id="3" name="Text 0"/>
           <p:cNvSpPr/>
           <p:nvPr>
             <p:ph idx="100" type="title" hasCustomPrompt="1"/>
@@ -13063,7 +10882,7 @@
       </p:sp>
       <p:sp>
         <p:nvSpPr>
-          <p:cNvPr id="3" name="Point icon"/>
+          <p:cNvPr id="4" name="Point icon"/>
           <p:cNvSpPr/>
           <p:nvPr/>
         </p:nvSpPr>
@@ -13083,7 +10902,7 @@
       </p:sp>
       <p:pic>
         <p:nvPicPr>
-          <p:cNvPr id="4" name="Point icon glyph" descr="preencoded.png">    </p:cNvPr>
+          <p:cNvPr id="5" name="Point icon glyph" descr="preencoded.png">    </p:cNvPr>
           <p:cNvPicPr>
             <a:picLocks noChangeAspect="1"/>
           </p:cNvPicPr>
@@ -13107,7 +10926,7 @@
       </p:pic>
       <p:sp>
         <p:nvSpPr>
-          <p:cNvPr id="5" name="Verse card"/>
+          <p:cNvPr id="6" name="Verse card"/>
           <p:cNvSpPr/>
           <p:nvPr/>
         </p:nvSpPr>
@@ -13136,7 +10955,7 @@
       </p:sp>
       <p:sp>
         <p:nvSpPr>
-          <p:cNvPr id="6" name="Verse"/>
+          <p:cNvPr id="7" name="Verse"/>
           <p:cNvSpPr txBox="1"/>
           <p:nvPr/>
         </p:nvSpPr>
@@ -13167,35 +10986,7 @@
                   <a:schemeClr val="tx1"/>
                 </a:solidFill>
               </a:rPr>
-              <a:t>In the same way, let your light shine before men, that they may </a:t>
-            </a:r>
-            <a:pPr indent="0" marL="0">
-              <a:lnSpc>
-                <a:spcPct val="105000"/>
-              </a:lnSpc>
-              <a:buNone/>
-            </a:pPr>
-            <a:r>
-              <a:rPr lang="en-US" sz="3200" b="1" dirty="0">
-                <a:solidFill>
-                  <a:schemeClr val="tx2"/>
-                </a:solidFill>
-              </a:rPr>
-              <a:t>see your good deeds</a:t>
-            </a:r>
-            <a:pPr indent="0" marL="0">
-              <a:lnSpc>
-                <a:spcPct val="105000"/>
-              </a:lnSpc>
-              <a:buNone/>
-            </a:pPr>
-            <a:r>
-              <a:rPr lang="en-US" sz="3200" dirty="0">
-                <a:solidFill>
-                  <a:schemeClr val="tx1"/>
-                </a:solidFill>
-              </a:rPr>
-              <a:t> and praise your Father in heaven.</a:t>
+              <a:t>In the same way, let your light shine before men, that they may see your good deeds and praise your Father in heaven.</a:t>
             </a:r>
             <a:endParaRPr lang="en-US" sz="3200" dirty="0"/>
           </a:p>
@@ -13203,7 +10994,7 @@
       </p:sp>
       <p:sp>
         <p:nvSpPr>
-          <p:cNvPr id="7" name="Reference"/>
+          <p:cNvPr id="8" name="Reference"/>
           <p:cNvSpPr txBox="1"/>
           <p:nvPr/>
         </p:nvSpPr>
@@ -13342,7 +11133,7 @@
                   <a:schemeClr val="tx2"/>
                 </a:solidFill>
               </a:rPr>
-              <a:t>III. Be kind and loving to others</a:t>
+              <a:t>III. Be kind and loving in how you relate to others</a:t>
             </a:r>
             <a:endParaRPr lang="en-US" sz="4000" dirty="0"/>
           </a:p>
@@ -13454,21 +11245,7 @@
                   <a:schemeClr val="tx1"/>
                 </a:solidFill>
               </a:rPr>
-              <a:t>Get rid of all bitterness, rage and anger, brawling and slander, along with every form of malice. </a:t>
-            </a:r>
-            <a:pPr indent="0" marL="0">
-              <a:lnSpc>
-                <a:spcPct val="105000"/>
-              </a:lnSpc>
-              <a:buNone/>
-            </a:pPr>
-            <a:r>
-              <a:rPr lang="en-US" sz="3200" b="1" dirty="0">
-                <a:solidFill>
-                  <a:schemeClr val="tx2"/>
-                </a:solidFill>
-              </a:rPr>
-              <a:t>Be kind and compassionate to one another…</a:t>
+              <a:t>Get rid of all bitterness, rage and anger, brawling and slander, along with every form of malice.  Be kind and compassionate to one another…</a:t>
             </a:r>
             <a:endParaRPr lang="en-US" sz="3200" dirty="0"/>
           </a:p>
